--- a/output/LLM_Self_Correction_ICLR2024_Group_Presentation-v9.pptx
+++ b/output/LLM_Self_Correction_ICLR2024_Group_Presentation-v9.pptx
@@ -173,7 +173,7 @@
                     <a:solidFill>
                       <a:srgbClr val="0F172A"/>
                     </a:solidFill>
-                    <a:latin typeface="Arial"/>
+                    <a:latin typeface="Cambria"/>
                   </a:defRPr>
                 </a:pPr>
               </a:p>
@@ -274,7 +274,7 @@
                     <a:solidFill>
                       <a:srgbClr val="0F172A"/>
                     </a:solidFill>
-                    <a:latin typeface="Arial"/>
+                    <a:latin typeface="Cambria"/>
                   </a:defRPr>
                 </a:pPr>
               </a:p>
@@ -375,7 +375,7 @@
                     <a:solidFill>
                       <a:srgbClr val="0F172A"/>
                     </a:solidFill>
-                    <a:latin typeface="Arial"/>
+                    <a:latin typeface="Cambria"/>
                   </a:defRPr>
                 </a:pPr>
               </a:p>
@@ -455,7 +455,7 @@
                   <a:solidFill>
                     <a:srgbClr val="0F172A"/>
                   </a:solidFill>
-                  <a:latin typeface="Arial"/>
+                  <a:latin typeface="Cambria"/>
                 </a:defRPr>
               </a:pPr>
             </a:p>
@@ -503,7 +503,7 @@
                 <a:solidFill>
                   <a:srgbClr val="0F172A"/>
                 </a:solidFill>
-                <a:latin typeface="Arial"/>
+                <a:latin typeface="Cambria"/>
               </a:defRPr>
             </a:pPr>
             <a:endParaRPr lang="en-US"/>
@@ -556,7 +556,7 @@
                 <a:solidFill>
                   <a:srgbClr val="64748B"/>
                 </a:solidFill>
-                <a:latin typeface="Arial"/>
+                <a:latin typeface="Cambria"/>
               </a:defRPr>
             </a:pPr>
             <a:endParaRPr lang="en-US"/>
@@ -586,6 +586,8 @@
               <a:solidFill>
                 <a:srgbClr val="0F172A"/>
               </a:solidFill>
+              <a:latin typeface="Cambria"/>
+              <a:cs typeface="Cambria"/>
             </a:defRPr>
           </a:pPr>
           <a:endParaRPr lang="en-US"/>
@@ -652,7 +654,7 @@
                     <a:solidFill>
                       <a:srgbClr val="0F172A"/>
                     </a:solidFill>
-                    <a:latin typeface="Arial"/>
+                    <a:latin typeface="Cambria"/>
                   </a:defRPr>
                 </a:pPr>
               </a:p>
@@ -741,7 +743,7 @@
                     <a:solidFill>
                       <a:srgbClr val="0F172A"/>
                     </a:solidFill>
-                    <a:latin typeface="Arial"/>
+                    <a:latin typeface="Cambria"/>
                   </a:defRPr>
                 </a:pPr>
               </a:p>
@@ -830,7 +832,7 @@
                     <a:solidFill>
                       <a:srgbClr val="0F172A"/>
                     </a:solidFill>
-                    <a:latin typeface="Arial"/>
+                    <a:latin typeface="Cambria"/>
                   </a:defRPr>
                 </a:pPr>
               </a:p>
@@ -898,7 +900,7 @@
                   <a:solidFill>
                     <a:srgbClr val="0F172A"/>
                   </a:solidFill>
-                  <a:latin typeface="Arial"/>
+                  <a:latin typeface="Cambria"/>
                 </a:defRPr>
               </a:pPr>
             </a:p>
@@ -946,7 +948,7 @@
                 <a:solidFill>
                   <a:srgbClr val="0F172A"/>
                 </a:solidFill>
-                <a:latin typeface="Arial"/>
+                <a:latin typeface="Cambria"/>
               </a:defRPr>
             </a:pPr>
             <a:endParaRPr lang="en-US"/>
@@ -999,7 +1001,7 @@
                 <a:solidFill>
                   <a:srgbClr val="64748B"/>
                 </a:solidFill>
-                <a:latin typeface="Arial"/>
+                <a:latin typeface="Cambria"/>
               </a:defRPr>
             </a:pPr>
             <a:endParaRPr lang="en-US"/>
@@ -1029,6 +1031,8 @@
               <a:solidFill>
                 <a:srgbClr val="0F172A"/>
               </a:solidFill>
+              <a:latin typeface="Cambria"/>
+              <a:cs typeface="Cambria"/>
             </a:defRPr>
           </a:pPr>
           <a:endParaRPr lang="en-US"/>
@@ -1142,7 +1146,7 @@
                       <a:solidFill>
                         <a:srgbClr val="FFFFFF"/>
                       </a:solidFill>
-                      <a:latin typeface="Arial"/>
+                      <a:latin typeface="Cambria"/>
                     </a:defRPr>
                   </a:pPr>
                 </a:p>
@@ -1167,7 +1171,7 @@
                       <a:solidFill>
                         <a:srgbClr val="FFFFFF"/>
                       </a:solidFill>
-                      <a:latin typeface="Arial"/>
+                      <a:latin typeface="Cambria"/>
                     </a:defRPr>
                   </a:pPr>
                 </a:p>
@@ -1192,7 +1196,7 @@
                       <a:solidFill>
                         <a:srgbClr val="FFFFFF"/>
                       </a:solidFill>
-                      <a:latin typeface="Arial"/>
+                      <a:latin typeface="Cambria"/>
                     </a:defRPr>
                   </a:pPr>
                 </a:p>
@@ -1217,7 +1221,7 @@
                       <a:solidFill>
                         <a:srgbClr val="FFFFFF"/>
                       </a:solidFill>
-                      <a:latin typeface="Arial"/>
+                      <a:latin typeface="Cambria"/>
                     </a:defRPr>
                   </a:pPr>
                 </a:p>
@@ -1316,6 +1320,8 @@
               <a:solidFill>
                 <a:srgbClr val="0F172A"/>
               </a:solidFill>
+              <a:latin typeface="Cambria"/>
+              <a:cs typeface="Cambria"/>
             </a:defRPr>
           </a:pPr>
           <a:endParaRPr lang="en-US"/>
@@ -1382,7 +1388,7 @@
                     <a:solidFill>
                       <a:srgbClr val="0F172A"/>
                     </a:solidFill>
-                    <a:latin typeface="Arial"/>
+                    <a:latin typeface="Cambria"/>
                   </a:defRPr>
                 </a:pPr>
               </a:p>
@@ -1465,7 +1471,7 @@
                     <a:solidFill>
                       <a:srgbClr val="0F172A"/>
                     </a:solidFill>
-                    <a:latin typeface="Arial"/>
+                    <a:latin typeface="Cambria"/>
                   </a:defRPr>
                 </a:pPr>
               </a:p>
@@ -1548,7 +1554,7 @@
                     <a:solidFill>
                       <a:srgbClr val="0F172A"/>
                     </a:solidFill>
-                    <a:latin typeface="Arial"/>
+                    <a:latin typeface="Cambria"/>
                   </a:defRPr>
                 </a:pPr>
               </a:p>
@@ -1610,7 +1616,7 @@
                   <a:solidFill>
                     <a:srgbClr val="0F172A"/>
                   </a:solidFill>
-                  <a:latin typeface="Arial"/>
+                  <a:latin typeface="Cambria"/>
                 </a:defRPr>
               </a:pPr>
             </a:p>
@@ -1658,7 +1664,7 @@
                 <a:solidFill>
                   <a:srgbClr val="0F172A"/>
                 </a:solidFill>
-                <a:latin typeface="Arial"/>
+                <a:latin typeface="Cambria"/>
               </a:defRPr>
             </a:pPr>
             <a:endParaRPr lang="en-US"/>
@@ -1711,7 +1717,7 @@
                 <a:solidFill>
                   <a:srgbClr val="64748B"/>
                 </a:solidFill>
-                <a:latin typeface="Arial"/>
+                <a:latin typeface="Cambria"/>
               </a:defRPr>
             </a:pPr>
             <a:endParaRPr lang="en-US"/>
@@ -1741,6 +1747,8 @@
               <a:solidFill>
                 <a:srgbClr val="0F172A"/>
               </a:solidFill>
+              <a:latin typeface="Cambria"/>
+              <a:cs typeface="Cambria"/>
             </a:defRPr>
           </a:pPr>
           <a:endParaRPr lang="en-US"/>
@@ -4523,9 +4531,9 @@
                 <a:solidFill>
                   <a:srgbClr val="800020"/>
                 </a:solidFill>
-                <a:latin typeface="Calibri" pitchFamily="34" charset="0"/>
-                <a:ea typeface="Calibri" pitchFamily="34" charset="-122"/>
-                <a:cs typeface="Calibri" pitchFamily="34" charset="-120"/>
+                <a:latin typeface="Cambria" pitchFamily="34" charset="0"/>
+                <a:ea typeface="Cambria" pitchFamily="34" charset="-122"/>
+                <a:cs typeface="Cambria" pitchFamily="34" charset="-120"/>
               </a:rPr>
               <a:t>ICLR 2024 CONFERENCE PAPER</a:t>
             </a:r>
@@ -4624,9 +4632,9 @@
                 <a:solidFill>
                   <a:srgbClr val="64748B"/>
                 </a:solidFill>
-                <a:latin typeface="Calibri" pitchFamily="34" charset="0"/>
-                <a:ea typeface="Calibri" pitchFamily="34" charset="-122"/>
-                <a:cs typeface="Calibri" pitchFamily="34" charset="-120"/>
+                <a:latin typeface="Cambria" pitchFamily="34" charset="0"/>
+                <a:ea typeface="Cambria" pitchFamily="34" charset="-122"/>
+                <a:cs typeface="Cambria" pitchFamily="34" charset="-120"/>
               </a:rPr>
               <a:t>Jie Huang (UIUC), Xinyun Chen, Swaroop Mishra, Huaixiu Steven Zheng, Adams Wei Yu, Xinying Song, Denny Zhou (Google DeepMind)</a:t>
             </a:r>
@@ -4690,9 +4698,9 @@
                 <a:solidFill>
                   <a:srgbClr val="800020"/>
                 </a:solidFill>
-                <a:latin typeface="Calibri" pitchFamily="34" charset="0"/>
-                <a:ea typeface="Calibri" pitchFamily="34" charset="-122"/>
-                <a:cs typeface="Calibri" pitchFamily="34" charset="-120"/>
+                <a:latin typeface="Cambria" pitchFamily="34" charset="0"/>
+                <a:ea typeface="Cambria" pitchFamily="34" charset="-122"/>
+                <a:cs typeface="Cambria" pitchFamily="34" charset="-120"/>
               </a:rPr>
               <a:t>Group Presentation | Student Presenters</a:t>
             </a:r>
@@ -4756,9 +4764,9 @@
                 <a:solidFill>
                   <a:srgbClr val="1E293B"/>
                 </a:solidFill>
-                <a:latin typeface="Calibri" pitchFamily="34" charset="0"/>
-                <a:ea typeface="Calibri" pitchFamily="34" charset="-122"/>
-                <a:cs typeface="Calibri" pitchFamily="34" charset="-120"/>
+                <a:latin typeface="Cambria" pitchFamily="34" charset="0"/>
+                <a:ea typeface="Cambria" pitchFamily="34" charset="-122"/>
+                <a:cs typeface="Cambria" pitchFamily="34" charset="-120"/>
               </a:rPr>
               <a:t>1. Nafis Islam Kabbo (2303180)</a:t>
             </a:r>
@@ -4822,9 +4830,9 @@
                 <a:solidFill>
                   <a:srgbClr val="1E293B"/>
                 </a:solidFill>
-                <a:latin typeface="Calibri" pitchFamily="34" charset="0"/>
-                <a:ea typeface="Calibri" pitchFamily="34" charset="-122"/>
-                <a:cs typeface="Calibri" pitchFamily="34" charset="-120"/>
+                <a:latin typeface="Cambria" pitchFamily="34" charset="0"/>
+                <a:ea typeface="Cambria" pitchFamily="34" charset="-122"/>
+                <a:cs typeface="Cambria" pitchFamily="34" charset="-120"/>
               </a:rPr>
               <a:t>2. Srijon (2303179)</a:t>
             </a:r>
@@ -4888,9 +4896,9 @@
                 <a:solidFill>
                   <a:srgbClr val="1E293B"/>
                 </a:solidFill>
-                <a:latin typeface="Calibri" pitchFamily="34" charset="0"/>
-                <a:ea typeface="Calibri" pitchFamily="34" charset="-122"/>
-                <a:cs typeface="Calibri" pitchFamily="34" charset="-120"/>
+                <a:latin typeface="Cambria" pitchFamily="34" charset="0"/>
+                <a:ea typeface="Cambria" pitchFamily="34" charset="-122"/>
+                <a:cs typeface="Cambria" pitchFamily="34" charset="-120"/>
               </a:rPr>
               <a:t>3. Anindo (2303181)</a:t>
             </a:r>
@@ -4954,9 +4962,9 @@
                 <a:solidFill>
                   <a:srgbClr val="1E293B"/>
                 </a:solidFill>
-                <a:latin typeface="Calibri" pitchFamily="34" charset="0"/>
-                <a:ea typeface="Calibri" pitchFamily="34" charset="-122"/>
-                <a:cs typeface="Calibri" pitchFamily="34" charset="-120"/>
+                <a:latin typeface="Cambria" pitchFamily="34" charset="0"/>
+                <a:ea typeface="Cambria" pitchFamily="34" charset="-122"/>
+                <a:cs typeface="Cambria" pitchFamily="34" charset="-120"/>
               </a:rPr>
               <a:t>4. Mahid (2303127)</a:t>
             </a:r>
@@ -5020,9 +5028,9 @@
                 <a:solidFill>
                   <a:srgbClr val="1E293B"/>
                 </a:solidFill>
-                <a:latin typeface="Calibri" pitchFamily="34" charset="0"/>
-                <a:ea typeface="Calibri" pitchFamily="34" charset="-122"/>
-                <a:cs typeface="Calibri" pitchFamily="34" charset="-120"/>
+                <a:latin typeface="Cambria" pitchFamily="34" charset="0"/>
+                <a:ea typeface="Cambria" pitchFamily="34" charset="-122"/>
+                <a:cs typeface="Cambria" pitchFamily="34" charset="-120"/>
               </a:rPr>
               <a:t>5. Jebon (2303160)</a:t>
             </a:r>
@@ -5086,9 +5094,9 @@
                 <a:solidFill>
                   <a:srgbClr val="1E293B"/>
                 </a:solidFill>
-                <a:latin typeface="Calibri" pitchFamily="34" charset="0"/>
-                <a:ea typeface="Calibri" pitchFamily="34" charset="-122"/>
-                <a:cs typeface="Calibri" pitchFamily="34" charset="-120"/>
+                <a:latin typeface="Cambria" pitchFamily="34" charset="0"/>
+                <a:ea typeface="Cambria" pitchFamily="34" charset="-122"/>
+                <a:cs typeface="Cambria" pitchFamily="34" charset="-120"/>
               </a:rPr>
               <a:t>6. Refayet (2303148)</a:t>
             </a:r>
@@ -5125,9 +5133,9 @@
                 <a:solidFill>
                   <a:srgbClr val="64748B"/>
                 </a:solidFill>
-                <a:latin typeface="Calibri" pitchFamily="34" charset="0"/>
-                <a:ea typeface="Calibri" pitchFamily="34" charset="-122"/>
-                <a:cs typeface="Calibri" pitchFamily="34" charset="-120"/>
+                <a:latin typeface="Cambria" pitchFamily="34" charset="0"/>
+                <a:ea typeface="Cambria" pitchFamily="34" charset="-122"/>
+                <a:cs typeface="Cambria" pitchFamily="34" charset="-120"/>
               </a:rPr>
               <a:t>Large Language Models Cannot Self-Correct Reasoning Yet | ICLR 2024</a:t>
             </a:r>
@@ -5164,9 +5172,9 @@
                 <a:solidFill>
                   <a:srgbClr val="64748B"/>
                 </a:solidFill>
-                <a:latin typeface="Calibri" pitchFamily="34" charset="0"/>
-                <a:ea typeface="Calibri" pitchFamily="34" charset="-122"/>
-                <a:cs typeface="Calibri" pitchFamily="34" charset="-120"/>
+                <a:latin typeface="Cambria" pitchFamily="34" charset="0"/>
+                <a:ea typeface="Cambria" pitchFamily="34" charset="-122"/>
+                <a:cs typeface="Cambria" pitchFamily="34" charset="-120"/>
               </a:rPr>
               <a:t>01/23</a:t>
             </a:r>
@@ -5235,9 +5243,9 @@
                 <a:solidFill>
                   <a:srgbClr val="800020"/>
                 </a:solidFill>
-                <a:latin typeface="Calibri" pitchFamily="34" charset="0"/>
-                <a:ea typeface="Calibri" pitchFamily="34" charset="-122"/>
-                <a:cs typeface="Calibri" pitchFamily="34" charset="-120"/>
+                <a:latin typeface="Cambria" pitchFamily="34" charset="0"/>
+                <a:ea typeface="Cambria" pitchFamily="34" charset="-122"/>
+                <a:cs typeface="Cambria" pitchFamily="34" charset="-120"/>
               </a:rPr>
               <a:t>3. METHODOLOGY</a:t>
             </a:r>
@@ -5313,9 +5321,9 @@
                 <a:solidFill>
                   <a:srgbClr val="64748B"/>
                 </a:solidFill>
-                <a:latin typeface="Calibri" pitchFamily="34" charset="0"/>
-                <a:ea typeface="Calibri" pitchFamily="34" charset="-122"/>
-                <a:cs typeface="Calibri" pitchFamily="34" charset="-120"/>
+                <a:latin typeface="Cambria" pitchFamily="34" charset="0"/>
+                <a:ea typeface="Cambria" pitchFamily="34" charset="-122"/>
+                <a:cs typeface="Cambria" pitchFamily="34" charset="-120"/>
               </a:rPr>
               <a:t>Four LLMs under standardized conditions</a:t>
             </a:r>
@@ -5438,9 +5446,9 @@
                 <a:solidFill>
                   <a:srgbClr val="FFFFFF"/>
                 </a:solidFill>
-                <a:latin typeface="Calibri" pitchFamily="34" charset="0"/>
-                <a:ea typeface="Calibri" pitchFamily="34" charset="-122"/>
-                <a:cs typeface="Calibri" pitchFamily="34" charset="-120"/>
+                <a:latin typeface="Cambria" pitchFamily="34" charset="0"/>
+                <a:ea typeface="Cambria" pitchFamily="34" charset="-122"/>
+                <a:cs typeface="Cambria" pitchFamily="34" charset="-120"/>
               </a:rPr>
               <a:t>1</a:t>
             </a:r>
@@ -5516,9 +5524,9 @@
                 <a:solidFill>
                   <a:srgbClr val="64748B"/>
                 </a:solidFill>
-                <a:latin typeface="Calibri" pitchFamily="34" charset="0"/>
-                <a:ea typeface="Calibri" pitchFamily="34" charset="-122"/>
-                <a:cs typeface="Calibri" pitchFamily="34" charset="-120"/>
+                <a:latin typeface="Cambria" pitchFamily="34" charset="0"/>
+                <a:ea typeface="Cambria" pitchFamily="34" charset="-122"/>
+                <a:cs typeface="Cambria" pitchFamily="34" charset="-120"/>
               </a:rPr>
               <a:t>gpt-3.5-turbo-0613</a:t>
             </a:r>
@@ -5575,9 +5583,9 @@
                 <a:solidFill>
                   <a:srgbClr val="FFFFFF"/>
                 </a:solidFill>
-                <a:latin typeface="Calibri" pitchFamily="34" charset="0"/>
-                <a:ea typeface="Calibri" pitchFamily="34" charset="-122"/>
-                <a:cs typeface="Calibri" pitchFamily="34" charset="-120"/>
+                <a:latin typeface="Cambria" pitchFamily="34" charset="0"/>
+                <a:ea typeface="Cambria" pitchFamily="34" charset="-122"/>
+                <a:cs typeface="Cambria" pitchFamily="34" charset="-120"/>
               </a:rPr>
               <a:t>2</a:t>
             </a:r>
@@ -5653,9 +5661,9 @@
                 <a:solidFill>
                   <a:srgbClr val="64748B"/>
                 </a:solidFill>
-                <a:latin typeface="Calibri" pitchFamily="34" charset="0"/>
-                <a:ea typeface="Calibri" pitchFamily="34" charset="-122"/>
-                <a:cs typeface="Calibri" pitchFamily="34" charset="-120"/>
+                <a:latin typeface="Cambria" pitchFamily="34" charset="0"/>
+                <a:ea typeface="Cambria" pitchFamily="34" charset="-122"/>
+                <a:cs typeface="Cambria" pitchFamily="34" charset="-120"/>
               </a:rPr>
               <a:t>Snapshot 2023/08/29</a:t>
             </a:r>
@@ -5712,9 +5720,9 @@
                 <a:solidFill>
                   <a:srgbClr val="FFFFFF"/>
                 </a:solidFill>
-                <a:latin typeface="Calibri" pitchFamily="34" charset="0"/>
-                <a:ea typeface="Calibri" pitchFamily="34" charset="-122"/>
-                <a:cs typeface="Calibri" pitchFamily="34" charset="-120"/>
+                <a:latin typeface="Cambria" pitchFamily="34" charset="0"/>
+                <a:ea typeface="Cambria" pitchFamily="34" charset="-122"/>
+                <a:cs typeface="Cambria" pitchFamily="34" charset="-120"/>
               </a:rPr>
               <a:t>3</a:t>
             </a:r>
@@ -5790,9 +5798,9 @@
                 <a:solidFill>
                   <a:srgbClr val="64748B"/>
                 </a:solidFill>
-                <a:latin typeface="Calibri" pitchFamily="34" charset="0"/>
-                <a:ea typeface="Calibri" pitchFamily="34" charset="-122"/>
-                <a:cs typeface="Calibri" pitchFamily="34" charset="-120"/>
+                <a:latin typeface="Cambria" pitchFamily="34" charset="0"/>
+                <a:ea typeface="Cambria" pitchFamily="34" charset="-122"/>
+                <a:cs typeface="Cambria" pitchFamily="34" charset="-120"/>
               </a:rPr>
               <a:t>gpt-4-1106-preview</a:t>
             </a:r>
@@ -5849,9 +5857,9 @@
                 <a:solidFill>
                   <a:srgbClr val="FFFFFF"/>
                 </a:solidFill>
-                <a:latin typeface="Calibri" pitchFamily="34" charset="0"/>
-                <a:ea typeface="Calibri" pitchFamily="34" charset="-122"/>
-                <a:cs typeface="Calibri" pitchFamily="34" charset="-120"/>
+                <a:latin typeface="Cambria" pitchFamily="34" charset="0"/>
+                <a:ea typeface="Cambria" pitchFamily="34" charset="-122"/>
+                <a:cs typeface="Cambria" pitchFamily="34" charset="-120"/>
               </a:rPr>
               <a:t>4</a:t>
             </a:r>
@@ -5927,9 +5935,9 @@
                 <a:solidFill>
                   <a:srgbClr val="64748B"/>
                 </a:solidFill>
-                <a:latin typeface="Calibri" pitchFamily="34" charset="0"/>
-                <a:ea typeface="Calibri" pitchFamily="34" charset="-122"/>
-                <a:cs typeface="Calibri" pitchFamily="34" charset="-120"/>
+                <a:latin typeface="Cambria" pitchFamily="34" charset="0"/>
+                <a:ea typeface="Cambria" pitchFamily="34" charset="-122"/>
+                <a:cs typeface="Cambria" pitchFamily="34" charset="-120"/>
               </a:rPr>
               <a:t>Open-weight 70B baseline</a:t>
             </a:r>
@@ -6052,9 +6060,9 @@
                 <a:solidFill>
                   <a:srgbClr val="1E293B"/>
                 </a:solidFill>
-                <a:latin typeface="Calibri" pitchFamily="34" charset="0"/>
-                <a:ea typeface="Calibri" pitchFamily="34" charset="-122"/>
-                <a:cs typeface="Calibri" pitchFamily="34" charset="-120"/>
+                <a:latin typeface="Cambria" pitchFamily="34" charset="0"/>
+                <a:ea typeface="Cambria" pitchFamily="34" charset="-122"/>
+                <a:cs typeface="Cambria" pitchFamily="34" charset="-120"/>
               </a:rPr>
               <a:t>CoT few/zero-shot prompting</a:t>
             </a:r>
@@ -6111,9 +6119,9 @@
                 <a:solidFill>
                   <a:srgbClr val="1E293B"/>
                 </a:solidFill>
-                <a:latin typeface="Calibri" pitchFamily="34" charset="0"/>
-                <a:ea typeface="Calibri" pitchFamily="34" charset="-122"/>
-                <a:cs typeface="Calibri" pitchFamily="34" charset="-120"/>
+                <a:latin typeface="Cambria" pitchFamily="34" charset="0"/>
+                <a:ea typeface="Cambria" pitchFamily="34" charset="-122"/>
+                <a:cs typeface="Cambria" pitchFamily="34" charset="-120"/>
               </a:rPr>
               <a:t>Temp: 1.0 (GPT), 0.7 (Llama)</a:t>
             </a:r>
@@ -6170,9 +6178,9 @@
                 <a:solidFill>
                   <a:srgbClr val="1E293B"/>
                 </a:solidFill>
-                <a:latin typeface="Calibri" pitchFamily="34" charset="0"/>
-                <a:ea typeface="Calibri" pitchFamily="34" charset="-122"/>
-                <a:cs typeface="Calibri" pitchFamily="34" charset="-120"/>
+                <a:latin typeface="Cambria" pitchFamily="34" charset="0"/>
+                <a:ea typeface="Cambria" pitchFamily="34" charset="-122"/>
+                <a:cs typeface="Cambria" pitchFamily="34" charset="-120"/>
               </a:rPr>
               <a:t>Max 2 correction rounds</a:t>
             </a:r>
@@ -6229,9 +6237,9 @@
                 <a:solidFill>
                   <a:srgbClr val="1E293B"/>
                 </a:solidFill>
-                <a:latin typeface="Calibri" pitchFamily="34" charset="0"/>
-                <a:ea typeface="Calibri" pitchFamily="34" charset="-122"/>
-                <a:cs typeface="Calibri" pitchFamily="34" charset="-120"/>
+                <a:latin typeface="Cambria" pitchFamily="34" charset="0"/>
+                <a:ea typeface="Cambria" pitchFamily="34" charset="-122"/>
+                <a:cs typeface="Cambria" pitchFamily="34" charset="-120"/>
               </a:rPr>
               <a:t>Generic feedback prompts</a:t>
             </a:r>
@@ -6288,9 +6296,9 @@
                 <a:solidFill>
                   <a:srgbClr val="1E293B"/>
                 </a:solidFill>
-                <a:latin typeface="Calibri" pitchFamily="34" charset="0"/>
-                <a:ea typeface="Calibri" pitchFamily="34" charset="-122"/>
-                <a:cs typeface="Calibri" pitchFamily="34" charset="-120"/>
+                <a:latin typeface="Cambria" pitchFamily="34" charset="0"/>
+                <a:ea typeface="Cambria" pitchFamily="34" charset="-122"/>
+                <a:cs typeface="Cambria" pitchFamily="34" charset="-120"/>
               </a:rPr>
               <a:t>Intrinsic vs Oracle comparison</a:t>
             </a:r>
@@ -6327,9 +6335,9 @@
                 <a:solidFill>
                   <a:srgbClr val="64748B"/>
                 </a:solidFill>
-                <a:latin typeface="Calibri" pitchFamily="34" charset="0"/>
-                <a:ea typeface="Calibri" pitchFamily="34" charset="-122"/>
-                <a:cs typeface="Calibri" pitchFamily="34" charset="-120"/>
+                <a:latin typeface="Cambria" pitchFamily="34" charset="0"/>
+                <a:ea typeface="Cambria" pitchFamily="34" charset="-122"/>
+                <a:cs typeface="Cambria" pitchFamily="34" charset="-120"/>
               </a:rPr>
               <a:t>Large Language Models Cannot Self-Correct Reasoning Yet | ICLR 2024</a:t>
             </a:r>
@@ -6366,9 +6374,9 @@
                 <a:solidFill>
                   <a:srgbClr val="64748B"/>
                 </a:solidFill>
-                <a:latin typeface="Calibri" pitchFamily="34" charset="0"/>
-                <a:ea typeface="Calibri" pitchFamily="34" charset="-122"/>
-                <a:cs typeface="Calibri" pitchFamily="34" charset="-120"/>
+                <a:latin typeface="Cambria" pitchFamily="34" charset="0"/>
+                <a:ea typeface="Cambria" pitchFamily="34" charset="-122"/>
+                <a:cs typeface="Cambria" pitchFamily="34" charset="-120"/>
               </a:rPr>
               <a:t>10/23</a:t>
             </a:r>
@@ -6437,9 +6445,9 @@
                 <a:solidFill>
                   <a:srgbClr val="800020"/>
                 </a:solidFill>
-                <a:latin typeface="Calibri" pitchFamily="34" charset="0"/>
-                <a:ea typeface="Calibri" pitchFamily="34" charset="-122"/>
-                <a:cs typeface="Calibri" pitchFamily="34" charset="-120"/>
+                <a:latin typeface="Cambria" pitchFamily="34" charset="0"/>
+                <a:ea typeface="Cambria" pitchFamily="34" charset="-122"/>
+                <a:cs typeface="Cambria" pitchFamily="34" charset="-120"/>
               </a:rPr>
               <a:t>3. METHODOLOGY</a:t>
             </a:r>
@@ -6515,9 +6523,9 @@
                 <a:solidFill>
                   <a:srgbClr val="64748B"/>
                 </a:solidFill>
-                <a:latin typeface="Calibri" pitchFamily="34" charset="0"/>
-                <a:ea typeface="Calibri" pitchFamily="34" charset="-122"/>
-                <a:cs typeface="Calibri" pitchFamily="34" charset="-120"/>
+                <a:latin typeface="Cambria" pitchFamily="34" charset="0"/>
+                <a:ea typeface="Cambria" pitchFamily="34" charset="-122"/>
+                <a:cs typeface="Cambria" pitchFamily="34" charset="-120"/>
               </a:rPr>
               <a:t>Flow: intrinsic vs oracle regimes</a:t>
             </a:r>
@@ -6601,9 +6609,9 @@
                 <a:solidFill>
                   <a:srgbClr val="FFFFFF"/>
                 </a:solidFill>
-                <a:latin typeface="Calibri" pitchFamily="34" charset="0"/>
-                <a:ea typeface="Calibri" pitchFamily="34" charset="-122"/>
-                <a:cs typeface="Calibri" pitchFamily="34" charset="-120"/>
+                <a:latin typeface="Cambria" pitchFamily="34" charset="0"/>
+                <a:ea typeface="Cambria" pitchFamily="34" charset="-122"/>
+                <a:cs typeface="Cambria" pitchFamily="34" charset="-120"/>
               </a:rPr>
               <a:t>1</a:t>
             </a:r>
@@ -6679,9 +6687,9 @@
                 <a:solidFill>
                   <a:srgbClr val="1E293B"/>
                 </a:solidFill>
-                <a:latin typeface="Calibri" pitchFamily="34" charset="0"/>
-                <a:ea typeface="Calibri" pitchFamily="34" charset="-122"/>
-                <a:cs typeface="Calibri" pitchFamily="34" charset="-120"/>
+                <a:latin typeface="Cambria" pitchFamily="34" charset="0"/>
+                <a:ea typeface="Cambria" pitchFamily="34" charset="-122"/>
+                <a:cs typeface="Cambria" pitchFamily="34" charset="-120"/>
               </a:rPr>
               <a:t>Generate draft</a:t>
             </a:r>
@@ -6790,9 +6798,9 @@
                 <a:solidFill>
                   <a:srgbClr val="FFFFFF"/>
                 </a:solidFill>
-                <a:latin typeface="Calibri" pitchFamily="34" charset="0"/>
-                <a:ea typeface="Calibri" pitchFamily="34" charset="-122"/>
-                <a:cs typeface="Calibri" pitchFamily="34" charset="-120"/>
+                <a:latin typeface="Cambria" pitchFamily="34" charset="0"/>
+                <a:ea typeface="Cambria" pitchFamily="34" charset="-122"/>
+                <a:cs typeface="Cambria" pitchFamily="34" charset="-120"/>
               </a:rPr>
               <a:t>2</a:t>
             </a:r>
@@ -6868,9 +6876,9 @@
                 <a:solidFill>
                   <a:srgbClr val="1E293B"/>
                 </a:solidFill>
-                <a:latin typeface="Calibri" pitchFamily="34" charset="0"/>
-                <a:ea typeface="Calibri" pitchFamily="34" charset="-122"/>
-                <a:cs typeface="Calibri" pitchFamily="34" charset="-120"/>
+                <a:latin typeface="Cambria" pitchFamily="34" charset="0"/>
+                <a:ea typeface="Cambria" pitchFamily="34" charset="-122"/>
+                <a:cs typeface="Cambria" pitchFamily="34" charset="-120"/>
               </a:rPr>
               <a:t>Review logic</a:t>
             </a:r>
@@ -6979,9 +6987,9 @@
                 <a:solidFill>
                   <a:srgbClr val="FFFFFF"/>
                 </a:solidFill>
-                <a:latin typeface="Calibri" pitchFamily="34" charset="0"/>
-                <a:ea typeface="Calibri" pitchFamily="34" charset="-122"/>
-                <a:cs typeface="Calibri" pitchFamily="34" charset="-120"/>
+                <a:latin typeface="Cambria" pitchFamily="34" charset="0"/>
+                <a:ea typeface="Cambria" pitchFamily="34" charset="-122"/>
+                <a:cs typeface="Cambria" pitchFamily="34" charset="-120"/>
               </a:rPr>
               <a:t>3</a:t>
             </a:r>
@@ -7057,9 +7065,9 @@
                 <a:solidFill>
                   <a:srgbClr val="1E293B"/>
                 </a:solidFill>
-                <a:latin typeface="Calibri" pitchFamily="34" charset="0"/>
-                <a:ea typeface="Calibri" pitchFamily="34" charset="-122"/>
-                <a:cs typeface="Calibri" pitchFamily="34" charset="-120"/>
+                <a:latin typeface="Cambria" pitchFamily="34" charset="0"/>
+                <a:ea typeface="Cambria" pitchFamily="34" charset="-122"/>
+                <a:cs typeface="Cambria" pitchFamily="34" charset="-120"/>
               </a:rPr>
               <a:t>New reasoning</a:t>
             </a:r>
@@ -7168,9 +7176,9 @@
                 <a:solidFill>
                   <a:srgbClr val="FFFFFF"/>
                 </a:solidFill>
-                <a:latin typeface="Calibri" pitchFamily="34" charset="0"/>
-                <a:ea typeface="Calibri" pitchFamily="34" charset="-122"/>
-                <a:cs typeface="Calibri" pitchFamily="34" charset="-120"/>
+                <a:latin typeface="Cambria" pitchFamily="34" charset="0"/>
+                <a:ea typeface="Cambria" pitchFamily="34" charset="-122"/>
+                <a:cs typeface="Cambria" pitchFamily="34" charset="-120"/>
               </a:rPr>
               <a:t>4</a:t>
             </a:r>
@@ -7246,9 +7254,9 @@
                 <a:solidFill>
                   <a:srgbClr val="1E293B"/>
                 </a:solidFill>
-                <a:latin typeface="Calibri" pitchFamily="34" charset="0"/>
-                <a:ea typeface="Calibri" pitchFamily="34" charset="-122"/>
-                <a:cs typeface="Calibri" pitchFamily="34" charset="-120"/>
+                <a:latin typeface="Cambria" pitchFamily="34" charset="0"/>
+                <a:ea typeface="Cambria" pitchFamily="34" charset="-122"/>
+                <a:cs typeface="Cambria" pitchFamily="34" charset="-120"/>
               </a:rPr>
               <a:t>Round 2 repeat</a:t>
             </a:r>
@@ -7332,9 +7340,9 @@
                 <a:solidFill>
                   <a:srgbClr val="FFFFFF"/>
                 </a:solidFill>
-                <a:latin typeface="Calibri" pitchFamily="34" charset="0"/>
-                <a:ea typeface="Calibri" pitchFamily="34" charset="-122"/>
-                <a:cs typeface="Calibri" pitchFamily="34" charset="-120"/>
+                <a:latin typeface="Cambria" pitchFamily="34" charset="0"/>
+                <a:ea typeface="Cambria" pitchFamily="34" charset="-122"/>
+                <a:cs typeface="Cambria" pitchFamily="34" charset="-120"/>
               </a:rPr>
               <a:t>✓</a:t>
             </a:r>
@@ -7413,9 +7421,9 @@
                 <a:solidFill>
                   <a:srgbClr val="1E293B"/>
                 </a:solidFill>
-                <a:latin typeface="Calibri" pitchFamily="34" charset="0"/>
-                <a:ea typeface="Calibri" pitchFamily="34" charset="-122"/>
-                <a:cs typeface="Calibri" pitchFamily="34" charset="-120"/>
+                <a:latin typeface="Cambria" pitchFamily="34" charset="0"/>
+                <a:ea typeface="Cambria" pitchFamily="34" charset="-122"/>
+                <a:cs typeface="Cambria" pitchFamily="34" charset="-120"/>
               </a:rPr>
               <a:t>• Verifier checks answer</a:t>
             </a:r>
@@ -7433,9 +7441,9 @@
                 <a:solidFill>
                   <a:srgbClr val="1E293B"/>
                 </a:solidFill>
-                <a:latin typeface="Calibri" pitchFamily="34" charset="0"/>
-                <a:ea typeface="Calibri" pitchFamily="34" charset="-122"/>
-                <a:cs typeface="Calibri" pitchFamily="34" charset="-120"/>
+                <a:latin typeface="Cambria" pitchFamily="34" charset="0"/>
+                <a:ea typeface="Cambria" pitchFamily="34" charset="-122"/>
+                <a:cs typeface="Cambria" pitchFamily="34" charset="-120"/>
               </a:rPr>
               <a:t>• Tells model WHEN wrong</a:t>
             </a:r>
@@ -7453,9 +7461,9 @@
                 <a:solidFill>
                   <a:srgbClr val="1E293B"/>
                 </a:solidFill>
-                <a:latin typeface="Calibri" pitchFamily="34" charset="0"/>
-                <a:ea typeface="Calibri" pitchFamily="34" charset="-122"/>
-                <a:cs typeface="Calibri" pitchFamily="34" charset="-120"/>
+                <a:latin typeface="Cambria" pitchFamily="34" charset="0"/>
+                <a:ea typeface="Cambria" pitchFamily="34" charset="-122"/>
+                <a:cs typeface="Cambria" pitchFamily="34" charset="-120"/>
               </a:rPr>
               <a:t>• Correct answers untouched -&gt; inflated</a:t>
             </a:r>
@@ -7539,9 +7547,9 @@
                 <a:solidFill>
                   <a:srgbClr val="FFFFFF"/>
                 </a:solidFill>
-                <a:latin typeface="Calibri" pitchFamily="34" charset="0"/>
-                <a:ea typeface="Calibri" pitchFamily="34" charset="-122"/>
-                <a:cs typeface="Calibri" pitchFamily="34" charset="-120"/>
+                <a:latin typeface="Cambria" pitchFamily="34" charset="0"/>
+                <a:ea typeface="Cambria" pitchFamily="34" charset="-122"/>
+                <a:cs typeface="Cambria" pitchFamily="34" charset="-120"/>
               </a:rPr>
               <a:t>✗</a:t>
             </a:r>
@@ -7620,9 +7628,9 @@
                 <a:solidFill>
                   <a:srgbClr val="1E293B"/>
                 </a:solidFill>
-                <a:latin typeface="Calibri" pitchFamily="34" charset="0"/>
-                <a:ea typeface="Calibri" pitchFamily="34" charset="-122"/>
-                <a:cs typeface="Calibri" pitchFamily="34" charset="-120"/>
+                <a:latin typeface="Cambria" pitchFamily="34" charset="0"/>
+                <a:ea typeface="Cambria" pitchFamily="34" charset="-122"/>
+                <a:cs typeface="Cambria" pitchFamily="34" charset="-120"/>
               </a:rPr>
               <a:t>• No external signal</a:t>
             </a:r>
@@ -7640,9 +7648,9 @@
                 <a:solidFill>
                   <a:srgbClr val="1E293B"/>
                 </a:solidFill>
-                <a:latin typeface="Calibri" pitchFamily="34" charset="0"/>
-                <a:ea typeface="Calibri" pitchFamily="34" charset="-122"/>
-                <a:cs typeface="Calibri" pitchFamily="34" charset="-120"/>
+                <a:latin typeface="Cambria" pitchFamily="34" charset="0"/>
+                <a:ea typeface="Cambria" pitchFamily="34" charset="-122"/>
+                <a:cs typeface="Cambria" pitchFamily="34" charset="-120"/>
               </a:rPr>
               <a:t>• Model judges itself blindly</a:t>
             </a:r>
@@ -7660,9 +7668,9 @@
                 <a:solidFill>
                   <a:srgbClr val="1E293B"/>
                 </a:solidFill>
-                <a:latin typeface="Calibri" pitchFamily="34" charset="0"/>
-                <a:ea typeface="Calibri" pitchFamily="34" charset="-122"/>
-                <a:cs typeface="Calibri" pitchFamily="34" charset="-120"/>
+                <a:latin typeface="Cambria" pitchFamily="34" charset="0"/>
+                <a:ea typeface="Cambria" pitchFamily="34" charset="-122"/>
+                <a:cs typeface="Cambria" pitchFamily="34" charset="-120"/>
               </a:rPr>
               <a:t>• Flips correct -&gt; wrong -&gt; drops</a:t>
             </a:r>
@@ -7749,9 +7757,9 @@
                 <a:solidFill>
                   <a:srgbClr val="64748B"/>
                 </a:solidFill>
-                <a:latin typeface="Calibri" pitchFamily="34" charset="0"/>
-                <a:ea typeface="Calibri" pitchFamily="34" charset="-122"/>
-                <a:cs typeface="Calibri" pitchFamily="34" charset="-120"/>
+                <a:latin typeface="Cambria" pitchFamily="34" charset="0"/>
+                <a:ea typeface="Cambria" pitchFamily="34" charset="-122"/>
+                <a:cs typeface="Cambria" pitchFamily="34" charset="-120"/>
               </a:rPr>
               <a:t>Large Language Models Cannot Self-Correct Reasoning Yet | ICLR 2024</a:t>
             </a:r>
@@ -7788,9 +7796,9 @@
                 <a:solidFill>
                   <a:srgbClr val="64748B"/>
                 </a:solidFill>
-                <a:latin typeface="Calibri" pitchFamily="34" charset="0"/>
-                <a:ea typeface="Calibri" pitchFamily="34" charset="-122"/>
-                <a:cs typeface="Calibri" pitchFamily="34" charset="-120"/>
+                <a:latin typeface="Cambria" pitchFamily="34" charset="0"/>
+                <a:ea typeface="Cambria" pitchFamily="34" charset="-122"/>
+                <a:cs typeface="Cambria" pitchFamily="34" charset="-120"/>
               </a:rPr>
               <a:t>11/23</a:t>
             </a:r>
@@ -7859,9 +7867,9 @@
                 <a:solidFill>
                   <a:srgbClr val="800020"/>
                 </a:solidFill>
-                <a:latin typeface="Calibri" pitchFamily="34" charset="0"/>
-                <a:ea typeface="Calibri" pitchFamily="34" charset="-122"/>
-                <a:cs typeface="Calibri" pitchFamily="34" charset="-120"/>
+                <a:latin typeface="Cambria" pitchFamily="34" charset="0"/>
+                <a:ea typeface="Cambria" pitchFamily="34" charset="-122"/>
+                <a:cs typeface="Cambria" pitchFamily="34" charset="-120"/>
               </a:rPr>
               <a:t>4. RESULTS</a:t>
             </a:r>
@@ -7937,9 +7945,9 @@
                 <a:solidFill>
                   <a:srgbClr val="64748B"/>
                 </a:solidFill>
-                <a:latin typeface="Calibri" pitchFamily="34" charset="0"/>
-                <a:ea typeface="Calibri" pitchFamily="34" charset="-122"/>
-                <a:cs typeface="Calibri" pitchFamily="34" charset="-120"/>
+                <a:latin typeface="Cambria" pitchFamily="34" charset="0"/>
+                <a:ea typeface="Cambria" pitchFamily="34" charset="-122"/>
+                <a:cs typeface="Cambria" pitchFamily="34" charset="-120"/>
               </a:rPr>
               <a:t>Main Finding: Performance declines after self-correction</a:t>
             </a:r>
@@ -8003,9 +8011,9 @@
                 <a:solidFill>
                   <a:srgbClr val="800020"/>
                 </a:solidFill>
-                <a:latin typeface="Calibri" pitchFamily="34" charset="0"/>
-                <a:ea typeface="Calibri" pitchFamily="34" charset="-122"/>
-                <a:cs typeface="Calibri" pitchFamily="34" charset="-120"/>
+                <a:latin typeface="Cambria" pitchFamily="34" charset="0"/>
+                <a:ea typeface="Cambria" pitchFamily="34" charset="-122"/>
+                <a:cs typeface="Cambria" pitchFamily="34" charset="-120"/>
               </a:rPr>
               <a:t>CENTRAL EMPIRICAL FINDING</a:t>
             </a:r>
@@ -8128,9 +8136,9 @@
                 <a:solidFill>
                   <a:srgbClr val="FFFFFF"/>
                 </a:solidFill>
-                <a:latin typeface="Calibri" pitchFamily="34" charset="0"/>
-                <a:ea typeface="Calibri" pitchFamily="34" charset="-122"/>
-                <a:cs typeface="Calibri" pitchFamily="34" charset="-120"/>
+                <a:latin typeface="Cambria" pitchFamily="34" charset="0"/>
+                <a:ea typeface="Cambria" pitchFamily="34" charset="-122"/>
+                <a:cs typeface="Cambria" pitchFamily="34" charset="-120"/>
               </a:rPr>
               <a:t>1</a:t>
             </a:r>
@@ -8233,9 +8241,9 @@
                 <a:solidFill>
                   <a:srgbClr val="800020"/>
                 </a:solidFill>
-                <a:latin typeface="Calibri" pitchFamily="34" charset="0"/>
-                <a:ea typeface="Calibri" pitchFamily="34" charset="-122"/>
-                <a:cs typeface="Calibri" pitchFamily="34" charset="-120"/>
+                <a:latin typeface="Cambria" pitchFamily="34" charset="0"/>
+                <a:ea typeface="Cambria" pitchFamily="34" charset="-122"/>
+                <a:cs typeface="Cambria" pitchFamily="34" charset="-120"/>
               </a:rPr>
               <a:t>All models</a:t>
             </a:r>
@@ -8275,9 +8283,9 @@
                 <a:solidFill>
                   <a:srgbClr val="1E293B"/>
                 </a:solidFill>
-                <a:latin typeface="Calibri" pitchFamily="34" charset="0"/>
-                <a:ea typeface="Calibri" pitchFamily="34" charset="-122"/>
-                <a:cs typeface="Calibri" pitchFamily="34" charset="-120"/>
+                <a:latin typeface="Cambria" pitchFamily="34" charset="0"/>
+                <a:ea typeface="Cambria" pitchFamily="34" charset="-122"/>
+                <a:cs typeface="Cambria" pitchFamily="34" charset="-120"/>
               </a:rPr>
               <a:t>GPT-3.5, GPT-4, Turbo, Llama-2 all decline after R1 and R2.</a:t>
             </a:r>
@@ -8339,9 +8347,9 @@
                 <a:solidFill>
                   <a:srgbClr val="DC2626"/>
                 </a:solidFill>
-                <a:latin typeface="Calibri" pitchFamily="34" charset="0"/>
-                <a:ea typeface="Calibri" pitchFamily="34" charset="-122"/>
-                <a:cs typeface="Calibri" pitchFamily="34" charset="-120"/>
+                <a:latin typeface="Cambria" pitchFamily="34" charset="0"/>
+                <a:ea typeface="Cambria" pitchFamily="34" charset="-122"/>
+                <a:cs typeface="Cambria" pitchFamily="34" charset="-120"/>
               </a:rPr>
               <a:t>↓</a:t>
             </a:r>
@@ -8425,9 +8433,9 @@
                 <a:solidFill>
                   <a:srgbClr val="FFFFFF"/>
                 </a:solidFill>
-                <a:latin typeface="Calibri" pitchFamily="34" charset="0"/>
-                <a:ea typeface="Calibri" pitchFamily="34" charset="-122"/>
-                <a:cs typeface="Calibri" pitchFamily="34" charset="-120"/>
+                <a:latin typeface="Cambria" pitchFamily="34" charset="0"/>
+                <a:ea typeface="Cambria" pitchFamily="34" charset="-122"/>
+                <a:cs typeface="Cambria" pitchFamily="34" charset="-120"/>
               </a:rPr>
               <a:t>2</a:t>
             </a:r>
@@ -8530,9 +8538,9 @@
                 <a:solidFill>
                   <a:srgbClr val="800020"/>
                 </a:solidFill>
-                <a:latin typeface="Calibri" pitchFamily="34" charset="0"/>
-                <a:ea typeface="Calibri" pitchFamily="34" charset="-122"/>
-                <a:cs typeface="Calibri" pitchFamily="34" charset="-120"/>
+                <a:latin typeface="Cambria" pitchFamily="34" charset="0"/>
+                <a:ea typeface="Cambria" pitchFamily="34" charset="-122"/>
+                <a:cs typeface="Cambria" pitchFamily="34" charset="-120"/>
               </a:rPr>
               <a:t>All tasks</a:t>
             </a:r>
@@ -8572,9 +8580,9 @@
                 <a:solidFill>
                   <a:srgbClr val="1E293B"/>
                 </a:solidFill>
-                <a:latin typeface="Calibri" pitchFamily="34" charset="0"/>
-                <a:ea typeface="Calibri" pitchFamily="34" charset="-122"/>
-                <a:cs typeface="Calibri" pitchFamily="34" charset="-120"/>
+                <a:latin typeface="Cambria" pitchFamily="34" charset="0"/>
+                <a:ea typeface="Cambria" pitchFamily="34" charset="-122"/>
+                <a:cs typeface="Cambria" pitchFamily="34" charset="-120"/>
               </a:rPr>
               <a:t>Math (GSM8K), logic (CSQA), QA (HotpotQA) all fail.</a:t>
             </a:r>
@@ -8636,9 +8644,9 @@
                 <a:solidFill>
                   <a:srgbClr val="DC2626"/>
                 </a:solidFill>
-                <a:latin typeface="Calibri" pitchFamily="34" charset="0"/>
-                <a:ea typeface="Calibri" pitchFamily="34" charset="-122"/>
-                <a:cs typeface="Calibri" pitchFamily="34" charset="-120"/>
+                <a:latin typeface="Cambria" pitchFamily="34" charset="0"/>
+                <a:ea typeface="Cambria" pitchFamily="34" charset="-122"/>
+                <a:cs typeface="Cambria" pitchFamily="34" charset="-120"/>
               </a:rPr>
               <a:t>↓</a:t>
             </a:r>
@@ -8722,9 +8730,9 @@
                 <a:solidFill>
                   <a:srgbClr val="FFFFFF"/>
                 </a:solidFill>
-                <a:latin typeface="Calibri" pitchFamily="34" charset="0"/>
-                <a:ea typeface="Calibri" pitchFamily="34" charset="-122"/>
-                <a:cs typeface="Calibri" pitchFamily="34" charset="-120"/>
+                <a:latin typeface="Cambria" pitchFamily="34" charset="0"/>
+                <a:ea typeface="Cambria" pitchFamily="34" charset="-122"/>
+                <a:cs typeface="Cambria" pitchFamily="34" charset="-120"/>
               </a:rPr>
               <a:t>3</a:t>
             </a:r>
@@ -8827,9 +8835,9 @@
                 <a:solidFill>
                   <a:srgbClr val="800020"/>
                 </a:solidFill>
-                <a:latin typeface="Calibri" pitchFamily="34" charset="0"/>
-                <a:ea typeface="Calibri" pitchFamily="34" charset="-122"/>
-                <a:cs typeface="Calibri" pitchFamily="34" charset="-120"/>
+                <a:latin typeface="Cambria" pitchFamily="34" charset="0"/>
+                <a:ea typeface="Cambria" pitchFamily="34" charset="-122"/>
+                <a:cs typeface="Cambria" pitchFamily="34" charset="-120"/>
               </a:rPr>
               <a:t>Prior artifact</a:t>
             </a:r>
@@ -8869,9 +8877,9 @@
                 <a:solidFill>
                   <a:srgbClr val="1E293B"/>
                 </a:solidFill>
-                <a:latin typeface="Calibri" pitchFamily="34" charset="0"/>
-                <a:ea typeface="Calibri" pitchFamily="34" charset="-122"/>
-                <a:cs typeface="Calibri" pitchFamily="34" charset="-120"/>
+                <a:latin typeface="Cambria" pitchFamily="34" charset="0"/>
+                <a:ea typeface="Cambria" pitchFamily="34" charset="-122"/>
+                <a:cs typeface="Cambria" pitchFamily="34" charset="-120"/>
               </a:rPr>
               <a:t>Gains only with external labels guiding when to fix.</a:t>
             </a:r>
@@ -8933,9 +8941,9 @@
                 <a:solidFill>
                   <a:srgbClr val="D97706"/>
                 </a:solidFill>
-                <a:latin typeface="Calibri" pitchFamily="34" charset="0"/>
-                <a:ea typeface="Calibri" pitchFamily="34" charset="-122"/>
-                <a:cs typeface="Calibri" pitchFamily="34" charset="-120"/>
+                <a:latin typeface="Cambria" pitchFamily="34" charset="0"/>
+                <a:ea typeface="Cambria" pitchFamily="34" charset="-122"/>
+                <a:cs typeface="Cambria" pitchFamily="34" charset="-120"/>
               </a:rPr>
               <a:t>!</a:t>
             </a:r>
@@ -8972,9 +8980,9 @@
                 <a:solidFill>
                   <a:srgbClr val="64748B"/>
                 </a:solidFill>
-                <a:latin typeface="Calibri" pitchFamily="34" charset="0"/>
-                <a:ea typeface="Calibri" pitchFamily="34" charset="-122"/>
-                <a:cs typeface="Calibri" pitchFamily="34" charset="-120"/>
+                <a:latin typeface="Cambria" pitchFamily="34" charset="0"/>
+                <a:ea typeface="Cambria" pitchFamily="34" charset="-122"/>
+                <a:cs typeface="Cambria" pitchFamily="34" charset="-120"/>
               </a:rPr>
               <a:t>Large Language Models Cannot Self-Correct Reasoning Yet | ICLR 2024</a:t>
             </a:r>
@@ -9011,9 +9019,9 @@
                 <a:solidFill>
                   <a:srgbClr val="64748B"/>
                 </a:solidFill>
-                <a:latin typeface="Calibri" pitchFamily="34" charset="0"/>
-                <a:ea typeface="Calibri" pitchFamily="34" charset="-122"/>
-                <a:cs typeface="Calibri" pitchFamily="34" charset="-120"/>
+                <a:latin typeface="Cambria" pitchFamily="34" charset="0"/>
+                <a:ea typeface="Cambria" pitchFamily="34" charset="-122"/>
+                <a:cs typeface="Cambria" pitchFamily="34" charset="-120"/>
               </a:rPr>
               <a:t>12/23</a:t>
             </a:r>
@@ -9082,9 +9090,9 @@
                 <a:solidFill>
                   <a:srgbClr val="800020"/>
                 </a:solidFill>
-                <a:latin typeface="Calibri" pitchFamily="34" charset="0"/>
-                <a:ea typeface="Calibri" pitchFamily="34" charset="-122"/>
-                <a:cs typeface="Calibri" pitchFamily="34" charset="-120"/>
+                <a:latin typeface="Cambria" pitchFamily="34" charset="0"/>
+                <a:ea typeface="Cambria" pitchFamily="34" charset="-122"/>
+                <a:cs typeface="Cambria" pitchFamily="34" charset="-120"/>
               </a:rPr>
               <a:t>4. RESULTS</a:t>
             </a:r>
@@ -9160,9 +9168,9 @@
                 <a:solidFill>
                   <a:srgbClr val="64748B"/>
                 </a:solidFill>
-                <a:latin typeface="Calibri" pitchFamily="34" charset="0"/>
-                <a:ea typeface="Calibri" pitchFamily="34" charset="-122"/>
-                <a:cs typeface="Calibri" pitchFamily="34" charset="-120"/>
+                <a:latin typeface="Cambria" pitchFamily="34" charset="0"/>
+                <a:ea typeface="Cambria" pitchFamily="34" charset="-122"/>
+                <a:cs typeface="Cambria" pitchFamily="34" charset="-120"/>
               </a:rPr>
               <a:t>Accuracy drops across rounds (Table 2)</a:t>
             </a:r>
@@ -9308,9 +9316,9 @@
                 <a:solidFill>
                   <a:srgbClr val="0F172A"/>
                 </a:solidFill>
-                <a:latin typeface="Calibri" pitchFamily="34" charset="0"/>
-                <a:ea typeface="Calibri" pitchFamily="34" charset="-122"/>
-                <a:cs typeface="Calibri" pitchFamily="34" charset="-120"/>
+                <a:latin typeface="Cambria" pitchFamily="34" charset="0"/>
+                <a:ea typeface="Cambria" pitchFamily="34" charset="-122"/>
+                <a:cs typeface="Cambria" pitchFamily="34" charset="-120"/>
               </a:rPr>
               <a:t>GPT-3.5 on CSQA</a:t>
             </a:r>
@@ -9347,9 +9355,9 @@
                 <a:solidFill>
                   <a:srgbClr val="DC2626"/>
                 </a:solidFill>
-                <a:latin typeface="Calibri" pitchFamily="34" charset="0"/>
-                <a:ea typeface="Calibri" pitchFamily="34" charset="-122"/>
-                <a:cs typeface="Calibri" pitchFamily="34" charset="-120"/>
+                <a:latin typeface="Cambria" pitchFamily="34" charset="0"/>
+                <a:ea typeface="Cambria" pitchFamily="34" charset="-122"/>
+                <a:cs typeface="Cambria" pitchFamily="34" charset="-120"/>
               </a:rPr>
               <a:t>-17.2%</a:t>
             </a:r>
@@ -9386,9 +9394,9 @@
                 <a:solidFill>
                   <a:srgbClr val="64748B"/>
                 </a:solidFill>
-                <a:latin typeface="Calibri" pitchFamily="34" charset="0"/>
-                <a:ea typeface="Calibri" pitchFamily="34" charset="-122"/>
-                <a:cs typeface="Calibri" pitchFamily="34" charset="-120"/>
+                <a:latin typeface="Cambria" pitchFamily="34" charset="0"/>
+                <a:ea typeface="Cambria" pitchFamily="34" charset="-122"/>
+                <a:cs typeface="Cambria" pitchFamily="34" charset="-120"/>
               </a:rPr>
               <a:t>72.5% -&gt; 55.3% (R2)</a:t>
             </a:r>
@@ -9452,9 +9460,9 @@
                 <a:solidFill>
                   <a:srgbClr val="0F172A"/>
                 </a:solidFill>
-                <a:latin typeface="Calibri" pitchFamily="34" charset="0"/>
-                <a:ea typeface="Calibri" pitchFamily="34" charset="-122"/>
-                <a:cs typeface="Calibri" pitchFamily="34" charset="-120"/>
+                <a:latin typeface="Cambria" pitchFamily="34" charset="0"/>
+                <a:ea typeface="Cambria" pitchFamily="34" charset="-122"/>
+                <a:cs typeface="Cambria" pitchFamily="34" charset="-120"/>
               </a:rPr>
               <a:t>GPT-4 on HotpotQA</a:t>
             </a:r>
@@ -9491,9 +9499,9 @@
                 <a:solidFill>
                   <a:srgbClr val="DC2626"/>
                 </a:solidFill>
-                <a:latin typeface="Calibri" pitchFamily="34" charset="0"/>
-                <a:ea typeface="Calibri" pitchFamily="34" charset="-122"/>
-                <a:cs typeface="Calibri" pitchFamily="34" charset="-120"/>
+                <a:latin typeface="Cambria" pitchFamily="34" charset="0"/>
+                <a:ea typeface="Cambria" pitchFamily="34" charset="-122"/>
+                <a:cs typeface="Cambria" pitchFamily="34" charset="-120"/>
               </a:rPr>
               <a:t>-11.0%</a:t>
             </a:r>
@@ -9530,9 +9538,9 @@
                 <a:solidFill>
                   <a:srgbClr val="64748B"/>
                 </a:solidFill>
-                <a:latin typeface="Calibri" pitchFamily="34" charset="0"/>
-                <a:ea typeface="Calibri" pitchFamily="34" charset="-122"/>
-                <a:cs typeface="Calibri" pitchFamily="34" charset="-120"/>
+                <a:latin typeface="Cambria" pitchFamily="34" charset="0"/>
+                <a:ea typeface="Cambria" pitchFamily="34" charset="-122"/>
+                <a:cs typeface="Cambria" pitchFamily="34" charset="-120"/>
               </a:rPr>
               <a:t>53.0% -&gt; 42.0%</a:t>
             </a:r>
@@ -9596,9 +9604,9 @@
                 <a:solidFill>
                   <a:srgbClr val="0F172A"/>
                 </a:solidFill>
-                <a:latin typeface="Calibri" pitchFamily="34" charset="0"/>
-                <a:ea typeface="Calibri" pitchFamily="34" charset="-122"/>
-                <a:cs typeface="Calibri" pitchFamily="34" charset="-120"/>
+                <a:latin typeface="Cambria" pitchFamily="34" charset="0"/>
+                <a:ea typeface="Cambria" pitchFamily="34" charset="-122"/>
+                <a:cs typeface="Cambria" pitchFamily="34" charset="-120"/>
               </a:rPr>
               <a:t>GPT-4 on GSM8K</a:t>
             </a:r>
@@ -9635,9 +9643,9 @@
                 <a:solidFill>
                   <a:srgbClr val="DC2626"/>
                 </a:solidFill>
-                <a:latin typeface="Calibri" pitchFamily="34" charset="0"/>
-                <a:ea typeface="Calibri" pitchFamily="34" charset="-122"/>
-                <a:cs typeface="Calibri" pitchFamily="34" charset="-120"/>
+                <a:latin typeface="Cambria" pitchFamily="34" charset="0"/>
+                <a:ea typeface="Cambria" pitchFamily="34" charset="-122"/>
+                <a:cs typeface="Cambria" pitchFamily="34" charset="-120"/>
               </a:rPr>
               <a:t>-4.0%</a:t>
             </a:r>
@@ -9674,9 +9682,9 @@
                 <a:solidFill>
                   <a:srgbClr val="64748B"/>
                 </a:solidFill>
-                <a:latin typeface="Calibri" pitchFamily="34" charset="0"/>
-                <a:ea typeface="Calibri" pitchFamily="34" charset="-122"/>
-                <a:cs typeface="Calibri" pitchFamily="34" charset="-120"/>
+                <a:latin typeface="Cambria" pitchFamily="34" charset="0"/>
+                <a:ea typeface="Cambria" pitchFamily="34" charset="-122"/>
+                <a:cs typeface="Cambria" pitchFamily="34" charset="-120"/>
               </a:rPr>
               <a:t>92.0% -&gt; 88.0%</a:t>
             </a:r>
@@ -9713,9 +9721,9 @@
                 <a:solidFill>
                   <a:srgbClr val="64748B"/>
                 </a:solidFill>
-                <a:latin typeface="Calibri" pitchFamily="34" charset="0"/>
-                <a:ea typeface="Calibri" pitchFamily="34" charset="-122"/>
-                <a:cs typeface="Calibri" pitchFamily="34" charset="-120"/>
+                <a:latin typeface="Cambria" pitchFamily="34" charset="0"/>
+                <a:ea typeface="Cambria" pitchFamily="34" charset="-122"/>
+                <a:cs typeface="Cambria" pitchFamily="34" charset="-120"/>
               </a:rPr>
               <a:t>Table 2: GPT-3.5 and GPT-4 accuracy across two self-correction rounds</a:t>
             </a:r>
@@ -9752,9 +9760,9 @@
                 <a:solidFill>
                   <a:srgbClr val="64748B"/>
                 </a:solidFill>
-                <a:latin typeface="Calibri" pitchFamily="34" charset="0"/>
-                <a:ea typeface="Calibri" pitchFamily="34" charset="-122"/>
-                <a:cs typeface="Calibri" pitchFamily="34" charset="-120"/>
+                <a:latin typeface="Cambria" pitchFamily="34" charset="0"/>
+                <a:ea typeface="Cambria" pitchFamily="34" charset="-122"/>
+                <a:cs typeface="Cambria" pitchFamily="34" charset="-120"/>
               </a:rPr>
               <a:t>Large Language Models Cannot Self-Correct Reasoning Yet | ICLR 2024</a:t>
             </a:r>
@@ -9791,9 +9799,9 @@
                 <a:solidFill>
                   <a:srgbClr val="64748B"/>
                 </a:solidFill>
-                <a:latin typeface="Calibri" pitchFamily="34" charset="0"/>
-                <a:ea typeface="Calibri" pitchFamily="34" charset="-122"/>
-                <a:cs typeface="Calibri" pitchFamily="34" charset="-120"/>
+                <a:latin typeface="Cambria" pitchFamily="34" charset="0"/>
+                <a:ea typeface="Cambria" pitchFamily="34" charset="-122"/>
+                <a:cs typeface="Cambria" pitchFamily="34" charset="-120"/>
               </a:rPr>
               <a:t>13/23</a:t>
             </a:r>
@@ -9862,9 +9870,9 @@
                 <a:solidFill>
                   <a:srgbClr val="800020"/>
                 </a:solidFill>
-                <a:latin typeface="Calibri" pitchFamily="34" charset="0"/>
-                <a:ea typeface="Calibri" pitchFamily="34" charset="-122"/>
-                <a:cs typeface="Calibri" pitchFamily="34" charset="-120"/>
+                <a:latin typeface="Cambria" pitchFamily="34" charset="0"/>
+                <a:ea typeface="Cambria" pitchFamily="34" charset="-122"/>
+                <a:cs typeface="Cambria" pitchFamily="34" charset="-120"/>
               </a:rPr>
               <a:t>4. RESULTS</a:t>
             </a:r>
@@ -9940,9 +9948,9 @@
                 <a:solidFill>
                   <a:srgbClr val="64748B"/>
                 </a:solidFill>
-                <a:latin typeface="Calibri" pitchFamily="34" charset="0"/>
-                <a:ea typeface="Calibri" pitchFamily="34" charset="-122"/>
-                <a:cs typeface="Calibri" pitchFamily="34" charset="-120"/>
+                <a:latin typeface="Cambria" pitchFamily="34" charset="0"/>
+                <a:ea typeface="Cambria" pitchFamily="34" charset="-122"/>
+                <a:cs typeface="Cambria" pitchFamily="34" charset="-120"/>
               </a:rPr>
               <a:t>Failure generalizes across open and proprietary models</a:t>
             </a:r>
@@ -10064,9 +10072,9 @@
                 <a:solidFill>
                   <a:srgbClr val="DC2626"/>
                 </a:solidFill>
-                <a:latin typeface="Calibri" pitchFamily="34" charset="0"/>
-                <a:ea typeface="Calibri" pitchFamily="34" charset="-122"/>
-                <a:cs typeface="Calibri" pitchFamily="34" charset="-120"/>
+                <a:latin typeface="Cambria" pitchFamily="34" charset="0"/>
+                <a:ea typeface="Cambria" pitchFamily="34" charset="-122"/>
+                <a:cs typeface="Cambria" pitchFamily="34" charset="-120"/>
               </a:rPr>
               <a:t>GSM8K: 62.0% -&gt; 36.5% (-25.5%)</a:t>
             </a:r>
@@ -10084,9 +10092,9 @@
                 <a:solidFill>
                   <a:srgbClr val="DC2626"/>
                 </a:solidFill>
-                <a:latin typeface="Calibri" pitchFamily="34" charset="0"/>
-                <a:ea typeface="Calibri" pitchFamily="34" charset="-122"/>
-                <a:cs typeface="Calibri" pitchFamily="34" charset="-120"/>
+                <a:latin typeface="Cambria" pitchFamily="34" charset="0"/>
+                <a:ea typeface="Cambria" pitchFamily="34" charset="-122"/>
+                <a:cs typeface="Cambria" pitchFamily="34" charset="-120"/>
               </a:rPr>
               <a:t>CSQA: 64.0% -&gt; 36.5% (-27.5%)</a:t>
             </a:r>
@@ -10123,9 +10131,9 @@
                 <a:solidFill>
                   <a:srgbClr val="1E293B"/>
                 </a:solidFill>
-                <a:latin typeface="Calibri" pitchFamily="34" charset="0"/>
-                <a:ea typeface="Calibri" pitchFamily="34" charset="-122"/>
-                <a:cs typeface="Calibri" pitchFamily="34" charset="-120"/>
+                <a:latin typeface="Cambria" pitchFamily="34" charset="0"/>
+                <a:ea typeface="Cambria" pitchFamily="34" charset="-122"/>
+                <a:cs typeface="Cambria" pitchFamily="34" charset="-120"/>
               </a:rPr>
               <a:t>Open-weight models are highly prompt-compliant: they abandon correct answers when asked to "find flaws".</a:t>
             </a:r>
@@ -10187,9 +10195,9 @@
                 <a:solidFill>
                   <a:srgbClr val="DC2626"/>
                 </a:solidFill>
-                <a:latin typeface="Calibri" pitchFamily="34" charset="0"/>
-                <a:ea typeface="Calibri" pitchFamily="34" charset="-122"/>
-                <a:cs typeface="Calibri" pitchFamily="34" charset="-120"/>
+                <a:latin typeface="Cambria" pitchFamily="34" charset="0"/>
+                <a:ea typeface="Cambria" pitchFamily="34" charset="-122"/>
+                <a:cs typeface="Cambria" pitchFamily="34" charset="-120"/>
               </a:rPr>
               <a:t>!</a:t>
             </a:r>
@@ -10226,9 +10234,9 @@
                 <a:solidFill>
                   <a:srgbClr val="64748B"/>
                 </a:solidFill>
-                <a:latin typeface="Calibri" pitchFamily="34" charset="0"/>
-                <a:ea typeface="Calibri" pitchFamily="34" charset="-122"/>
-                <a:cs typeface="Calibri" pitchFamily="34" charset="-120"/>
+                <a:latin typeface="Cambria" pitchFamily="34" charset="0"/>
+                <a:ea typeface="Cambria" pitchFamily="34" charset="-122"/>
+                <a:cs typeface="Cambria" pitchFamily="34" charset="-120"/>
               </a:rPr>
               <a:t>Extreme compliance vulnerability</a:t>
             </a:r>
@@ -10265,9 +10273,9 @@
                 <a:solidFill>
                   <a:srgbClr val="64748B"/>
                 </a:solidFill>
-                <a:latin typeface="Calibri" pitchFamily="34" charset="0"/>
-                <a:ea typeface="Calibri" pitchFamily="34" charset="-122"/>
-                <a:cs typeface="Calibri" pitchFamily="34" charset="-120"/>
+                <a:latin typeface="Cambria" pitchFamily="34" charset="0"/>
+                <a:ea typeface="Cambria" pitchFamily="34" charset="-122"/>
+                <a:cs typeface="Cambria" pitchFamily="34" charset="-120"/>
               </a:rPr>
               <a:t>Table 3: GPT-4-Turbo and Llama-2 results across self-correction rounds</a:t>
             </a:r>
@@ -10304,9 +10312,9 @@
                 <a:solidFill>
                   <a:srgbClr val="64748B"/>
                 </a:solidFill>
-                <a:latin typeface="Calibri" pitchFamily="34" charset="0"/>
-                <a:ea typeface="Calibri" pitchFamily="34" charset="-122"/>
-                <a:cs typeface="Calibri" pitchFamily="34" charset="-120"/>
+                <a:latin typeface="Cambria" pitchFamily="34" charset="0"/>
+                <a:ea typeface="Cambria" pitchFamily="34" charset="-122"/>
+                <a:cs typeface="Cambria" pitchFamily="34" charset="-120"/>
               </a:rPr>
               <a:t>Large Language Models Cannot Self-Correct Reasoning Yet | ICLR 2024</a:t>
             </a:r>
@@ -10343,9 +10351,9 @@
                 <a:solidFill>
                   <a:srgbClr val="64748B"/>
                 </a:solidFill>
-                <a:latin typeface="Calibri" pitchFamily="34" charset="0"/>
-                <a:ea typeface="Calibri" pitchFamily="34" charset="-122"/>
-                <a:cs typeface="Calibri" pitchFamily="34" charset="-120"/>
+                <a:latin typeface="Cambria" pitchFamily="34" charset="0"/>
+                <a:ea typeface="Cambria" pitchFamily="34" charset="-122"/>
+                <a:cs typeface="Cambria" pitchFamily="34" charset="-120"/>
               </a:rPr>
               <a:t>14/23</a:t>
             </a:r>
@@ -10414,9 +10422,9 @@
                 <a:solidFill>
                   <a:srgbClr val="800020"/>
                 </a:solidFill>
-                <a:latin typeface="Calibri" pitchFamily="34" charset="0"/>
-                <a:ea typeface="Calibri" pitchFamily="34" charset="-122"/>
-                <a:cs typeface="Calibri" pitchFamily="34" charset="-120"/>
+                <a:latin typeface="Cambria" pitchFamily="34" charset="0"/>
+                <a:ea typeface="Cambria" pitchFamily="34" charset="-122"/>
+                <a:cs typeface="Cambria" pitchFamily="34" charset="-120"/>
               </a:rPr>
               <a:t>4. RESULTS</a:t>
             </a:r>
@@ -10492,9 +10500,9 @@
                 <a:solidFill>
                   <a:srgbClr val="64748B"/>
                 </a:solidFill>
-                <a:latin typeface="Calibri" pitchFamily="34" charset="0"/>
-                <a:ea typeface="Calibri" pitchFamily="34" charset="-122"/>
-                <a:cs typeface="Calibri" pitchFamily="34" charset="-120"/>
+                <a:latin typeface="Cambria" pitchFamily="34" charset="0"/>
+                <a:ea typeface="Cambria" pitchFamily="34" charset="-122"/>
+                <a:cs typeface="Cambria" pitchFamily="34" charset="-120"/>
               </a:rPr>
               <a:t>Why accuracy drops: net-negative flips (Figure 1)</a:t>
             </a:r>
@@ -10613,9 +10621,9 @@
                 <a:solidFill>
                   <a:srgbClr val="0F172A"/>
                 </a:solidFill>
-                <a:latin typeface="Calibri" pitchFamily="34" charset="0"/>
-                <a:ea typeface="Calibri" pitchFamily="34" charset="-122"/>
-                <a:cs typeface="Calibri" pitchFamily="34" charset="-120"/>
+                <a:latin typeface="Cambria" pitchFamily="34" charset="0"/>
+                <a:ea typeface="Cambria" pitchFamily="34" charset="-122"/>
+                <a:cs typeface="Cambria" pitchFamily="34" charset="-120"/>
               </a:rPr>
               <a:t>Unchanged</a:t>
             </a:r>
@@ -10652,9 +10660,9 @@
                 <a:solidFill>
                   <a:srgbClr val="64748B"/>
                 </a:solidFill>
-                <a:latin typeface="Calibri" pitchFamily="34" charset="0"/>
-                <a:ea typeface="Calibri" pitchFamily="34" charset="-122"/>
-                <a:cs typeface="Calibri" pitchFamily="34" charset="-120"/>
+                <a:latin typeface="Cambria" pitchFamily="34" charset="0"/>
+                <a:ea typeface="Cambria" pitchFamily="34" charset="-122"/>
+                <a:cs typeface="Cambria" pitchFamily="34" charset="-120"/>
               </a:rPr>
               <a:t>Kept initial answer</a:t>
             </a:r>
@@ -10757,9 +10765,9 @@
                 <a:solidFill>
                   <a:srgbClr val="DC2626"/>
                 </a:solidFill>
-                <a:latin typeface="Calibri" pitchFamily="34" charset="0"/>
-                <a:ea typeface="Calibri" pitchFamily="34" charset="-122"/>
-                <a:cs typeface="Calibri" pitchFamily="34" charset="-120"/>
+                <a:latin typeface="Cambria" pitchFamily="34" charset="0"/>
+                <a:ea typeface="Cambria" pitchFamily="34" charset="-122"/>
+                <a:cs typeface="Cambria" pitchFamily="34" charset="-120"/>
               </a:rPr>
               <a:t>Correct -&gt; Wrong</a:t>
             </a:r>
@@ -10796,9 +10804,9 @@
                 <a:solidFill>
                   <a:srgbClr val="64748B"/>
                 </a:solidFill>
-                <a:latin typeface="Calibri" pitchFamily="34" charset="0"/>
-                <a:ea typeface="Calibri" pitchFamily="34" charset="-122"/>
-                <a:cs typeface="Calibri" pitchFamily="34" charset="-120"/>
+                <a:latin typeface="Cambria" pitchFamily="34" charset="0"/>
+                <a:ea typeface="Cambria" pitchFamily="34" charset="-122"/>
+                <a:cs typeface="Cambria" pitchFamily="34" charset="-120"/>
               </a:rPr>
               <a:t>Harmful flip</a:t>
             </a:r>
@@ -10901,9 +10909,9 @@
                 <a:solidFill>
                   <a:srgbClr val="166534"/>
                 </a:solidFill>
-                <a:latin typeface="Calibri" pitchFamily="34" charset="0"/>
-                <a:ea typeface="Calibri" pitchFamily="34" charset="-122"/>
-                <a:cs typeface="Calibri" pitchFamily="34" charset="-120"/>
+                <a:latin typeface="Cambria" pitchFamily="34" charset="0"/>
+                <a:ea typeface="Cambria" pitchFamily="34" charset="-122"/>
+                <a:cs typeface="Cambria" pitchFamily="34" charset="-120"/>
               </a:rPr>
               <a:t>Wrong -&gt; Correct</a:t>
             </a:r>
@@ -10940,9 +10948,9 @@
                 <a:solidFill>
                   <a:srgbClr val="64748B"/>
                 </a:solidFill>
-                <a:latin typeface="Calibri" pitchFamily="34" charset="0"/>
-                <a:ea typeface="Calibri" pitchFamily="34" charset="-122"/>
-                <a:cs typeface="Calibri" pitchFamily="34" charset="-120"/>
+                <a:latin typeface="Cambria" pitchFamily="34" charset="0"/>
+                <a:ea typeface="Cambria" pitchFamily="34" charset="-122"/>
+                <a:cs typeface="Cambria" pitchFamily="34" charset="-120"/>
               </a:rPr>
               <a:t>Beneficial fix</a:t>
             </a:r>
@@ -11045,9 +11053,9 @@
                 <a:solidFill>
                   <a:srgbClr val="800020"/>
                 </a:solidFill>
-                <a:latin typeface="Calibri" pitchFamily="34" charset="0"/>
-                <a:ea typeface="Calibri" pitchFamily="34" charset="-122"/>
-                <a:cs typeface="Calibri" pitchFamily="34" charset="-120"/>
+                <a:latin typeface="Cambria" pitchFamily="34" charset="0"/>
+                <a:ea typeface="Cambria" pitchFamily="34" charset="-122"/>
+                <a:cs typeface="Cambria" pitchFamily="34" charset="-120"/>
               </a:rPr>
               <a:t>Net Loss</a:t>
             </a:r>
@@ -11084,9 +11092,9 @@
                 <a:solidFill>
                   <a:srgbClr val="64748B"/>
                 </a:solidFill>
-                <a:latin typeface="Calibri" pitchFamily="34" charset="0"/>
-                <a:ea typeface="Calibri" pitchFamily="34" charset="-122"/>
-                <a:cs typeface="Calibri" pitchFamily="34" charset="-120"/>
+                <a:latin typeface="Cambria" pitchFamily="34" charset="0"/>
+                <a:ea typeface="Cambria" pitchFamily="34" charset="-122"/>
+                <a:cs typeface="Cambria" pitchFamily="34" charset="-120"/>
               </a:rPr>
               <a:t>Harm &gt; help</a:t>
             </a:r>
@@ -11123,9 +11131,9 @@
                 <a:solidFill>
                   <a:srgbClr val="64748B"/>
                 </a:solidFill>
-                <a:latin typeface="Calibri" pitchFamily="34" charset="0"/>
-                <a:ea typeface="Calibri" pitchFamily="34" charset="-122"/>
-                <a:cs typeface="Calibri" pitchFamily="34" charset="-120"/>
+                <a:latin typeface="Cambria" pitchFamily="34" charset="0"/>
+                <a:ea typeface="Cambria" pitchFamily="34" charset="-122"/>
+                <a:cs typeface="Cambria" pitchFamily="34" charset="-120"/>
               </a:rPr>
               <a:t>Figure 1: Answer transition dynamics after two self-correction rounds on GSM8K (GPT-3.5)</a:t>
             </a:r>
@@ -11162,9 +11170,9 @@
                 <a:solidFill>
                   <a:srgbClr val="64748B"/>
                 </a:solidFill>
-                <a:latin typeface="Calibri" pitchFamily="34" charset="0"/>
-                <a:ea typeface="Calibri" pitchFamily="34" charset="-122"/>
-                <a:cs typeface="Calibri" pitchFamily="34" charset="-120"/>
+                <a:latin typeface="Cambria" pitchFamily="34" charset="0"/>
+                <a:ea typeface="Cambria" pitchFamily="34" charset="-122"/>
+                <a:cs typeface="Cambria" pitchFamily="34" charset="-120"/>
               </a:rPr>
               <a:t>Large Language Models Cannot Self-Correct Reasoning Yet | ICLR 2024</a:t>
             </a:r>
@@ -11201,9 +11209,9 @@
                 <a:solidFill>
                   <a:srgbClr val="64748B"/>
                 </a:solidFill>
-                <a:latin typeface="Calibri" pitchFamily="34" charset="0"/>
-                <a:ea typeface="Calibri" pitchFamily="34" charset="-122"/>
-                <a:cs typeface="Calibri" pitchFamily="34" charset="-120"/>
+                <a:latin typeface="Cambria" pitchFamily="34" charset="0"/>
+                <a:ea typeface="Cambria" pitchFamily="34" charset="-122"/>
+                <a:cs typeface="Cambria" pitchFamily="34" charset="-120"/>
               </a:rPr>
               <a:t>15/23</a:t>
             </a:r>
@@ -11272,9 +11280,9 @@
                 <a:solidFill>
                   <a:srgbClr val="800020"/>
                 </a:solidFill>
-                <a:latin typeface="Calibri" pitchFamily="34" charset="0"/>
-                <a:ea typeface="Calibri" pitchFamily="34" charset="-122"/>
-                <a:cs typeface="Calibri" pitchFamily="34" charset="-120"/>
+                <a:latin typeface="Cambria" pitchFamily="34" charset="0"/>
+                <a:ea typeface="Cambria" pitchFamily="34" charset="-122"/>
+                <a:cs typeface="Cambria" pitchFamily="34" charset="-120"/>
               </a:rPr>
               <a:t>5. ANALYSIS</a:t>
             </a:r>
@@ -11350,9 +11358,9 @@
                 <a:solidFill>
                   <a:srgbClr val="64748B"/>
                 </a:solidFill>
-                <a:latin typeface="Calibri" pitchFamily="34" charset="0"/>
-                <a:ea typeface="Calibri" pitchFamily="34" charset="-122"/>
-                <a:cs typeface="Calibri" pitchFamily="34" charset="-120"/>
+                <a:latin typeface="Cambria" pitchFamily="34" charset="0"/>
+                <a:ea typeface="Cambria" pitchFamily="34" charset="-122"/>
+                <a:cs typeface="Cambria" pitchFamily="34" charset="-120"/>
               </a:rPr>
               <a:t>Equal compute: sampling beats debate (Table 4)</a:t>
             </a:r>
@@ -11471,9 +11479,9 @@
                 <a:solidFill>
                   <a:srgbClr val="0F172A"/>
                 </a:solidFill>
-                <a:latin typeface="Calibri" pitchFamily="34" charset="0"/>
-                <a:ea typeface="Calibri" pitchFamily="34" charset="-122"/>
-                <a:cs typeface="Calibri" pitchFamily="34" charset="-120"/>
+                <a:latin typeface="Cambria" pitchFamily="34" charset="0"/>
+                <a:ea typeface="Cambria" pitchFamily="34" charset="-122"/>
+                <a:cs typeface="Cambria" pitchFamily="34" charset="-120"/>
               </a:rPr>
               <a:t>Claim:</a:t>
             </a:r>
@@ -11510,9 +11518,9 @@
                 <a:solidFill>
                   <a:srgbClr val="1E293B"/>
                 </a:solidFill>
-                <a:latin typeface="Calibri" pitchFamily="34" charset="0"/>
-                <a:ea typeface="Calibri" pitchFamily="34" charset="-122"/>
-                <a:cs typeface="Calibri" pitchFamily="34" charset="-120"/>
+                <a:latin typeface="Cambria" pitchFamily="34" charset="0"/>
+                <a:ea typeface="Cambria" pitchFamily="34" charset="-122"/>
+                <a:cs typeface="Cambria" pitchFamily="34" charset="-120"/>
               </a:rPr>
               <a:t>Debate &gt; single-shot</a:t>
             </a:r>
@@ -11549,9 +11557,9 @@
                 <a:solidFill>
                   <a:srgbClr val="166534"/>
                 </a:solidFill>
-                <a:latin typeface="Calibri" pitchFamily="34" charset="0"/>
-                <a:ea typeface="Calibri" pitchFamily="34" charset="-122"/>
-                <a:cs typeface="Calibri" pitchFamily="34" charset="-120"/>
+                <a:latin typeface="Cambria" pitchFamily="34" charset="0"/>
+                <a:ea typeface="Cambria" pitchFamily="34" charset="-122"/>
+                <a:cs typeface="Cambria" pitchFamily="34" charset="-120"/>
               </a:rPr>
               <a:t>Reality:</a:t>
             </a:r>
@@ -11588,9 +11596,9 @@
                 <a:solidFill>
                   <a:srgbClr val="1E293B"/>
                 </a:solidFill>
-                <a:latin typeface="Calibri" pitchFamily="34" charset="0"/>
-                <a:ea typeface="Calibri" pitchFamily="34" charset="-122"/>
-                <a:cs typeface="Calibri" pitchFamily="34" charset="-120"/>
+                <a:latin typeface="Cambria" pitchFamily="34" charset="0"/>
+                <a:ea typeface="Cambria" pitchFamily="34" charset="-122"/>
+                <a:cs typeface="Cambria" pitchFamily="34" charset="-120"/>
               </a:rPr>
               <a:t>At same cost, Self-Consistency (majority vote) matches or beats debate with less latency.</a:t>
             </a:r>
@@ -11654,9 +11662,9 @@
                 <a:solidFill>
                   <a:srgbClr val="D97706"/>
                 </a:solidFill>
-                <a:latin typeface="Calibri" pitchFamily="34" charset="0"/>
-                <a:ea typeface="Calibri" pitchFamily="34" charset="-122"/>
-                <a:cs typeface="Calibri" pitchFamily="34" charset="-120"/>
+                <a:latin typeface="Cambria" pitchFamily="34" charset="0"/>
+                <a:ea typeface="Cambria" pitchFamily="34" charset="-122"/>
+                <a:cs typeface="Cambria" pitchFamily="34" charset="-120"/>
               </a:rPr>
               <a:t>Debate: N x M calls</a:t>
             </a:r>
@@ -11693,9 +11701,9 @@
                 <a:solidFill>
                   <a:srgbClr val="166534"/>
                 </a:solidFill>
-                <a:latin typeface="Calibri" pitchFamily="34" charset="0"/>
-                <a:ea typeface="Calibri" pitchFamily="34" charset="-122"/>
-                <a:cs typeface="Calibri" pitchFamily="34" charset="-120"/>
+                <a:latin typeface="Cambria" pitchFamily="34" charset="0"/>
+                <a:ea typeface="Cambria" pitchFamily="34" charset="-122"/>
+                <a:cs typeface="Cambria" pitchFamily="34" charset="-120"/>
               </a:rPr>
               <a:t>Self-Consistency: N calls</a:t>
             </a:r>
@@ -11732,9 +11740,9 @@
                 <a:solidFill>
                   <a:srgbClr val="64748B"/>
                 </a:solidFill>
-                <a:latin typeface="Calibri" pitchFamily="34" charset="0"/>
-                <a:ea typeface="Calibri" pitchFamily="34" charset="-122"/>
-                <a:cs typeface="Calibri" pitchFamily="34" charset="-120"/>
+                <a:latin typeface="Cambria" pitchFamily="34" charset="0"/>
+                <a:ea typeface="Cambria" pitchFamily="34" charset="-122"/>
+                <a:cs typeface="Cambria" pitchFamily="34" charset="-120"/>
               </a:rPr>
               <a:t>Vote = simple, fast</a:t>
             </a:r>
@@ -11771,9 +11779,9 @@
                 <a:solidFill>
                   <a:srgbClr val="64748B"/>
                 </a:solidFill>
-                <a:latin typeface="Calibri" pitchFamily="34" charset="0"/>
-                <a:ea typeface="Calibri" pitchFamily="34" charset="-122"/>
-                <a:cs typeface="Calibri" pitchFamily="34" charset="-120"/>
+                <a:latin typeface="Cambria" pitchFamily="34" charset="0"/>
+                <a:ea typeface="Cambria" pitchFamily="34" charset="-122"/>
+                <a:cs typeface="Cambria" pitchFamily="34" charset="-120"/>
               </a:rPr>
               <a:t>Table 4: Multi-Agent Debate versus Self-Consistency at equal inference cost</a:t>
             </a:r>
@@ -11810,9 +11818,9 @@
                 <a:solidFill>
                   <a:srgbClr val="64748B"/>
                 </a:solidFill>
-                <a:latin typeface="Calibri" pitchFamily="34" charset="0"/>
-                <a:ea typeface="Calibri" pitchFamily="34" charset="-122"/>
-                <a:cs typeface="Calibri" pitchFamily="34" charset="-120"/>
+                <a:latin typeface="Cambria" pitchFamily="34" charset="0"/>
+                <a:ea typeface="Cambria" pitchFamily="34" charset="-122"/>
+                <a:cs typeface="Cambria" pitchFamily="34" charset="-120"/>
               </a:rPr>
               <a:t>Large Language Models Cannot Self-Correct Reasoning Yet | ICLR 2024</a:t>
             </a:r>
@@ -11849,9 +11857,9 @@
                 <a:solidFill>
                   <a:srgbClr val="64748B"/>
                 </a:solidFill>
-                <a:latin typeface="Calibri" pitchFamily="34" charset="0"/>
-                <a:ea typeface="Calibri" pitchFamily="34" charset="-122"/>
-                <a:cs typeface="Calibri" pitchFamily="34" charset="-120"/>
+                <a:latin typeface="Cambria" pitchFamily="34" charset="0"/>
+                <a:ea typeface="Cambria" pitchFamily="34" charset="-122"/>
+                <a:cs typeface="Cambria" pitchFamily="34" charset="-120"/>
               </a:rPr>
               <a:t>16/23</a:t>
             </a:r>
@@ -11920,9 +11928,9 @@
                 <a:solidFill>
                   <a:srgbClr val="800020"/>
                 </a:solidFill>
-                <a:latin typeface="Calibri" pitchFamily="34" charset="0"/>
-                <a:ea typeface="Calibri" pitchFamily="34" charset="-122"/>
-                <a:cs typeface="Calibri" pitchFamily="34" charset="-120"/>
+                <a:latin typeface="Cambria" pitchFamily="34" charset="0"/>
+                <a:ea typeface="Cambria" pitchFamily="34" charset="-122"/>
+                <a:cs typeface="Cambria" pitchFamily="34" charset="-120"/>
               </a:rPr>
               <a:t>5. ANALYSIS</a:t>
             </a:r>
@@ -11998,9 +12006,9 @@
                 <a:solidFill>
                   <a:srgbClr val="64748B"/>
                 </a:solidFill>
-                <a:latin typeface="Calibri" pitchFamily="34" charset="0"/>
-                <a:ea typeface="Calibri" pitchFamily="34" charset="-122"/>
-                <a:cs typeface="Calibri" pitchFamily="34" charset="-120"/>
+                <a:latin typeface="Cambria" pitchFamily="34" charset="0"/>
+                <a:ea typeface="Cambria" pitchFamily="34" charset="-122"/>
+                <a:cs typeface="Cambria" pitchFamily="34" charset="-120"/>
               </a:rPr>
               <a:t>Gains from missing info, not reflection (Table 5)</a:t>
             </a:r>
@@ -12084,9 +12092,9 @@
                 <a:solidFill>
                   <a:srgbClr val="FFFFFF"/>
                 </a:solidFill>
-                <a:latin typeface="Calibri" pitchFamily="34" charset="0"/>
-                <a:ea typeface="Calibri" pitchFamily="34" charset="-122"/>
-                <a:cs typeface="Calibri" pitchFamily="34" charset="-120"/>
+                <a:latin typeface="Cambria" pitchFamily="34" charset="0"/>
+                <a:ea typeface="Cambria" pitchFamily="34" charset="-122"/>
+                <a:cs typeface="Cambria" pitchFamily="34" charset="-120"/>
               </a:rPr>
               <a:t>!</a:t>
             </a:r>
@@ -12189,9 +12197,9 @@
                 <a:solidFill>
                   <a:srgbClr val="1E293B"/>
                 </a:solidFill>
-                <a:latin typeface="Calibri" pitchFamily="34" charset="0"/>
-                <a:ea typeface="Calibri" pitchFamily="34" charset="-122"/>
-                <a:cs typeface="Calibri" pitchFamily="34" charset="-120"/>
+                <a:latin typeface="Cambria" pitchFamily="34" charset="0"/>
+                <a:ea typeface="Cambria" pitchFamily="34" charset="-122"/>
+                <a:cs typeface="Cambria" pitchFamily="34" charset="-120"/>
               </a:rPr>
               <a:t>1. Weak initial prompt</a:t>
             </a:r>
@@ -12206,9 +12214,9 @@
                 <a:solidFill>
                   <a:srgbClr val="1E293B"/>
                 </a:solidFill>
-                <a:latin typeface="Calibri" pitchFamily="34" charset="0"/>
-                <a:ea typeface="Calibri" pitchFamily="34" charset="-122"/>
-                <a:cs typeface="Calibri" pitchFamily="34" charset="-120"/>
+                <a:latin typeface="Cambria" pitchFamily="34" charset="0"/>
+                <a:ea typeface="Cambria" pitchFamily="34" charset="-122"/>
+                <a:cs typeface="Cambria" pitchFamily="34" charset="-120"/>
               </a:rPr>
               <a:t>    omits required rules</a:t>
             </a:r>
@@ -12297,9 +12305,9 @@
                 <a:solidFill>
                   <a:srgbClr val="1E293B"/>
                 </a:solidFill>
-                <a:latin typeface="Calibri" pitchFamily="34" charset="0"/>
-                <a:ea typeface="Calibri" pitchFamily="34" charset="-122"/>
-                <a:cs typeface="Calibri" pitchFamily="34" charset="-120"/>
+                <a:latin typeface="Cambria" pitchFamily="34" charset="0"/>
+                <a:ea typeface="Cambria" pitchFamily="34" charset="-122"/>
+                <a:cs typeface="Cambria" pitchFamily="34" charset="-120"/>
               </a:rPr>
               <a:t>2. Feedback re-adds rules</a:t>
             </a:r>
@@ -12314,9 +12322,9 @@
                 <a:solidFill>
                   <a:srgbClr val="1E293B"/>
                 </a:solidFill>
-                <a:latin typeface="Calibri" pitchFamily="34" charset="0"/>
-                <a:ea typeface="Calibri" pitchFamily="34" charset="-122"/>
-                <a:cs typeface="Calibri" pitchFamily="34" charset="-120"/>
+                <a:latin typeface="Cambria" pitchFamily="34" charset="0"/>
+                <a:ea typeface="Cambria" pitchFamily="34" charset="-122"/>
+                <a:cs typeface="Cambria" pitchFamily="34" charset="-120"/>
               </a:rPr>
               <a:t>   "Add missing word X"</a:t>
             </a:r>
@@ -12405,9 +12413,9 @@
                 <a:solidFill>
                   <a:srgbClr val="DC2626"/>
                 </a:solidFill>
-                <a:latin typeface="Calibri" pitchFamily="34" charset="0"/>
-                <a:ea typeface="Calibri" pitchFamily="34" charset="-122"/>
-                <a:cs typeface="Calibri" pitchFamily="34" charset="-120"/>
+                <a:latin typeface="Cambria" pitchFamily="34" charset="0"/>
+                <a:ea typeface="Cambria" pitchFamily="34" charset="-122"/>
+                <a:cs typeface="Cambria" pitchFamily="34" charset="-120"/>
               </a:rPr>
               <a:t>3. Improves -&gt; claim "It works!"</a:t>
             </a:r>
@@ -12491,9 +12499,9 @@
                 <a:solidFill>
                   <a:srgbClr val="FFFFFF"/>
                 </a:solidFill>
-                <a:latin typeface="Calibri" pitchFamily="34" charset="0"/>
-                <a:ea typeface="Calibri" pitchFamily="34" charset="-122"/>
-                <a:cs typeface="Calibri" pitchFamily="34" charset="-120"/>
+                <a:latin typeface="Cambria" pitchFamily="34" charset="0"/>
+                <a:ea typeface="Cambria" pitchFamily="34" charset="-122"/>
+                <a:cs typeface="Cambria" pitchFamily="34" charset="-120"/>
               </a:rPr>
               <a:t>✓</a:t>
             </a:r>
@@ -12596,9 +12604,9 @@
                 <a:solidFill>
                   <a:srgbClr val="1E293B"/>
                 </a:solidFill>
-                <a:latin typeface="Calibri" pitchFamily="34" charset="0"/>
-                <a:ea typeface="Calibri" pitchFamily="34" charset="-122"/>
-                <a:cs typeface="Calibri" pitchFamily="34" charset="-120"/>
+                <a:latin typeface="Cambria" pitchFamily="34" charset="0"/>
+                <a:ea typeface="Cambria" pitchFamily="34" charset="-122"/>
+                <a:cs typeface="Cambria" pitchFamily="34" charset="-120"/>
               </a:rPr>
               <a:t>1. Complete prompt</a:t>
             </a:r>
@@ -12613,9 +12621,9 @@
                 <a:solidFill>
                   <a:srgbClr val="1E293B"/>
                 </a:solidFill>
-                <a:latin typeface="Calibri" pitchFamily="34" charset="0"/>
-                <a:ea typeface="Calibri" pitchFamily="34" charset="-122"/>
-                <a:cs typeface="Calibri" pitchFamily="34" charset="-120"/>
+                <a:latin typeface="Cambria" pitchFamily="34" charset="0"/>
+                <a:ea typeface="Cambria" pitchFamily="34" charset="-122"/>
+                <a:cs typeface="Cambria" pitchFamily="34" charset="-120"/>
               </a:rPr>
               <a:t>   all rules up-front</a:t>
             </a:r>
@@ -12704,9 +12712,9 @@
                 <a:solidFill>
                   <a:srgbClr val="166534"/>
                 </a:solidFill>
-                <a:latin typeface="Calibri" pitchFamily="34" charset="0"/>
-                <a:ea typeface="Calibri" pitchFamily="34" charset="-122"/>
-                <a:cs typeface="Calibri" pitchFamily="34" charset="-120"/>
+                <a:latin typeface="Cambria" pitchFamily="34" charset="0"/>
+                <a:ea typeface="Cambria" pitchFamily="34" charset="-122"/>
+                <a:cs typeface="Cambria" pitchFamily="34" charset="-120"/>
               </a:rPr>
               <a:t>2. Strong answer immediately</a:t>
             </a:r>
@@ -12795,9 +12803,9 @@
                 <a:solidFill>
                   <a:srgbClr val="DC2626"/>
                 </a:solidFill>
-                <a:latin typeface="Calibri" pitchFamily="34" charset="0"/>
-                <a:ea typeface="Calibri" pitchFamily="34" charset="-122"/>
-                <a:cs typeface="Calibri" pitchFamily="34" charset="-120"/>
+                <a:latin typeface="Cambria" pitchFamily="34" charset="0"/>
+                <a:ea typeface="Cambria" pitchFamily="34" charset="-122"/>
+                <a:cs typeface="Cambria" pitchFamily="34" charset="-120"/>
               </a:rPr>
               <a:t>3. Self-correction -&gt; DROPS</a:t>
             </a:r>
@@ -12861,9 +12869,9 @@
                 <a:solidFill>
                   <a:srgbClr val="0F172A"/>
                 </a:solidFill>
-                <a:latin typeface="Calibri" pitchFamily="34" charset="0"/>
-                <a:ea typeface="Calibri" pitchFamily="34" charset="-122"/>
-                <a:cs typeface="Calibri" pitchFamily="34" charset="-120"/>
+                <a:latin typeface="Cambria" pitchFamily="34" charset="0"/>
+                <a:ea typeface="Cambria" pitchFamily="34" charset="-122"/>
+                <a:cs typeface="Cambria" pitchFamily="34" charset="-120"/>
               </a:rPr>
               <a:t>Takeaway: Well-prompted single shot beats loops. Gains were prompt artifacts.</a:t>
             </a:r>
@@ -12900,9 +12908,9 @@
                 <a:solidFill>
                   <a:srgbClr val="64748B"/>
                 </a:solidFill>
-                <a:latin typeface="Calibri" pitchFamily="34" charset="0"/>
-                <a:ea typeface="Calibri" pitchFamily="34" charset="-122"/>
-                <a:cs typeface="Calibri" pitchFamily="34" charset="-120"/>
+                <a:latin typeface="Cambria" pitchFamily="34" charset="0"/>
+                <a:ea typeface="Cambria" pitchFamily="34" charset="-122"/>
+                <a:cs typeface="Cambria" pitchFamily="34" charset="-120"/>
               </a:rPr>
               <a:t>Table 5: Constrained generation under flawed versus fair prompts</a:t>
             </a:r>
@@ -12939,9 +12947,9 @@
                 <a:solidFill>
                   <a:srgbClr val="64748B"/>
                 </a:solidFill>
-                <a:latin typeface="Calibri" pitchFamily="34" charset="0"/>
-                <a:ea typeface="Calibri" pitchFamily="34" charset="-122"/>
-                <a:cs typeface="Calibri" pitchFamily="34" charset="-120"/>
+                <a:latin typeface="Cambria" pitchFamily="34" charset="0"/>
+                <a:ea typeface="Cambria" pitchFamily="34" charset="-122"/>
+                <a:cs typeface="Cambria" pitchFamily="34" charset="-120"/>
               </a:rPr>
               <a:t>Large Language Models Cannot Self-Correct Reasoning Yet | ICLR 2024</a:t>
             </a:r>
@@ -12978,9 +12986,9 @@
                 <a:solidFill>
                   <a:srgbClr val="64748B"/>
                 </a:solidFill>
-                <a:latin typeface="Calibri" pitchFamily="34" charset="0"/>
-                <a:ea typeface="Calibri" pitchFamily="34" charset="-122"/>
-                <a:cs typeface="Calibri" pitchFamily="34" charset="-120"/>
+                <a:latin typeface="Cambria" pitchFamily="34" charset="0"/>
+                <a:ea typeface="Cambria" pitchFamily="34" charset="-122"/>
+                <a:cs typeface="Cambria" pitchFamily="34" charset="-120"/>
               </a:rPr>
               <a:t>17/23</a:t>
             </a:r>
@@ -13049,9 +13057,9 @@
                 <a:solidFill>
                   <a:srgbClr val="800020"/>
                 </a:solidFill>
-                <a:latin typeface="Calibri" pitchFamily="34" charset="0"/>
-                <a:ea typeface="Calibri" pitchFamily="34" charset="-122"/>
-                <a:cs typeface="Calibri" pitchFamily="34" charset="-120"/>
+                <a:latin typeface="Cambria" pitchFamily="34" charset="0"/>
+                <a:ea typeface="Cambria" pitchFamily="34" charset="-122"/>
+                <a:cs typeface="Cambria" pitchFamily="34" charset="-120"/>
               </a:rPr>
               <a:t>5. ANALYSIS</a:t>
             </a:r>
@@ -13127,9 +13135,9 @@
                 <a:solidFill>
                   <a:srgbClr val="64748B"/>
                 </a:solidFill>
-                <a:latin typeface="Calibri" pitchFamily="34" charset="0"/>
-                <a:ea typeface="Calibri" pitchFamily="34" charset="-122"/>
-                <a:cs typeface="Calibri" pitchFamily="34" charset="-120"/>
+                <a:latin typeface="Cambria" pitchFamily="34" charset="0"/>
+                <a:ea typeface="Cambria" pitchFamily="34" charset="-122"/>
+                <a:cs typeface="Cambria" pitchFamily="34" charset="-120"/>
               </a:rPr>
               <a:t>When correct reasoning flips to wrong (Figure 2)</a:t>
             </a:r>
@@ -13257,9 +13265,9 @@
                 <a:solidFill>
                   <a:srgbClr val="0F172A"/>
                 </a:solidFill>
-                <a:latin typeface="Calibri" pitchFamily="34" charset="0"/>
-                <a:ea typeface="Calibri" pitchFamily="34" charset="-122"/>
-                <a:cs typeface="Calibri" pitchFamily="34" charset="-120"/>
+                <a:latin typeface="Cambria" pitchFamily="34" charset="0"/>
+                <a:ea typeface="Cambria" pitchFamily="34" charset="-122"/>
+                <a:cs typeface="Cambria" pitchFamily="34" charset="-120"/>
               </a:rPr>
               <a:t>GSM8K: Terry eats 2 yogurts a day. A 4-pack costs $5. How much for 30 days?</a:t>
             </a:r>
@@ -13323,9 +13331,9 @@
                 <a:solidFill>
                   <a:srgbClr val="166534"/>
                 </a:solidFill>
-                <a:latin typeface="Calibri" pitchFamily="34" charset="0"/>
-                <a:ea typeface="Calibri" pitchFamily="34" charset="-122"/>
-                <a:cs typeface="Calibri" pitchFamily="34" charset="-120"/>
+                <a:latin typeface="Cambria" pitchFamily="34" charset="0"/>
+                <a:ea typeface="Cambria" pitchFamily="34" charset="-122"/>
+                <a:cs typeface="Cambria" pitchFamily="34" charset="-120"/>
               </a:rPr>
               <a:t>Round 1</a:t>
             </a:r>
@@ -13426,9 +13434,9 @@
                 <a:solidFill>
                   <a:srgbClr val="166534"/>
                 </a:solidFill>
-                <a:latin typeface="Calibri" pitchFamily="34" charset="0"/>
-                <a:ea typeface="Calibri" pitchFamily="34" charset="-122"/>
-                <a:cs typeface="Calibri" pitchFamily="34" charset="-120"/>
+                <a:latin typeface="Cambria" pitchFamily="34" charset="0"/>
+                <a:ea typeface="Cambria" pitchFamily="34" charset="-122"/>
+                <a:cs typeface="Cambria" pitchFamily="34" charset="-120"/>
               </a:rPr>
               <a:t>Correct</a:t>
             </a:r>
@@ -13465,9 +13473,9 @@
                 <a:solidFill>
                   <a:srgbClr val="1E293B"/>
                 </a:solidFill>
-                <a:latin typeface="Calibri" pitchFamily="34" charset="0"/>
-                <a:ea typeface="Calibri" pitchFamily="34" charset="-122"/>
-                <a:cs typeface="Calibri" pitchFamily="34" charset="-120"/>
+                <a:latin typeface="Cambria" pitchFamily="34" charset="0"/>
+                <a:ea typeface="Cambria" pitchFamily="34" charset="-122"/>
+                <a:cs typeface="Cambria" pitchFamily="34" charset="-120"/>
               </a:rPr>
               <a:t>30 x 2 = 60  |  60 / 4 = 15  |  15 x $5</a:t>
             </a:r>
@@ -13531,9 +13539,9 @@
                 <a:solidFill>
                   <a:srgbClr val="D97706"/>
                 </a:solidFill>
-                <a:latin typeface="Calibri" pitchFamily="34" charset="0"/>
-                <a:ea typeface="Calibri" pitchFamily="34" charset="-122"/>
-                <a:cs typeface="Calibri" pitchFamily="34" charset="-120"/>
+                <a:latin typeface="Cambria" pitchFamily="34" charset="0"/>
+                <a:ea typeface="Cambria" pitchFamily="34" charset="-122"/>
+                <a:cs typeface="Cambria" pitchFamily="34" charset="-120"/>
               </a:rPr>
               <a:t>Self-critique</a:t>
             </a:r>
@@ -13597,9 +13605,9 @@
                 <a:solidFill>
                   <a:srgbClr val="D97706"/>
                 </a:solidFill>
-                <a:latin typeface="Calibri" pitchFamily="34" charset="0"/>
-                <a:ea typeface="Calibri" pitchFamily="34" charset="-122"/>
-                <a:cs typeface="Calibri" pitchFamily="34" charset="-120"/>
+                <a:latin typeface="Cambria" pitchFamily="34" charset="0"/>
+                <a:ea typeface="Cambria" pitchFamily="34" charset="-122"/>
+                <a:cs typeface="Cambria" pitchFamily="34" charset="-120"/>
               </a:rPr>
               <a:t>"Find flaws"</a:t>
             </a:r>
@@ -13737,9 +13745,9 @@
                 <a:solidFill>
                   <a:srgbClr val="DC2626"/>
                 </a:solidFill>
-                <a:latin typeface="Calibri" pitchFamily="34" charset="0"/>
-                <a:ea typeface="Calibri" pitchFamily="34" charset="-122"/>
-                <a:cs typeface="Calibri" pitchFamily="34" charset="-120"/>
+                <a:latin typeface="Cambria" pitchFamily="34" charset="0"/>
+                <a:ea typeface="Cambria" pitchFamily="34" charset="-122"/>
+                <a:cs typeface="Cambria" pitchFamily="34" charset="-120"/>
               </a:rPr>
               <a:t>Round 2</a:t>
             </a:r>
@@ -13840,9 +13848,9 @@
                 <a:solidFill>
                   <a:srgbClr val="DC2626"/>
                 </a:solidFill>
-                <a:latin typeface="Calibri" pitchFamily="34" charset="0"/>
-                <a:ea typeface="Calibri" pitchFamily="34" charset="-122"/>
-                <a:cs typeface="Calibri" pitchFamily="34" charset="-120"/>
+                <a:latin typeface="Cambria" pitchFamily="34" charset="0"/>
+                <a:ea typeface="Cambria" pitchFamily="34" charset="-122"/>
+                <a:cs typeface="Cambria" pitchFamily="34" charset="-120"/>
               </a:rPr>
               <a:t>Wrong  •  Flipped</a:t>
             </a:r>
@@ -13879,9 +13887,9 @@
                 <a:solidFill>
                   <a:srgbClr val="1E293B"/>
                 </a:solidFill>
-                <a:latin typeface="Calibri" pitchFamily="34" charset="0"/>
-                <a:ea typeface="Calibri" pitchFamily="34" charset="-122"/>
-                <a:cs typeface="Calibri" pitchFamily="34" charset="-120"/>
+                <a:latin typeface="Cambria" pitchFamily="34" charset="0"/>
+                <a:ea typeface="Cambria" pitchFamily="34" charset="-122"/>
+                <a:cs typeface="Cambria" pitchFamily="34" charset="-120"/>
               </a:rPr>
               <a:t>Doubts correct math,</a:t>
             </a:r>
@@ -13896,9 +13904,9 @@
                 <a:solidFill>
                   <a:srgbClr val="1E293B"/>
                 </a:solidFill>
-                <a:latin typeface="Calibri" pitchFamily="34" charset="0"/>
-                <a:ea typeface="Calibri" pitchFamily="34" charset="-122"/>
-                <a:cs typeface="Calibri" pitchFamily="34" charset="-120"/>
+                <a:latin typeface="Cambria" pitchFamily="34" charset="0"/>
+                <a:ea typeface="Cambria" pitchFamily="34" charset="-122"/>
+                <a:cs typeface="Cambria" pitchFamily="34" charset="-120"/>
               </a:rPr>
               <a:t>hallucinates new logic</a:t>
             </a:r>
@@ -13987,9 +13995,9 @@
                 <a:solidFill>
                   <a:srgbClr val="FFFFFF"/>
                 </a:solidFill>
-                <a:latin typeface="Calibri" pitchFamily="34" charset="0"/>
-                <a:ea typeface="Calibri" pitchFamily="34" charset="-122"/>
-                <a:cs typeface="Calibri" pitchFamily="34" charset="-120"/>
+                <a:latin typeface="Cambria" pitchFamily="34" charset="0"/>
+                <a:ea typeface="Cambria" pitchFamily="34" charset="-122"/>
+                <a:cs typeface="Cambria" pitchFamily="34" charset="-120"/>
               </a:rPr>
               <a:t>!</a:t>
             </a:r>
@@ -14026,9 +14034,9 @@
                 <a:solidFill>
                   <a:srgbClr val="800020"/>
                 </a:solidFill>
-                <a:latin typeface="Calibri" pitchFamily="34" charset="0"/>
-                <a:ea typeface="Calibri" pitchFamily="34" charset="-122"/>
-                <a:cs typeface="Calibri" pitchFamily="34" charset="-120"/>
+                <a:latin typeface="Cambria" pitchFamily="34" charset="0"/>
+                <a:ea typeface="Cambria" pitchFamily="34" charset="-122"/>
+                <a:cs typeface="Cambria" pitchFamily="34" charset="-120"/>
               </a:rPr>
               <a:t>The prompt gaslights a correct answer.</a:t>
             </a:r>
@@ -14065,9 +14073,9 @@
                 <a:solidFill>
                   <a:srgbClr val="64748B"/>
                 </a:solidFill>
-                <a:latin typeface="Calibri" pitchFamily="34" charset="0"/>
-                <a:ea typeface="Calibri" pitchFamily="34" charset="-122"/>
-                <a:cs typeface="Calibri" pitchFamily="34" charset="-120"/>
+                <a:latin typeface="Cambria" pitchFamily="34" charset="0"/>
+                <a:ea typeface="Cambria" pitchFamily="34" charset="-122"/>
+                <a:cs typeface="Cambria" pitchFamily="34" charset="-120"/>
               </a:rPr>
               <a:t>Figure 2: Yogurt case study, a correct $75 answer flips to $150 after self-critique</a:t>
             </a:r>
@@ -14104,9 +14112,9 @@
                 <a:solidFill>
                   <a:srgbClr val="64748B"/>
                 </a:solidFill>
-                <a:latin typeface="Calibri" pitchFamily="34" charset="0"/>
-                <a:ea typeface="Calibri" pitchFamily="34" charset="-122"/>
-                <a:cs typeface="Calibri" pitchFamily="34" charset="-120"/>
+                <a:latin typeface="Cambria" pitchFamily="34" charset="0"/>
+                <a:ea typeface="Cambria" pitchFamily="34" charset="-122"/>
+                <a:cs typeface="Cambria" pitchFamily="34" charset="-120"/>
               </a:rPr>
               <a:t>Large Language Models Cannot Self-Correct Reasoning Yet | ICLR 2024</a:t>
             </a:r>
@@ -14143,9 +14151,9 @@
                 <a:solidFill>
                   <a:srgbClr val="64748B"/>
                 </a:solidFill>
-                <a:latin typeface="Calibri" pitchFamily="34" charset="0"/>
-                <a:ea typeface="Calibri" pitchFamily="34" charset="-122"/>
-                <a:cs typeface="Calibri" pitchFamily="34" charset="-120"/>
+                <a:latin typeface="Cambria" pitchFamily="34" charset="0"/>
+                <a:ea typeface="Cambria" pitchFamily="34" charset="-122"/>
+                <a:cs typeface="Cambria" pitchFamily="34" charset="-120"/>
               </a:rPr>
               <a:t>18/23</a:t>
             </a:r>
@@ -14214,9 +14222,9 @@
                 <a:solidFill>
                   <a:srgbClr val="800020"/>
                 </a:solidFill>
-                <a:latin typeface="Calibri" pitchFamily="34" charset="0"/>
-                <a:ea typeface="Calibri" pitchFamily="34" charset="-122"/>
-                <a:cs typeface="Calibri" pitchFamily="34" charset="-120"/>
+                <a:latin typeface="Cambria" pitchFamily="34" charset="0"/>
+                <a:ea typeface="Cambria" pitchFamily="34" charset="-122"/>
+                <a:cs typeface="Cambria" pitchFamily="34" charset="-120"/>
               </a:rPr>
               <a:t>5. ANALYSIS</a:t>
             </a:r>
@@ -14292,9 +14300,9 @@
                 <a:solidFill>
                   <a:srgbClr val="64748B"/>
                 </a:solidFill>
-                <a:latin typeface="Calibri" pitchFamily="34" charset="0"/>
-                <a:ea typeface="Calibri" pitchFamily="34" charset="-122"/>
-                <a:cs typeface="Calibri" pitchFamily="34" charset="-120"/>
+                <a:latin typeface="Cambria" pitchFamily="34" charset="0"/>
+                <a:ea typeface="Cambria" pitchFamily="34" charset="-122"/>
+                <a:cs typeface="Cambria" pitchFamily="34" charset="-120"/>
               </a:rPr>
               <a:t>Why intrinsic checks are as hard as generation</a:t>
             </a:r>
@@ -14378,9 +14386,9 @@
                 <a:solidFill>
                   <a:srgbClr val="FFFFFF"/>
                 </a:solidFill>
-                <a:latin typeface="Calibri" pitchFamily="34" charset="0"/>
-                <a:ea typeface="Calibri" pitchFamily="34" charset="-122"/>
-                <a:cs typeface="Calibri" pitchFamily="34" charset="-120"/>
+                <a:latin typeface="Cambria" pitchFamily="34" charset="0"/>
+                <a:ea typeface="Cambria" pitchFamily="34" charset="-122"/>
+                <a:cs typeface="Cambria" pitchFamily="34" charset="-120"/>
               </a:rPr>
               <a:t>1</a:t>
             </a:r>
@@ -14483,9 +14491,9 @@
                 <a:solidFill>
                   <a:srgbClr val="800020"/>
                 </a:solidFill>
-                <a:latin typeface="Calibri" pitchFamily="34" charset="0"/>
-                <a:ea typeface="Calibri" pitchFamily="34" charset="-122"/>
-                <a:cs typeface="Calibri" pitchFamily="34" charset="-120"/>
+                <a:latin typeface="Cambria" pitchFamily="34" charset="0"/>
+                <a:ea typeface="Cambria" pitchFamily="34" charset="-122"/>
+                <a:cs typeface="Cambria" pitchFamily="34" charset="-120"/>
               </a:rPr>
               <a:t>Knowledge Parity</a:t>
             </a:r>
@@ -14525,9 +14533,9 @@
                 <a:solidFill>
                   <a:srgbClr val="1E293B"/>
                 </a:solidFill>
-                <a:latin typeface="Calibri" pitchFamily="34" charset="0"/>
-                <a:ea typeface="Calibri" pitchFamily="34" charset="-122"/>
-                <a:cs typeface="Calibri" pitchFamily="34" charset="-120"/>
+                <a:latin typeface="Cambria" pitchFamily="34" charset="0"/>
+                <a:ea typeface="Cambria" pitchFamily="34" charset="-122"/>
+                <a:cs typeface="Cambria" pitchFamily="34" charset="-120"/>
               </a:rPr>
               <a:t>Critic = Generator.</a:t>
             </a:r>
@@ -14545,9 +14553,9 @@
                 <a:solidFill>
                   <a:srgbClr val="1E293B"/>
                 </a:solidFill>
-                <a:latin typeface="Calibri" pitchFamily="34" charset="0"/>
-                <a:ea typeface="Calibri" pitchFamily="34" charset="-122"/>
-                <a:cs typeface="Calibri" pitchFamily="34" charset="-120"/>
+                <a:latin typeface="Cambria" pitchFamily="34" charset="0"/>
+                <a:ea typeface="Cambria" pitchFamily="34" charset="-122"/>
+                <a:cs typeface="Cambria" pitchFamily="34" charset="-120"/>
               </a:rPr>
               <a:t>If you can't generate it,</a:t>
             </a:r>
@@ -14565,9 +14573,9 @@
                 <a:solidFill>
                   <a:srgbClr val="1E293B"/>
                 </a:solidFill>
-                <a:latin typeface="Calibri" pitchFamily="34" charset="0"/>
-                <a:ea typeface="Calibri" pitchFamily="34" charset="-122"/>
-                <a:cs typeface="Calibri" pitchFamily="34" charset="-120"/>
+                <a:latin typeface="Cambria" pitchFamily="34" charset="0"/>
+                <a:ea typeface="Cambria" pitchFamily="34" charset="-122"/>
+                <a:cs typeface="Cambria" pitchFamily="34" charset="-120"/>
               </a:rPr>
               <a:t>you can't verify it.</a:t>
             </a:r>
@@ -14629,9 +14637,9 @@
                 <a:solidFill>
                   <a:srgbClr val="800020"/>
                 </a:solidFill>
-                <a:latin typeface="Calibri" pitchFamily="34" charset="0"/>
-                <a:ea typeface="Calibri" pitchFamily="34" charset="-122"/>
-                <a:cs typeface="Calibri" pitchFamily="34" charset="-120"/>
+                <a:latin typeface="Cambria" pitchFamily="34" charset="0"/>
+                <a:ea typeface="Cambria" pitchFamily="34" charset="-122"/>
+                <a:cs typeface="Cambria" pitchFamily="34" charset="-120"/>
               </a:rPr>
               <a:t>≡</a:t>
             </a:r>
@@ -14715,9 +14723,9 @@
                 <a:solidFill>
                   <a:srgbClr val="FFFFFF"/>
                 </a:solidFill>
-                <a:latin typeface="Calibri" pitchFamily="34" charset="0"/>
-                <a:ea typeface="Calibri" pitchFamily="34" charset="-122"/>
-                <a:cs typeface="Calibri" pitchFamily="34" charset="-120"/>
+                <a:latin typeface="Cambria" pitchFamily="34" charset="0"/>
+                <a:ea typeface="Cambria" pitchFamily="34" charset="-122"/>
+                <a:cs typeface="Cambria" pitchFamily="34" charset="-120"/>
               </a:rPr>
               <a:t>2</a:t>
             </a:r>
@@ -14820,9 +14828,9 @@
                 <a:solidFill>
                   <a:srgbClr val="800020"/>
                 </a:solidFill>
-                <a:latin typeface="Calibri" pitchFamily="34" charset="0"/>
-                <a:ea typeface="Calibri" pitchFamily="34" charset="-122"/>
-                <a:cs typeface="Calibri" pitchFamily="34" charset="-120"/>
+                <a:latin typeface="Cambria" pitchFamily="34" charset="0"/>
+                <a:ea typeface="Cambria" pitchFamily="34" charset="-122"/>
+                <a:cs typeface="Cambria" pitchFamily="34" charset="-120"/>
               </a:rPr>
               <a:t>Instruction tuning</a:t>
             </a:r>
@@ -14862,9 +14870,9 @@
                 <a:solidFill>
                   <a:srgbClr val="1E293B"/>
                 </a:solidFill>
-                <a:latin typeface="Calibri" pitchFamily="34" charset="0"/>
-                <a:ea typeface="Calibri" pitchFamily="34" charset="-122"/>
-                <a:cs typeface="Calibri" pitchFamily="34" charset="-120"/>
+                <a:latin typeface="Cambria" pitchFamily="34" charset="0"/>
+                <a:ea typeface="Cambria" pitchFamily="34" charset="-122"/>
+                <a:cs typeface="Cambria" pitchFamily="34" charset="-120"/>
               </a:rPr>
               <a:t>"Find flaws" biases</a:t>
             </a:r>
@@ -14882,9 +14890,9 @@
                 <a:solidFill>
                   <a:srgbClr val="1E293B"/>
                 </a:solidFill>
-                <a:latin typeface="Calibri" pitchFamily="34" charset="0"/>
-                <a:ea typeface="Calibri" pitchFamily="34" charset="-122"/>
-                <a:cs typeface="Calibri" pitchFamily="34" charset="-120"/>
+                <a:latin typeface="Cambria" pitchFamily="34" charset="0"/>
+                <a:ea typeface="Cambria" pitchFamily="34" charset="-122"/>
+                <a:cs typeface="Cambria" pitchFamily="34" charset="-120"/>
               </a:rPr>
               <a:t>model to invent errors</a:t>
             </a:r>
@@ -14902,9 +14910,9 @@
                 <a:solidFill>
                   <a:srgbClr val="1E293B"/>
                 </a:solidFill>
-                <a:latin typeface="Calibri" pitchFamily="34" charset="0"/>
-                <a:ea typeface="Calibri" pitchFamily="34" charset="-122"/>
-                <a:cs typeface="Calibri" pitchFamily="34" charset="-120"/>
+                <a:latin typeface="Cambria" pitchFamily="34" charset="0"/>
+                <a:ea typeface="Cambria" pitchFamily="34" charset="-122"/>
+                <a:cs typeface="Cambria" pitchFamily="34" charset="-120"/>
               </a:rPr>
               <a:t>even when sound.</a:t>
             </a:r>
@@ -14966,9 +14974,9 @@
                 <a:solidFill>
                   <a:srgbClr val="800020"/>
                 </a:solidFill>
-                <a:latin typeface="Calibri" pitchFamily="34" charset="0"/>
-                <a:ea typeface="Calibri" pitchFamily="34" charset="-122"/>
-                <a:cs typeface="Calibri" pitchFamily="34" charset="-120"/>
+                <a:latin typeface="Cambria" pitchFamily="34" charset="0"/>
+                <a:ea typeface="Cambria" pitchFamily="34" charset="-122"/>
+                <a:cs typeface="Cambria" pitchFamily="34" charset="-120"/>
               </a:rPr>
               <a:t>↯</a:t>
             </a:r>
@@ -15052,9 +15060,9 @@
                 <a:solidFill>
                   <a:srgbClr val="FFFFFF"/>
                 </a:solidFill>
-                <a:latin typeface="Calibri" pitchFamily="34" charset="0"/>
-                <a:ea typeface="Calibri" pitchFamily="34" charset="-122"/>
-                <a:cs typeface="Calibri" pitchFamily="34" charset="-120"/>
+                <a:latin typeface="Cambria" pitchFamily="34" charset="0"/>
+                <a:ea typeface="Cambria" pitchFamily="34" charset="-122"/>
+                <a:cs typeface="Cambria" pitchFamily="34" charset="-120"/>
               </a:rPr>
               <a:t>3</a:t>
             </a:r>
@@ -15157,9 +15165,9 @@
                 <a:solidFill>
                   <a:srgbClr val="800020"/>
                 </a:solidFill>
-                <a:latin typeface="Calibri" pitchFamily="34" charset="0"/>
-                <a:ea typeface="Calibri" pitchFamily="34" charset="-122"/>
-                <a:cs typeface="Calibri" pitchFamily="34" charset="-120"/>
+                <a:latin typeface="Cambria" pitchFamily="34" charset="0"/>
+                <a:ea typeface="Cambria" pitchFamily="34" charset="-122"/>
+                <a:cs typeface="Cambria" pitchFamily="34" charset="-120"/>
               </a:rPr>
               <a:t>No signal</a:t>
             </a:r>
@@ -15199,9 +15207,9 @@
                 <a:solidFill>
                   <a:srgbClr val="1E293B"/>
                 </a:solidFill>
-                <a:latin typeface="Calibri" pitchFamily="34" charset="0"/>
-                <a:ea typeface="Calibri" pitchFamily="34" charset="-122"/>
-                <a:cs typeface="Calibri" pitchFamily="34" charset="-120"/>
+                <a:latin typeface="Cambria" pitchFamily="34" charset="0"/>
+                <a:ea typeface="Cambria" pitchFamily="34" charset="-122"/>
+                <a:cs typeface="Cambria" pitchFamily="34" charset="-120"/>
               </a:rPr>
               <a:t>Without Python/oracle,</a:t>
             </a:r>
@@ -15219,9 +15227,9 @@
                 <a:solidFill>
                   <a:srgbClr val="1E293B"/>
                 </a:solidFill>
-                <a:latin typeface="Calibri" pitchFamily="34" charset="0"/>
-                <a:ea typeface="Calibri" pitchFamily="34" charset="-122"/>
-                <a:cs typeface="Calibri" pitchFamily="34" charset="-120"/>
+                <a:latin typeface="Cambria" pitchFamily="34" charset="0"/>
+                <a:ea typeface="Cambria" pitchFamily="34" charset="-122"/>
+                <a:cs typeface="Cambria" pitchFamily="34" charset="-120"/>
               </a:rPr>
               <a:t>can't tell fix from</a:t>
             </a:r>
@@ -15239,9 +15247,9 @@
                 <a:solidFill>
                   <a:srgbClr val="1E293B"/>
                 </a:solidFill>
-                <a:latin typeface="Calibri" pitchFamily="34" charset="0"/>
-                <a:ea typeface="Calibri" pitchFamily="34" charset="-122"/>
-                <a:cs typeface="Calibri" pitchFamily="34" charset="-120"/>
+                <a:latin typeface="Cambria" pitchFamily="34" charset="0"/>
+                <a:ea typeface="Cambria" pitchFamily="34" charset="-122"/>
+                <a:cs typeface="Cambria" pitchFamily="34" charset="-120"/>
               </a:rPr>
               <a:t>hallucination.</a:t>
             </a:r>
@@ -15303,9 +15311,9 @@
                 <a:solidFill>
                   <a:srgbClr val="800020"/>
                 </a:solidFill>
-                <a:latin typeface="Calibri" pitchFamily="34" charset="0"/>
-                <a:ea typeface="Calibri" pitchFamily="34" charset="-122"/>
-                <a:cs typeface="Calibri" pitchFamily="34" charset="-120"/>
+                <a:latin typeface="Cambria" pitchFamily="34" charset="0"/>
+                <a:ea typeface="Cambria" pitchFamily="34" charset="-122"/>
+                <a:cs typeface="Cambria" pitchFamily="34" charset="-120"/>
               </a:rPr>
               <a:t>∅</a:t>
             </a:r>
@@ -15342,9 +15350,9 @@
                 <a:solidFill>
                   <a:srgbClr val="64748B"/>
                 </a:solidFill>
-                <a:latin typeface="Calibri" pitchFamily="34" charset="0"/>
-                <a:ea typeface="Calibri" pitchFamily="34" charset="-122"/>
-                <a:cs typeface="Calibri" pitchFamily="34" charset="-120"/>
+                <a:latin typeface="Cambria" pitchFamily="34" charset="0"/>
+                <a:ea typeface="Cambria" pitchFamily="34" charset="-122"/>
+                <a:cs typeface="Cambria" pitchFamily="34" charset="-120"/>
               </a:rPr>
               <a:t>Large Language Models Cannot Self-Correct Reasoning Yet | ICLR 2024</a:t>
             </a:r>
@@ -15381,9 +15389,9 @@
                 <a:solidFill>
                   <a:srgbClr val="64748B"/>
                 </a:solidFill>
-                <a:latin typeface="Calibri" pitchFamily="34" charset="0"/>
-                <a:ea typeface="Calibri" pitchFamily="34" charset="-122"/>
-                <a:cs typeface="Calibri" pitchFamily="34" charset="-120"/>
+                <a:latin typeface="Cambria" pitchFamily="34" charset="0"/>
+                <a:ea typeface="Cambria" pitchFamily="34" charset="-122"/>
+                <a:cs typeface="Cambria" pitchFamily="34" charset="-120"/>
               </a:rPr>
               <a:t>19/23</a:t>
             </a:r>
@@ -15452,9 +15460,9 @@
                 <a:solidFill>
                   <a:srgbClr val="800020"/>
                 </a:solidFill>
-                <a:latin typeface="Calibri" pitchFamily="34" charset="0"/>
-                <a:ea typeface="Calibri" pitchFamily="34" charset="-122"/>
-                <a:cs typeface="Calibri" pitchFamily="34" charset="-120"/>
+                <a:latin typeface="Cambria" pitchFamily="34" charset="0"/>
+                <a:ea typeface="Cambria" pitchFamily="34" charset="-122"/>
+                <a:cs typeface="Cambria" pitchFamily="34" charset="-120"/>
               </a:rPr>
               <a:t>OVERVIEW</a:t>
             </a:r>
@@ -15530,9 +15538,9 @@
                 <a:solidFill>
                   <a:srgbClr val="64748B"/>
                 </a:solidFill>
-                <a:latin typeface="Calibri" pitchFamily="34" charset="0"/>
-                <a:ea typeface="Calibri" pitchFamily="34" charset="-122"/>
-                <a:cs typeface="Calibri" pitchFamily="34" charset="-120"/>
+                <a:latin typeface="Cambria" pitchFamily="34" charset="0"/>
+                <a:ea typeface="Cambria" pitchFamily="34" charset="-122"/>
+                <a:cs typeface="Cambria" pitchFamily="34" charset="-120"/>
               </a:rPr>
               <a:t>Six sections tracing motivation to constructive future work</a:t>
             </a:r>
@@ -15616,9 +15624,9 @@
                 <a:solidFill>
                   <a:srgbClr val="FFFFFF"/>
                 </a:solidFill>
-                <a:latin typeface="Calibri" pitchFamily="34" charset="0"/>
-                <a:ea typeface="Calibri" pitchFamily="34" charset="-122"/>
-                <a:cs typeface="Calibri" pitchFamily="34" charset="-120"/>
+                <a:latin typeface="Cambria" pitchFamily="34" charset="0"/>
+                <a:ea typeface="Cambria" pitchFamily="34" charset="-122"/>
+                <a:cs typeface="Cambria" pitchFamily="34" charset="-120"/>
               </a:rPr>
               <a:t>1</a:t>
             </a:r>
@@ -15694,9 +15702,9 @@
                 <a:solidFill>
                   <a:srgbClr val="64748B"/>
                 </a:solidFill>
-                <a:latin typeface="Calibri" pitchFamily="34" charset="0"/>
-                <a:ea typeface="Calibri" pitchFamily="34" charset="-122"/>
-                <a:cs typeface="Calibri" pitchFamily="34" charset="-120"/>
+                <a:latin typeface="Cambria" pitchFamily="34" charset="0"/>
+                <a:ea typeface="Cambria" pitchFamily="34" charset="-122"/>
+                <a:cs typeface="Cambria" pitchFamily="34" charset="-120"/>
               </a:rPr>
               <a:t>Why multi-step reasoning fails and what self-correction promises.</a:t>
             </a:r>
@@ -15780,9 +15788,9 @@
                 <a:solidFill>
                   <a:srgbClr val="FFFFFF"/>
                 </a:solidFill>
-                <a:latin typeface="Calibri" pitchFamily="34" charset="0"/>
-                <a:ea typeface="Calibri" pitchFamily="34" charset="-122"/>
-                <a:cs typeface="Calibri" pitchFamily="34" charset="-120"/>
+                <a:latin typeface="Cambria" pitchFamily="34" charset="0"/>
+                <a:ea typeface="Cambria" pitchFamily="34" charset="-122"/>
+                <a:cs typeface="Cambria" pitchFamily="34" charset="-120"/>
               </a:rPr>
               <a:t>2</a:t>
             </a:r>
@@ -15858,9 +15866,9 @@
                 <a:solidFill>
                   <a:srgbClr val="64748B"/>
                 </a:solidFill>
-                <a:latin typeface="Calibri" pitchFamily="34" charset="0"/>
-                <a:ea typeface="Calibri" pitchFamily="34" charset="-122"/>
-                <a:cs typeface="Calibri" pitchFamily="34" charset="-120"/>
+                <a:latin typeface="Cambria" pitchFamily="34" charset="0"/>
+                <a:ea typeface="Cambria" pitchFamily="34" charset="-122"/>
+                <a:cs typeface="Cambria" pitchFamily="34" charset="-120"/>
               </a:rPr>
               <a:t>RCI, Reflexion, Self-Refine, Debate and their evaluation flaws.</a:t>
             </a:r>
@@ -15944,9 +15952,9 @@
                 <a:solidFill>
                   <a:srgbClr val="FFFFFF"/>
                 </a:solidFill>
-                <a:latin typeface="Calibri" pitchFamily="34" charset="0"/>
-                <a:ea typeface="Calibri" pitchFamily="34" charset="-122"/>
-                <a:cs typeface="Calibri" pitchFamily="34" charset="-120"/>
+                <a:latin typeface="Cambria" pitchFamily="34" charset="0"/>
+                <a:ea typeface="Cambria" pitchFamily="34" charset="-122"/>
+                <a:cs typeface="Cambria" pitchFamily="34" charset="-120"/>
               </a:rPr>
               <a:t>3</a:t>
             </a:r>
@@ -16022,9 +16030,9 @@
                 <a:solidFill>
                   <a:srgbClr val="64748B"/>
                 </a:solidFill>
-                <a:latin typeface="Calibri" pitchFamily="34" charset="0"/>
-                <a:ea typeface="Calibri" pitchFamily="34" charset="-122"/>
-                <a:cs typeface="Calibri" pitchFamily="34" charset="-120"/>
+                <a:latin typeface="Cambria" pitchFamily="34" charset="0"/>
+                <a:ea typeface="Cambria" pitchFamily="34" charset="-122"/>
+                <a:cs typeface="Cambria" pitchFamily="34" charset="-120"/>
               </a:rPr>
               <a:t>GSM8K, CSQA, HotpotQA across GPT-3.5, GPT-4, Turbo, Llama-2.</a:t>
             </a:r>
@@ -16108,9 +16116,9 @@
                 <a:solidFill>
                   <a:srgbClr val="FFFFFF"/>
                 </a:solidFill>
-                <a:latin typeface="Calibri" pitchFamily="34" charset="0"/>
-                <a:ea typeface="Calibri" pitchFamily="34" charset="-122"/>
-                <a:cs typeface="Calibri" pitchFamily="34" charset="-120"/>
+                <a:latin typeface="Cambria" pitchFamily="34" charset="0"/>
+                <a:ea typeface="Cambria" pitchFamily="34" charset="-122"/>
+                <a:cs typeface="Cambria" pitchFamily="34" charset="-120"/>
               </a:rPr>
               <a:t>4</a:t>
             </a:r>
@@ -16186,9 +16194,9 @@
                 <a:solidFill>
                   <a:srgbClr val="64748B"/>
                 </a:solidFill>
-                <a:latin typeface="Calibri" pitchFamily="34" charset="0"/>
-                <a:ea typeface="Calibri" pitchFamily="34" charset="-122"/>
-                <a:cs typeface="Calibri" pitchFamily="34" charset="-120"/>
+                <a:latin typeface="Cambria" pitchFamily="34" charset="0"/>
+                <a:ea typeface="Cambria" pitchFamily="34" charset="-122"/>
+                <a:cs typeface="Cambria" pitchFamily="34" charset="-120"/>
               </a:rPr>
               <a:t>Accuracy declines after self-correction, net negative flips.</a:t>
             </a:r>
@@ -16272,9 +16280,9 @@
                 <a:solidFill>
                   <a:srgbClr val="FFFFFF"/>
                 </a:solidFill>
-                <a:latin typeface="Calibri" pitchFamily="34" charset="0"/>
-                <a:ea typeface="Calibri" pitchFamily="34" charset="-122"/>
-                <a:cs typeface="Calibri" pitchFamily="34" charset="-120"/>
+                <a:latin typeface="Cambria" pitchFamily="34" charset="0"/>
+                <a:ea typeface="Cambria" pitchFamily="34" charset="-122"/>
+                <a:cs typeface="Cambria" pitchFamily="34" charset="-120"/>
               </a:rPr>
               <a:t>5</a:t>
             </a:r>
@@ -16350,9 +16358,9 @@
                 <a:solidFill>
                   <a:srgbClr val="64748B"/>
                 </a:solidFill>
-                <a:latin typeface="Calibri" pitchFamily="34" charset="0"/>
-                <a:ea typeface="Calibri" pitchFamily="34" charset="-122"/>
-                <a:cs typeface="Calibri" pitchFamily="34" charset="-120"/>
+                <a:latin typeface="Cambria" pitchFamily="34" charset="0"/>
+                <a:ea typeface="Cambria" pitchFamily="34" charset="-122"/>
+                <a:cs typeface="Cambria" pitchFamily="34" charset="-120"/>
               </a:rPr>
               <a:t>Why gains vanish at equal compute and without feedback.</a:t>
             </a:r>
@@ -16436,9 +16444,9 @@
                 <a:solidFill>
                   <a:srgbClr val="FFFFFF"/>
                 </a:solidFill>
-                <a:latin typeface="Calibri" pitchFamily="34" charset="0"/>
-                <a:ea typeface="Calibri" pitchFamily="34" charset="-122"/>
-                <a:cs typeface="Calibri" pitchFamily="34" charset="-120"/>
+                <a:latin typeface="Cambria" pitchFamily="34" charset="0"/>
+                <a:ea typeface="Cambria" pitchFamily="34" charset="-122"/>
+                <a:cs typeface="Cambria" pitchFamily="34" charset="-120"/>
               </a:rPr>
               <a:t>6</a:t>
             </a:r>
@@ -16514,9 +16522,9 @@
                 <a:solidFill>
                   <a:srgbClr val="64748B"/>
                 </a:solidFill>
-                <a:latin typeface="Calibri" pitchFamily="34" charset="0"/>
-                <a:ea typeface="Calibri" pitchFamily="34" charset="-122"/>
-                <a:cs typeface="Calibri" pitchFamily="34" charset="-120"/>
+                <a:latin typeface="Cambria" pitchFamily="34" charset="0"/>
+                <a:ea typeface="Cambria" pitchFamily="34" charset="-122"/>
+                <a:cs typeface="Cambria" pitchFamily="34" charset="-120"/>
               </a:rPr>
               <a:t>External tools, verifiers, and fair evaluation standards.</a:t>
             </a:r>
@@ -16553,9 +16561,9 @@
                 <a:solidFill>
                   <a:srgbClr val="64748B"/>
                 </a:solidFill>
-                <a:latin typeface="Calibri" pitchFamily="34" charset="0"/>
-                <a:ea typeface="Calibri" pitchFamily="34" charset="-122"/>
-                <a:cs typeface="Calibri" pitchFamily="34" charset="-120"/>
+                <a:latin typeface="Cambria" pitchFamily="34" charset="0"/>
+                <a:ea typeface="Cambria" pitchFamily="34" charset="-122"/>
+                <a:cs typeface="Cambria" pitchFamily="34" charset="-120"/>
               </a:rPr>
               <a:t>Large Language Models Cannot Self-Correct Reasoning Yet | ICLR 2024</a:t>
             </a:r>
@@ -16592,9 +16600,9 @@
                 <a:solidFill>
                   <a:srgbClr val="64748B"/>
                 </a:solidFill>
-                <a:latin typeface="Calibri" pitchFamily="34" charset="0"/>
-                <a:ea typeface="Calibri" pitchFamily="34" charset="-122"/>
-                <a:cs typeface="Calibri" pitchFamily="34" charset="-120"/>
+                <a:latin typeface="Cambria" pitchFamily="34" charset="0"/>
+                <a:ea typeface="Cambria" pitchFamily="34" charset="-122"/>
+                <a:cs typeface="Cambria" pitchFamily="34" charset="-120"/>
               </a:rPr>
               <a:t>02/23</a:t>
             </a:r>
@@ -16663,9 +16671,9 @@
                 <a:solidFill>
                   <a:srgbClr val="800020"/>
                 </a:solidFill>
-                <a:latin typeface="Calibri" pitchFamily="34" charset="0"/>
-                <a:ea typeface="Calibri" pitchFamily="34" charset="-122"/>
-                <a:cs typeface="Calibri" pitchFamily="34" charset="-120"/>
+                <a:latin typeface="Cambria" pitchFamily="34" charset="0"/>
+                <a:ea typeface="Cambria" pitchFamily="34" charset="-122"/>
+                <a:cs typeface="Cambria" pitchFamily="34" charset="-120"/>
               </a:rPr>
               <a:t>6. CONCLUSION &amp; FUTURE WORK</a:t>
             </a:r>
@@ -16741,9 +16749,9 @@
                 <a:solidFill>
                   <a:srgbClr val="64748B"/>
                 </a:solidFill>
-                <a:latin typeface="Calibri" pitchFamily="34" charset="0"/>
-                <a:ea typeface="Calibri" pitchFamily="34" charset="-122"/>
-                <a:cs typeface="Calibri" pitchFamily="34" charset="-120"/>
+                <a:latin typeface="Cambria" pitchFamily="34" charset="0"/>
+                <a:ea typeface="Cambria" pitchFamily="34" charset="-122"/>
+                <a:cs typeface="Cambria" pitchFamily="34" charset="-120"/>
               </a:rPr>
               <a:t>Three conclusions from Huang et al. (ICLR 2024)</a:t>
             </a:r>
@@ -16827,9 +16835,9 @@
                 <a:solidFill>
                   <a:srgbClr val="FFFFFF"/>
                 </a:solidFill>
-                <a:latin typeface="Calibri" pitchFamily="34" charset="0"/>
-                <a:ea typeface="Calibri" pitchFamily="34" charset="-122"/>
-                <a:cs typeface="Calibri" pitchFamily="34" charset="-120"/>
+                <a:latin typeface="Cambria" pitchFamily="34" charset="0"/>
+                <a:ea typeface="Cambria" pitchFamily="34" charset="-122"/>
+                <a:cs typeface="Cambria" pitchFamily="34" charset="-120"/>
               </a:rPr>
               <a:t>1</a:t>
             </a:r>
@@ -16908,9 +16916,9 @@
                 <a:solidFill>
                   <a:srgbClr val="1E293B"/>
                 </a:solidFill>
-                <a:latin typeface="Calibri" pitchFamily="34" charset="0"/>
-                <a:ea typeface="Calibri" pitchFamily="34" charset="-122"/>
-                <a:cs typeface="Calibri" pitchFamily="34" charset="-120"/>
+                <a:latin typeface="Cambria" pitchFamily="34" charset="0"/>
+                <a:ea typeface="Cambria" pitchFamily="34" charset="-122"/>
+                <a:cs typeface="Cambria" pitchFamily="34" charset="-120"/>
               </a:rPr>
               <a:t>Without external feedback, accuracy consistently drops across models and tasks.</a:t>
             </a:r>
@@ -16994,9 +17002,9 @@
                 <a:solidFill>
                   <a:srgbClr val="FFFFFF"/>
                 </a:solidFill>
-                <a:latin typeface="Calibri" pitchFamily="34" charset="0"/>
-                <a:ea typeface="Calibri" pitchFamily="34" charset="-122"/>
-                <a:cs typeface="Calibri" pitchFamily="34" charset="-120"/>
+                <a:latin typeface="Cambria" pitchFamily="34" charset="0"/>
+                <a:ea typeface="Cambria" pitchFamily="34" charset="-122"/>
+                <a:cs typeface="Cambria" pitchFamily="34" charset="-120"/>
               </a:rPr>
               <a:t>2</a:t>
             </a:r>
@@ -17075,9 +17083,9 @@
                 <a:solidFill>
                   <a:srgbClr val="1E293B"/>
                 </a:solidFill>
-                <a:latin typeface="Calibri" pitchFamily="34" charset="0"/>
-                <a:ea typeface="Calibri" pitchFamily="34" charset="-122"/>
-                <a:cs typeface="Calibri" pitchFamily="34" charset="-120"/>
+                <a:latin typeface="Cambria" pitchFamily="34" charset="0"/>
+                <a:ea typeface="Cambria" pitchFamily="34" charset="-122"/>
+                <a:cs typeface="Cambria" pitchFamily="34" charset="-120"/>
               </a:rPr>
               <a:t>Oracle leakage, unfair compute, weak prompts created illusion of progress.</a:t>
             </a:r>
@@ -17161,9 +17169,9 @@
                 <a:solidFill>
                   <a:srgbClr val="FFFFFF"/>
                 </a:solidFill>
-                <a:latin typeface="Calibri" pitchFamily="34" charset="0"/>
-                <a:ea typeface="Calibri" pitchFamily="34" charset="-122"/>
-                <a:cs typeface="Calibri" pitchFamily="34" charset="-120"/>
+                <a:latin typeface="Cambria" pitchFamily="34" charset="0"/>
+                <a:ea typeface="Cambria" pitchFamily="34" charset="-122"/>
+                <a:cs typeface="Cambria" pitchFamily="34" charset="-120"/>
               </a:rPr>
               <a:t>3</a:t>
             </a:r>
@@ -17242,9 +17250,9 @@
                 <a:solidFill>
                   <a:srgbClr val="1E293B"/>
                 </a:solidFill>
-                <a:latin typeface="Calibri" pitchFamily="34" charset="0"/>
-                <a:ea typeface="Calibri" pitchFamily="34" charset="-122"/>
-                <a:cs typeface="Calibri" pitchFamily="34" charset="-120"/>
+                <a:latin typeface="Cambria" pitchFamily="34" charset="0"/>
+                <a:ea typeface="Cambria" pitchFamily="34" charset="-122"/>
+                <a:cs typeface="Cambria" pitchFamily="34" charset="-120"/>
               </a:rPr>
               <a:t>Reliable refinement needs tools: code execution, verifiers, or human review.</a:t>
             </a:r>
@@ -17281,9 +17289,9 @@
                 <a:solidFill>
                   <a:srgbClr val="64748B"/>
                 </a:solidFill>
-                <a:latin typeface="Calibri" pitchFamily="34" charset="0"/>
-                <a:ea typeface="Calibri" pitchFamily="34" charset="-122"/>
-                <a:cs typeface="Calibri" pitchFamily="34" charset="-120"/>
+                <a:latin typeface="Cambria" pitchFamily="34" charset="0"/>
+                <a:ea typeface="Cambria" pitchFamily="34" charset="-122"/>
+                <a:cs typeface="Cambria" pitchFamily="34" charset="-120"/>
               </a:rPr>
               <a:t>Large Language Models Cannot Self-Correct Reasoning Yet | ICLR 2024</a:t>
             </a:r>
@@ -17320,9 +17328,9 @@
                 <a:solidFill>
                   <a:srgbClr val="64748B"/>
                 </a:solidFill>
-                <a:latin typeface="Calibri" pitchFamily="34" charset="0"/>
-                <a:ea typeface="Calibri" pitchFamily="34" charset="-122"/>
-                <a:cs typeface="Calibri" pitchFamily="34" charset="-120"/>
+                <a:latin typeface="Cambria" pitchFamily="34" charset="0"/>
+                <a:ea typeface="Cambria" pitchFamily="34" charset="-122"/>
+                <a:cs typeface="Cambria" pitchFamily="34" charset="-120"/>
               </a:rPr>
               <a:t>20/23</a:t>
             </a:r>
@@ -17391,9 +17399,9 @@
                 <a:solidFill>
                   <a:srgbClr val="800020"/>
                 </a:solidFill>
-                <a:latin typeface="Calibri" pitchFamily="34" charset="0"/>
-                <a:ea typeface="Calibri" pitchFamily="34" charset="-122"/>
-                <a:cs typeface="Calibri" pitchFamily="34" charset="-120"/>
+                <a:latin typeface="Cambria" pitchFamily="34" charset="0"/>
+                <a:ea typeface="Cambria" pitchFamily="34" charset="-122"/>
+                <a:cs typeface="Cambria" pitchFamily="34" charset="-120"/>
               </a:rPr>
               <a:t>6. CONCLUSION &amp; FUTURE WORK</a:t>
             </a:r>
@@ -17469,9 +17477,9 @@
                 <a:solidFill>
                   <a:srgbClr val="64748B"/>
                 </a:solidFill>
-                <a:latin typeface="Calibri" pitchFamily="34" charset="0"/>
-                <a:ea typeface="Calibri" pitchFamily="34" charset="-122"/>
-                <a:cs typeface="Calibri" pitchFamily="34" charset="-120"/>
+                <a:latin typeface="Cambria" pitchFamily="34" charset="0"/>
+                <a:ea typeface="Cambria" pitchFamily="34" charset="-122"/>
+                <a:cs typeface="Cambria" pitchFamily="34" charset="-120"/>
               </a:rPr>
               <a:t>Scope and boundaries of this research</a:t>
             </a:r>
@@ -17594,9 +17602,9 @@
                 <a:solidFill>
                   <a:srgbClr val="0F172A"/>
                 </a:solidFill>
-                <a:latin typeface="Calibri" pitchFamily="34" charset="0"/>
-                <a:ea typeface="Calibri" pitchFamily="34" charset="-122"/>
-                <a:cs typeface="Calibri" pitchFamily="34" charset="-120"/>
+                <a:latin typeface="Cambria" pitchFamily="34" charset="0"/>
+                <a:ea typeface="Cambria" pitchFamily="34" charset="-122"/>
+                <a:cs typeface="Cambria" pitchFamily="34" charset="-120"/>
               </a:rPr>
               <a:t>Reasoning-Specific</a:t>
             </a:r>
@@ -17636,9 +17644,9 @@
                 <a:solidFill>
                   <a:srgbClr val="1E293B"/>
                 </a:solidFill>
-                <a:latin typeface="Calibri" pitchFamily="34" charset="0"/>
-                <a:ea typeface="Calibri" pitchFamily="34" charset="-122"/>
-                <a:cs typeface="Calibri" pitchFamily="34" charset="-120"/>
+                <a:latin typeface="Cambria" pitchFamily="34" charset="0"/>
+                <a:ea typeface="Cambria" pitchFamily="34" charset="-122"/>
+                <a:cs typeface="Cambria" pitchFamily="34" charset="-120"/>
               </a:rPr>
               <a:t>Math/logic only. Not creative writing or translation.</a:t>
             </a:r>
@@ -17695,9 +17703,9 @@
                 <a:solidFill>
                   <a:srgbClr val="0F172A"/>
                 </a:solidFill>
-                <a:latin typeface="Calibri" pitchFamily="34" charset="0"/>
-                <a:ea typeface="Calibri" pitchFamily="34" charset="-122"/>
-                <a:cs typeface="Calibri" pitchFamily="34" charset="-120"/>
+                <a:latin typeface="Cambria" pitchFamily="34" charset="0"/>
+                <a:ea typeface="Cambria" pitchFamily="34" charset="-122"/>
+                <a:cs typeface="Cambria" pitchFamily="34" charset="-120"/>
               </a:rPr>
               <a:t>Prompting-Only</a:t>
             </a:r>
@@ -17737,9 +17745,9 @@
                 <a:solidFill>
                   <a:srgbClr val="1E293B"/>
                 </a:solidFill>
-                <a:latin typeface="Calibri" pitchFamily="34" charset="0"/>
-                <a:ea typeface="Calibri" pitchFamily="34" charset="-122"/>
-                <a:cs typeface="Calibri" pitchFamily="34" charset="-120"/>
+                <a:latin typeface="Cambria" pitchFamily="34" charset="0"/>
+                <a:ea typeface="Cambria" pitchFamily="34" charset="-122"/>
+                <a:cs typeface="Cambria" pitchFamily="34" charset="-120"/>
               </a:rPr>
               <a:t>Frozen models. Not fine-tuned for self-correction.</a:t>
             </a:r>
@@ -17796,9 +17804,9 @@
                 <a:solidFill>
                   <a:srgbClr val="0F172A"/>
                 </a:solidFill>
-                <a:latin typeface="Calibri" pitchFamily="34" charset="0"/>
-                <a:ea typeface="Calibri" pitchFamily="34" charset="-122"/>
-                <a:cs typeface="Calibri" pitchFamily="34" charset="-120"/>
+                <a:latin typeface="Cambria" pitchFamily="34" charset="0"/>
+                <a:ea typeface="Cambria" pitchFamily="34" charset="-122"/>
+                <a:cs typeface="Cambria" pitchFamily="34" charset="-120"/>
               </a:rPr>
               <a:t>2023 Models</a:t>
             </a:r>
@@ -17838,9 +17846,9 @@
                 <a:solidFill>
                   <a:srgbClr val="1E293B"/>
                 </a:solidFill>
-                <a:latin typeface="Calibri" pitchFamily="34" charset="0"/>
-                <a:ea typeface="Calibri" pitchFamily="34" charset="-122"/>
-                <a:cs typeface="Calibri" pitchFamily="34" charset="-120"/>
+                <a:latin typeface="Cambria" pitchFamily="34" charset="0"/>
+                <a:ea typeface="Cambria" pitchFamily="34" charset="-122"/>
+                <a:cs typeface="Cambria" pitchFamily="34" charset="-120"/>
               </a:rPr>
               <a:t>GPT-3.5/4, Llama-2. Newer reasoners (o1/o3) need study.</a:t>
             </a:r>
@@ -17963,9 +17971,9 @@
                 <a:solidFill>
                   <a:srgbClr val="0F172A"/>
                 </a:solidFill>
-                <a:latin typeface="Calibri" pitchFamily="34" charset="0"/>
-                <a:ea typeface="Calibri" pitchFamily="34" charset="-122"/>
-                <a:cs typeface="Calibri" pitchFamily="34" charset="-120"/>
+                <a:latin typeface="Cambria" pitchFamily="34" charset="0"/>
+                <a:ea typeface="Cambria" pitchFamily="34" charset="-122"/>
+                <a:cs typeface="Cambria" pitchFamily="34" charset="-120"/>
               </a:rPr>
               <a:t>HotpotQA 100 samples</a:t>
             </a:r>
@@ -18005,9 +18013,9 @@
                 <a:solidFill>
                   <a:srgbClr val="1E293B"/>
                 </a:solidFill>
-                <a:latin typeface="Calibri" pitchFamily="34" charset="0"/>
-                <a:ea typeface="Calibri" pitchFamily="34" charset="-122"/>
-                <a:cs typeface="Calibri" pitchFamily="34" charset="-120"/>
+                <a:latin typeface="Cambria" pitchFamily="34" charset="0"/>
+                <a:ea typeface="Cambria" pitchFamily="34" charset="-122"/>
+                <a:cs typeface="Cambria" pitchFamily="34" charset="-120"/>
               </a:rPr>
               <a:t>Limited by API cost, lower resolution.</a:t>
             </a:r>
@@ -18064,9 +18072,9 @@
                 <a:solidFill>
                   <a:srgbClr val="0F172A"/>
                 </a:solidFill>
-                <a:latin typeface="Calibri" pitchFamily="34" charset="0"/>
-                <a:ea typeface="Calibri" pitchFamily="34" charset="-122"/>
-                <a:cs typeface="Calibri" pitchFamily="34" charset="-120"/>
+                <a:latin typeface="Cambria" pitchFamily="34" charset="0"/>
+                <a:ea typeface="Cambria" pitchFamily="34" charset="-122"/>
+                <a:cs typeface="Cambria" pitchFamily="34" charset="-120"/>
               </a:rPr>
               <a:t>Prompt Sensitivity</a:t>
             </a:r>
@@ -18106,9 +18114,9 @@
                 <a:solidFill>
                   <a:srgbClr val="1E293B"/>
                 </a:solidFill>
-                <a:latin typeface="Calibri" pitchFamily="34" charset="0"/>
-                <a:ea typeface="Calibri" pitchFamily="34" charset="-122"/>
-                <a:cs typeface="Calibri" pitchFamily="34" charset="-120"/>
+                <a:latin typeface="Cambria" pitchFamily="34" charset="0"/>
+                <a:ea typeface="Cambria" pitchFamily="34" charset="-122"/>
+                <a:cs typeface="Cambria" pitchFamily="34" charset="-120"/>
               </a:rPr>
               <a:t>Multiple prompts tested, but not exhaustive.</a:t>
             </a:r>
@@ -18165,9 +18173,9 @@
                 <a:solidFill>
                   <a:srgbClr val="0F172A"/>
                 </a:solidFill>
-                <a:latin typeface="Calibri" pitchFamily="34" charset="0"/>
-                <a:ea typeface="Calibri" pitchFamily="34" charset="-122"/>
-                <a:cs typeface="Calibri" pitchFamily="34" charset="-120"/>
+                <a:latin typeface="Cambria" pitchFamily="34" charset="0"/>
+                <a:ea typeface="Cambria" pitchFamily="34" charset="-122"/>
+                <a:cs typeface="Cambria" pitchFamily="34" charset="-120"/>
               </a:rPr>
               <a:t>Closed-Book</a:t>
             </a:r>
@@ -18207,9 +18215,9 @@
                 <a:solidFill>
                   <a:srgbClr val="1E293B"/>
                 </a:solidFill>
-                <a:latin typeface="Calibri" pitchFamily="34" charset="0"/>
-                <a:ea typeface="Calibri" pitchFamily="34" charset="-122"/>
-                <a:cs typeface="Calibri" pitchFamily="34" charset="-120"/>
+                <a:latin typeface="Cambria" pitchFamily="34" charset="0"/>
+                <a:ea typeface="Cambria" pitchFamily="34" charset="-122"/>
+                <a:cs typeface="Cambria" pitchFamily="34" charset="-120"/>
               </a:rPr>
               <a:t>No retrieval (RAG) allowed.</a:t>
             </a:r>
@@ -18246,9 +18254,9 @@
                 <a:solidFill>
                   <a:srgbClr val="64748B"/>
                 </a:solidFill>
-                <a:latin typeface="Calibri" pitchFamily="34" charset="0"/>
-                <a:ea typeface="Calibri" pitchFamily="34" charset="-122"/>
-                <a:cs typeface="Calibri" pitchFamily="34" charset="-120"/>
+                <a:latin typeface="Cambria" pitchFamily="34" charset="0"/>
+                <a:ea typeface="Cambria" pitchFamily="34" charset="-122"/>
+                <a:cs typeface="Cambria" pitchFamily="34" charset="-120"/>
               </a:rPr>
               <a:t>Large Language Models Cannot Self-Correct Reasoning Yet | ICLR 2024</a:t>
             </a:r>
@@ -18285,9 +18293,9 @@
                 <a:solidFill>
                   <a:srgbClr val="64748B"/>
                 </a:solidFill>
-                <a:latin typeface="Calibri" pitchFamily="34" charset="0"/>
-                <a:ea typeface="Calibri" pitchFamily="34" charset="-122"/>
-                <a:cs typeface="Calibri" pitchFamily="34" charset="-120"/>
+                <a:latin typeface="Cambria" pitchFamily="34" charset="0"/>
+                <a:ea typeface="Cambria" pitchFamily="34" charset="-122"/>
+                <a:cs typeface="Cambria" pitchFamily="34" charset="-120"/>
               </a:rPr>
               <a:t>21/23</a:t>
             </a:r>
@@ -18356,9 +18364,9 @@
                 <a:solidFill>
                   <a:srgbClr val="800020"/>
                 </a:solidFill>
-                <a:latin typeface="Calibri" pitchFamily="34" charset="0"/>
-                <a:ea typeface="Calibri" pitchFamily="34" charset="-122"/>
-                <a:cs typeface="Calibri" pitchFamily="34" charset="-120"/>
+                <a:latin typeface="Cambria" pitchFamily="34" charset="0"/>
+                <a:ea typeface="Cambria" pitchFamily="34" charset="-122"/>
+                <a:cs typeface="Cambria" pitchFamily="34" charset="-120"/>
               </a:rPr>
               <a:t>6. CONCLUSION &amp; FUTURE WORK</a:t>
             </a:r>
@@ -18434,9 +18442,9 @@
                 <a:solidFill>
                   <a:srgbClr val="64748B"/>
                 </a:solidFill>
-                <a:latin typeface="Calibri" pitchFamily="34" charset="0"/>
-                <a:ea typeface="Calibri" pitchFamily="34" charset="-122"/>
-                <a:cs typeface="Calibri" pitchFamily="34" charset="-120"/>
+                <a:latin typeface="Cambria" pitchFamily="34" charset="0"/>
+                <a:ea typeface="Cambria" pitchFamily="34" charset="-122"/>
+                <a:cs typeface="Cambria" pitchFamily="34" charset="-120"/>
               </a:rPr>
               <a:t>Constructive paths forward</a:t>
             </a:r>
@@ -18566,9 +18574,9 @@
                 <a:solidFill>
                   <a:srgbClr val="64748B"/>
                 </a:solidFill>
-                <a:latin typeface="Calibri" pitchFamily="34" charset="0"/>
-                <a:ea typeface="Calibri" pitchFamily="34" charset="-122"/>
-                <a:cs typeface="Calibri" pitchFamily="34" charset="-120"/>
+                <a:latin typeface="Cambria" pitchFamily="34" charset="0"/>
+                <a:ea typeface="Cambria" pitchFamily="34" charset="-122"/>
+                <a:cs typeface="Cambria" pitchFamily="34" charset="-120"/>
               </a:rPr>
               <a:t>Execution</a:t>
             </a:r>
@@ -18608,9 +18616,9 @@
                 <a:solidFill>
                   <a:srgbClr val="1E293B"/>
                 </a:solidFill>
-                <a:latin typeface="Calibri" pitchFamily="34" charset="0"/>
-                <a:ea typeface="Calibri" pitchFamily="34" charset="-122"/>
-                <a:cs typeface="Calibri" pitchFamily="34" charset="-120"/>
+                <a:latin typeface="Cambria" pitchFamily="34" charset="0"/>
+                <a:ea typeface="Cambria" pitchFamily="34" charset="-122"/>
+                <a:cs typeface="Cambria" pitchFamily="34" charset="-120"/>
               </a:rPr>
               <a:t>Python, solvers, SQL to verify calculations externally.</a:t>
             </a:r>
@@ -18740,9 +18748,9 @@
                 <a:solidFill>
                   <a:srgbClr val="64748B"/>
                 </a:solidFill>
-                <a:latin typeface="Calibri" pitchFamily="34" charset="0"/>
-                <a:ea typeface="Calibri" pitchFamily="34" charset="-122"/>
-                <a:cs typeface="Calibri" pitchFamily="34" charset="-120"/>
+                <a:latin typeface="Cambria" pitchFamily="34" charset="0"/>
+                <a:ea typeface="Cambria" pitchFamily="34" charset="-122"/>
+                <a:cs typeface="Cambria" pitchFamily="34" charset="-120"/>
               </a:rPr>
               <a:t>PRMs</a:t>
             </a:r>
@@ -18782,9 +18790,9 @@
                 <a:solidFill>
                   <a:srgbClr val="1E293B"/>
                 </a:solidFill>
-                <a:latin typeface="Calibri" pitchFamily="34" charset="0"/>
-                <a:ea typeface="Calibri" pitchFamily="34" charset="-122"/>
-                <a:cs typeface="Calibri" pitchFamily="34" charset="-120"/>
+                <a:latin typeface="Cambria" pitchFamily="34" charset="0"/>
+                <a:ea typeface="Cambria" pitchFamily="34" charset="-122"/>
+                <a:cs typeface="Cambria" pitchFamily="34" charset="-120"/>
               </a:rPr>
               <a:t>Train separate discriminators to judge step quality.</a:t>
             </a:r>
@@ -18914,9 +18922,9 @@
                 <a:solidFill>
                   <a:srgbClr val="64748B"/>
                 </a:solidFill>
-                <a:latin typeface="Calibri" pitchFamily="34" charset="0"/>
-                <a:ea typeface="Calibri" pitchFamily="34" charset="-122"/>
-                <a:cs typeface="Calibri" pitchFamily="34" charset="-120"/>
+                <a:latin typeface="Cambria" pitchFamily="34" charset="0"/>
+                <a:ea typeface="Cambria" pitchFamily="34" charset="-122"/>
+                <a:cs typeface="Cambria" pitchFamily="34" charset="-120"/>
               </a:rPr>
               <a:t>RL &amp; Search</a:t>
             </a:r>
@@ -18956,9 +18964,9 @@
                 <a:solidFill>
                   <a:srgbClr val="1E293B"/>
                 </a:solidFill>
-                <a:latin typeface="Calibri" pitchFamily="34" charset="0"/>
-                <a:ea typeface="Calibri" pitchFamily="34" charset="-122"/>
-                <a:cs typeface="Calibri" pitchFamily="34" charset="-120"/>
+                <a:latin typeface="Cambria" pitchFamily="34" charset="0"/>
+                <a:ea typeface="Cambria" pitchFamily="34" charset="-122"/>
+                <a:cs typeface="Cambria" pitchFamily="34" charset="-120"/>
               </a:rPr>
               <a:t>RL + MCTS / test-time compute, not prompt loops.</a:t>
             </a:r>
@@ -19088,9 +19096,9 @@
                 <a:solidFill>
                   <a:srgbClr val="64748B"/>
                 </a:solidFill>
-                <a:latin typeface="Calibri" pitchFamily="34" charset="0"/>
-                <a:ea typeface="Calibri" pitchFamily="34" charset="-122"/>
-                <a:cs typeface="Calibri" pitchFamily="34" charset="-120"/>
+                <a:latin typeface="Cambria" pitchFamily="34" charset="0"/>
+                <a:ea typeface="Cambria" pitchFamily="34" charset="-122"/>
+                <a:cs typeface="Cambria" pitchFamily="34" charset="-120"/>
               </a:rPr>
               <a:t>Best Practices</a:t>
             </a:r>
@@ -19130,9 +19138,9 @@
                 <a:solidFill>
                   <a:srgbClr val="1E293B"/>
                 </a:solidFill>
-                <a:latin typeface="Calibri" pitchFamily="34" charset="0"/>
-                <a:ea typeface="Calibri" pitchFamily="34" charset="-122"/>
-                <a:cs typeface="Calibri" pitchFamily="34" charset="-120"/>
+                <a:latin typeface="Cambria" pitchFamily="34" charset="0"/>
+                <a:ea typeface="Cambria" pitchFamily="34" charset="-122"/>
+                <a:cs typeface="Cambria" pitchFamily="34" charset="-120"/>
               </a:rPr>
               <a:t>Equal-cost baselines (Self-Consistency), no oracle leakage.</a:t>
             </a:r>
@@ -19169,9 +19177,9 @@
                 <a:solidFill>
                   <a:srgbClr val="64748B"/>
                 </a:solidFill>
-                <a:latin typeface="Calibri" pitchFamily="34" charset="0"/>
-                <a:ea typeface="Calibri" pitchFamily="34" charset="-122"/>
-                <a:cs typeface="Calibri" pitchFamily="34" charset="-120"/>
+                <a:latin typeface="Cambria" pitchFamily="34" charset="0"/>
+                <a:ea typeface="Cambria" pitchFamily="34" charset="-122"/>
+                <a:cs typeface="Cambria" pitchFamily="34" charset="-120"/>
               </a:rPr>
               <a:t>Large Language Models Cannot Self-Correct Reasoning Yet | ICLR 2024</a:t>
             </a:r>
@@ -19208,9 +19216,9 @@
                 <a:solidFill>
                   <a:srgbClr val="64748B"/>
                 </a:solidFill>
-                <a:latin typeface="Calibri" pitchFamily="34" charset="0"/>
-                <a:ea typeface="Calibri" pitchFamily="34" charset="-122"/>
-                <a:cs typeface="Calibri" pitchFamily="34" charset="-120"/>
+                <a:latin typeface="Cambria" pitchFamily="34" charset="0"/>
+                <a:ea typeface="Cambria" pitchFamily="34" charset="-122"/>
+                <a:cs typeface="Cambria" pitchFamily="34" charset="-120"/>
               </a:rPr>
               <a:t>22/23</a:t>
             </a:r>
@@ -19279,9 +19287,9 @@
                 <a:solidFill>
                   <a:srgbClr val="800020"/>
                 </a:solidFill>
-                <a:latin typeface="Calibri" pitchFamily="34" charset="0"/>
-                <a:ea typeface="Calibri" pitchFamily="34" charset="-122"/>
-                <a:cs typeface="Calibri" pitchFamily="34" charset="-120"/>
+                <a:latin typeface="Cambria" pitchFamily="34" charset="0"/>
+                <a:ea typeface="Cambria" pitchFamily="34" charset="-122"/>
+                <a:cs typeface="Cambria" pitchFamily="34" charset="-120"/>
               </a:rPr>
               <a:t>6. CONCLUSION &amp; FUTURE WORK</a:t>
             </a:r>
@@ -19421,9 +19429,9 @@
                 <a:solidFill>
                   <a:srgbClr val="64748B"/>
                 </a:solidFill>
-                <a:latin typeface="Calibri" pitchFamily="34" charset="0"/>
-                <a:ea typeface="Calibri" pitchFamily="34" charset="-122"/>
-                <a:cs typeface="Calibri" pitchFamily="34" charset="-120"/>
+                <a:latin typeface="Cambria" pitchFamily="34" charset="0"/>
+                <a:ea typeface="Cambria" pitchFamily="34" charset="-122"/>
+                <a:cs typeface="Cambria" pitchFamily="34" charset="-120"/>
               </a:rPr>
               <a:t>We welcome questions from the professor and audience.</a:t>
             </a:r>
@@ -19480,9 +19488,9 @@
                 <a:solidFill>
                   <a:srgbClr val="FFFFFF"/>
                 </a:solidFill>
-                <a:latin typeface="Calibri" pitchFamily="34" charset="0"/>
-                <a:ea typeface="Calibri" pitchFamily="34" charset="-122"/>
-                <a:cs typeface="Calibri" pitchFamily="34" charset="-120"/>
+                <a:latin typeface="Cambria" pitchFamily="34" charset="0"/>
+                <a:ea typeface="Cambria" pitchFamily="34" charset="-122"/>
+                <a:cs typeface="Cambria" pitchFamily="34" charset="-120"/>
               </a:rPr>
               <a:t>1</a:t>
             </a:r>
@@ -19519,9 +19527,9 @@
                 <a:solidFill>
                   <a:srgbClr val="0F172A"/>
                 </a:solidFill>
-                <a:latin typeface="Calibri" pitchFamily="34" charset="0"/>
-                <a:ea typeface="Calibri" pitchFamily="34" charset="-122"/>
-                <a:cs typeface="Calibri" pitchFamily="34" charset="-120"/>
+                <a:latin typeface="Cambria" pitchFamily="34" charset="0"/>
+                <a:ea typeface="Cambria" pitchFamily="34" charset="-122"/>
+                <a:cs typeface="Cambria" pitchFamily="34" charset="-120"/>
               </a:rPr>
               <a:t>Why does asking a model to find flaws often make it hallucinate errors where none exist?</a:t>
             </a:r>
@@ -19578,9 +19586,9 @@
                 <a:solidFill>
                   <a:srgbClr val="FFFFFF"/>
                 </a:solidFill>
-                <a:latin typeface="Calibri" pitchFamily="34" charset="0"/>
-                <a:ea typeface="Calibri" pitchFamily="34" charset="-122"/>
-                <a:cs typeface="Calibri" pitchFamily="34" charset="-120"/>
+                <a:latin typeface="Cambria" pitchFamily="34" charset="0"/>
+                <a:ea typeface="Cambria" pitchFamily="34" charset="-122"/>
+                <a:cs typeface="Cambria" pitchFamily="34" charset="-120"/>
               </a:rPr>
               <a:t>2</a:t>
             </a:r>
@@ -19617,9 +19625,9 @@
                 <a:solidFill>
                   <a:srgbClr val="0F172A"/>
                 </a:solidFill>
-                <a:latin typeface="Calibri" pitchFamily="34" charset="0"/>
-                <a:ea typeface="Calibri" pitchFamily="34" charset="-122"/>
-                <a:cs typeface="Calibri" pitchFamily="34" charset="-120"/>
+                <a:latin typeface="Cambria" pitchFamily="34" charset="0"/>
+                <a:ea typeface="Cambria" pitchFamily="34" charset="-122"/>
+                <a:cs typeface="Cambria" pitchFamily="34" charset="-120"/>
               </a:rPr>
               <a:t>When should we rely on external tools like Python or verifiers instead of prompting alone?</a:t>
             </a:r>
@@ -19676,9 +19684,9 @@
                 <a:solidFill>
                   <a:srgbClr val="FFFFFF"/>
                 </a:solidFill>
-                <a:latin typeface="Calibri" pitchFamily="34" charset="0"/>
-                <a:ea typeface="Calibri" pitchFamily="34" charset="-122"/>
-                <a:cs typeface="Calibri" pitchFamily="34" charset="-120"/>
+                <a:latin typeface="Cambria" pitchFamily="34" charset="0"/>
+                <a:ea typeface="Cambria" pitchFamily="34" charset="-122"/>
+                <a:cs typeface="Cambria" pitchFamily="34" charset="-120"/>
               </a:rPr>
               <a:t>3</a:t>
             </a:r>
@@ -19715,9 +19723,9 @@
                 <a:solidFill>
                   <a:srgbClr val="0F172A"/>
                 </a:solidFill>
-                <a:latin typeface="Calibri" pitchFamily="34" charset="0"/>
-                <a:ea typeface="Calibri" pitchFamily="34" charset="-122"/>
-                <a:cs typeface="Calibri" pitchFamily="34" charset="-120"/>
+                <a:latin typeface="Cambria" pitchFamily="34" charset="0"/>
+                <a:ea typeface="Cambria" pitchFamily="34" charset="-122"/>
+                <a:cs typeface="Cambria" pitchFamily="34" charset="-120"/>
               </a:rPr>
               <a:t>How can we design a fair self-correction benchmark that avoids oracle leakage?</a:t>
             </a:r>
@@ -19754,9 +19762,9 @@
                 <a:solidFill>
                   <a:srgbClr val="64748B"/>
                 </a:solidFill>
-                <a:latin typeface="Calibri" pitchFamily="34" charset="0"/>
-                <a:ea typeface="Calibri" pitchFamily="34" charset="-122"/>
-                <a:cs typeface="Calibri" pitchFamily="34" charset="-120"/>
+                <a:latin typeface="Cambria" pitchFamily="34" charset="0"/>
+                <a:ea typeface="Cambria" pitchFamily="34" charset="-122"/>
+                <a:cs typeface="Cambria" pitchFamily="34" charset="-120"/>
               </a:rPr>
               <a:t>Large Language Models Cannot Self-Correct Reasoning Yet | ICLR 2024</a:t>
             </a:r>
@@ -19793,9 +19801,9 @@
                 <a:solidFill>
                   <a:srgbClr val="64748B"/>
                 </a:solidFill>
-                <a:latin typeface="Calibri" pitchFamily="34" charset="0"/>
-                <a:ea typeface="Calibri" pitchFamily="34" charset="-122"/>
-                <a:cs typeface="Calibri" pitchFamily="34" charset="-120"/>
+                <a:latin typeface="Cambria" pitchFamily="34" charset="0"/>
+                <a:ea typeface="Cambria" pitchFamily="34" charset="-122"/>
+                <a:cs typeface="Cambria" pitchFamily="34" charset="-120"/>
               </a:rPr>
               <a:t>23/23</a:t>
             </a:r>
@@ -19864,9 +19872,9 @@
                 <a:solidFill>
                   <a:srgbClr val="800020"/>
                 </a:solidFill>
-                <a:latin typeface="Calibri" pitchFamily="34" charset="0"/>
-                <a:ea typeface="Calibri" pitchFamily="34" charset="-122"/>
-                <a:cs typeface="Calibri" pitchFamily="34" charset="-120"/>
+                <a:latin typeface="Cambria" pitchFamily="34" charset="0"/>
+                <a:ea typeface="Cambria" pitchFamily="34" charset="-122"/>
+                <a:cs typeface="Cambria" pitchFamily="34" charset="-120"/>
               </a:rPr>
               <a:t>1. INTRODUCTION</a:t>
             </a:r>
@@ -19942,9 +19950,9 @@
                 <a:solidFill>
                   <a:srgbClr val="64748B"/>
                 </a:solidFill>
-                <a:latin typeface="Calibri" pitchFamily="34" charset="0"/>
-                <a:ea typeface="Calibri" pitchFamily="34" charset="-122"/>
-                <a:cs typeface="Calibri" pitchFamily="34" charset="-120"/>
+                <a:latin typeface="Cambria" pitchFamily="34" charset="0"/>
+                <a:ea typeface="Cambria" pitchFamily="34" charset="-122"/>
+                <a:cs typeface="Cambria" pitchFamily="34" charset="-120"/>
               </a:rPr>
               <a:t>Motivation: Why sequential generation breaks</a:t>
             </a:r>
@@ -20033,9 +20041,9 @@
                 <a:solidFill>
                   <a:srgbClr val="800020"/>
                 </a:solidFill>
-                <a:latin typeface="Calibri" pitchFamily="34" charset="0"/>
-                <a:ea typeface="Calibri" pitchFamily="34" charset="-122"/>
-                <a:cs typeface="Calibri" pitchFamily="34" charset="-120"/>
+                <a:latin typeface="Cambria" pitchFamily="34" charset="0"/>
+                <a:ea typeface="Cambria" pitchFamily="34" charset="-122"/>
+                <a:cs typeface="Cambria" pitchFamily="34" charset="-120"/>
               </a:rPr>
               <a:t>INPUT</a:t>
             </a:r>
@@ -20111,9 +20119,9 @@
                 <a:solidFill>
                   <a:srgbClr val="1E293B"/>
                 </a:solidFill>
-                <a:latin typeface="Calibri" pitchFamily="34" charset="0"/>
-                <a:ea typeface="Calibri" pitchFamily="34" charset="-122"/>
-                <a:cs typeface="Calibri" pitchFamily="34" charset="-120"/>
+                <a:latin typeface="Cambria" pitchFamily="34" charset="0"/>
+                <a:ea typeface="Cambria" pitchFamily="34" charset="-122"/>
+                <a:cs typeface="Cambria" pitchFamily="34" charset="-120"/>
               </a:rPr>
               <a:t>GSM8K math problem</a:t>
             </a:r>
@@ -20128,9 +20136,9 @@
                 <a:solidFill>
                   <a:srgbClr val="1E293B"/>
                 </a:solidFill>
-                <a:latin typeface="Calibri" pitchFamily="34" charset="0"/>
-                <a:ea typeface="Calibri" pitchFamily="34" charset="-122"/>
-                <a:cs typeface="Calibri" pitchFamily="34" charset="-120"/>
+                <a:latin typeface="Cambria" pitchFamily="34" charset="0"/>
+                <a:ea typeface="Cambria" pitchFamily="34" charset="-122"/>
+                <a:cs typeface="Cambria" pitchFamily="34" charset="-120"/>
               </a:rPr>
               <a:t>Multi-step prompt</a:t>
             </a:r>
@@ -20246,9 +20254,9 @@
                 <a:solidFill>
                   <a:srgbClr val="FFFFFF"/>
                 </a:solidFill>
-                <a:latin typeface="Calibri" pitchFamily="34" charset="0"/>
-                <a:ea typeface="Calibri" pitchFamily="34" charset="-122"/>
-                <a:cs typeface="Calibri" pitchFamily="34" charset="-120"/>
+                <a:latin typeface="Cambria" pitchFamily="34" charset="0"/>
+                <a:ea typeface="Cambria" pitchFamily="34" charset="-122"/>
+                <a:cs typeface="Cambria" pitchFamily="34" charset="-120"/>
               </a:rPr>
               <a:t>CHAIN-OF-THOUGHT (CoT) STEPS</a:t>
             </a:r>
@@ -20312,9 +20320,9 @@
                 <a:solidFill>
                   <a:srgbClr val="166534"/>
                 </a:solidFill>
-                <a:latin typeface="Calibri" pitchFamily="34" charset="0"/>
-                <a:ea typeface="Calibri" pitchFamily="34" charset="-122"/>
-                <a:cs typeface="Calibri" pitchFamily="34" charset="-120"/>
+                <a:latin typeface="Cambria" pitchFamily="34" charset="0"/>
+                <a:ea typeface="Cambria" pitchFamily="34" charset="-122"/>
+                <a:cs typeface="Cambria" pitchFamily="34" charset="-120"/>
               </a:rPr>
               <a:t>Step 1: Correct</a:t>
             </a:r>
@@ -20378,9 +20386,9 @@
                 <a:solidFill>
                   <a:srgbClr val="DC2626"/>
                 </a:solidFill>
-                <a:latin typeface="Calibri" pitchFamily="34" charset="0"/>
-                <a:ea typeface="Calibri" pitchFamily="34" charset="-122"/>
-                <a:cs typeface="Calibri" pitchFamily="34" charset="-120"/>
+                <a:latin typeface="Cambria" pitchFamily="34" charset="0"/>
+                <a:ea typeface="Cambria" pitchFamily="34" charset="-122"/>
+                <a:cs typeface="Cambria" pitchFamily="34" charset="-120"/>
               </a:rPr>
               <a:t>Step 2: Error occurs</a:t>
             </a:r>
@@ -20444,9 +20452,9 @@
                 <a:solidFill>
                   <a:srgbClr val="DC2626"/>
                 </a:solidFill>
-                <a:latin typeface="Calibri" pitchFamily="34" charset="0"/>
-                <a:ea typeface="Calibri" pitchFamily="34" charset="-122"/>
-                <a:cs typeface="Calibri" pitchFamily="34" charset="-120"/>
+                <a:latin typeface="Cambria" pitchFamily="34" charset="0"/>
+                <a:ea typeface="Cambria" pitchFamily="34" charset="-122"/>
+                <a:cs typeface="Cambria" pitchFamily="34" charset="-120"/>
               </a:rPr>
               <a:t>Step 3: Error cascades</a:t>
             </a:r>
@@ -20483,9 +20491,9 @@
                 <a:solidFill>
                   <a:srgbClr val="64748B"/>
                 </a:solidFill>
-                <a:latin typeface="Calibri" pitchFamily="34" charset="0"/>
-                <a:ea typeface="Calibri" pitchFamily="34" charset="-122"/>
-                <a:cs typeface="Calibri" pitchFamily="34" charset="-120"/>
+                <a:latin typeface="Cambria" pitchFamily="34" charset="0"/>
+                <a:ea typeface="Cambria" pitchFamily="34" charset="-122"/>
+                <a:cs typeface="Cambria" pitchFamily="34" charset="-120"/>
               </a:rPr>
               <a:t>Autoregressive: each token depends on prior</a:t>
             </a:r>
@@ -20599,9 +20607,9 @@
                 <a:solidFill>
                   <a:srgbClr val="FFFFFF"/>
                 </a:solidFill>
-                <a:latin typeface="Calibri" pitchFamily="34" charset="0"/>
-                <a:ea typeface="Calibri" pitchFamily="34" charset="-122"/>
-                <a:cs typeface="Calibri" pitchFamily="34" charset="-120"/>
+                <a:latin typeface="Cambria" pitchFamily="34" charset="0"/>
+                <a:ea typeface="Cambria" pitchFamily="34" charset="-122"/>
+                <a:cs typeface="Cambria" pitchFamily="34" charset="-120"/>
               </a:rPr>
               <a:t>OUTPUT</a:t>
             </a:r>
@@ -20677,9 +20685,9 @@
                 <a:solidFill>
                   <a:srgbClr val="1E293B"/>
                 </a:solidFill>
-                <a:latin typeface="Calibri" pitchFamily="34" charset="0"/>
-                <a:ea typeface="Calibri" pitchFamily="34" charset="-122"/>
-                <a:cs typeface="Calibri" pitchFamily="34" charset="-120"/>
+                <a:latin typeface="Cambria" pitchFamily="34" charset="0"/>
+                <a:ea typeface="Cambria" pitchFamily="34" charset="-122"/>
+                <a:cs typeface="Cambria" pitchFamily="34" charset="-120"/>
               </a:rPr>
               <a:t>Final answer</a:t>
             </a:r>
@@ -20694,9 +20702,9 @@
                 <a:solidFill>
                   <a:srgbClr val="1E293B"/>
                 </a:solidFill>
-                <a:latin typeface="Calibri" pitchFamily="34" charset="0"/>
-                <a:ea typeface="Calibri" pitchFamily="34" charset="-122"/>
-                <a:cs typeface="Calibri" pitchFamily="34" charset="-120"/>
+                <a:latin typeface="Cambria" pitchFamily="34" charset="0"/>
+                <a:ea typeface="Cambria" pitchFamily="34" charset="-122"/>
+                <a:cs typeface="Cambria" pitchFamily="34" charset="-120"/>
               </a:rPr>
               <a:t>corrupted by</a:t>
             </a:r>
@@ -20711,9 +20719,9 @@
                 <a:solidFill>
                   <a:srgbClr val="1E293B"/>
                 </a:solidFill>
-                <a:latin typeface="Calibri" pitchFamily="34" charset="0"/>
-                <a:ea typeface="Calibri" pitchFamily="34" charset="-122"/>
-                <a:cs typeface="Calibri" pitchFamily="34" charset="-120"/>
+                <a:latin typeface="Cambria" pitchFamily="34" charset="0"/>
+                <a:ea typeface="Cambria" pitchFamily="34" charset="-122"/>
+                <a:cs typeface="Cambria" pitchFamily="34" charset="-120"/>
               </a:rPr>
               <a:t>earlier slip</a:t>
             </a:r>
@@ -20777,9 +20785,9 @@
                 <a:solidFill>
                   <a:srgbClr val="800020"/>
                 </a:solidFill>
-                <a:latin typeface="Calibri" pitchFamily="34" charset="0"/>
-                <a:ea typeface="Calibri" pitchFamily="34" charset="-122"/>
-                <a:cs typeface="Calibri" pitchFamily="34" charset="-120"/>
+                <a:latin typeface="Cambria" pitchFamily="34" charset="0"/>
+                <a:ea typeface="Cambria" pitchFamily="34" charset="-122"/>
+                <a:cs typeface="Cambria" pitchFamily="34" charset="-120"/>
               </a:rPr>
               <a:t>CORE VULNERABILITY</a:t>
             </a:r>
@@ -20816,9 +20824,9 @@
                 <a:solidFill>
                   <a:srgbClr val="0F172A"/>
                 </a:solidFill>
-                <a:latin typeface="Calibri" pitchFamily="34" charset="0"/>
-                <a:ea typeface="Calibri" pitchFamily="34" charset="-122"/>
-                <a:cs typeface="Calibri" pitchFamily="34" charset="-120"/>
+                <a:latin typeface="Cambria" pitchFamily="34" charset="0"/>
+                <a:ea typeface="Cambria" pitchFamily="34" charset="-122"/>
+                <a:cs typeface="Cambria" pitchFamily="34" charset="-120"/>
               </a:rPr>
               <a:t>Early slip -&gt; every later step inherits the error. Without outside checks, the model cannot tell the chain is broken.</a:t>
             </a:r>
@@ -20875,9 +20883,9 @@
                 <a:solidFill>
                   <a:srgbClr val="FFFFFF"/>
                 </a:solidFill>
-                <a:latin typeface="Calibri" pitchFamily="34" charset="0"/>
-                <a:ea typeface="Calibri" pitchFamily="34" charset="-122"/>
-                <a:cs typeface="Calibri" pitchFamily="34" charset="-120"/>
+                <a:latin typeface="Cambria" pitchFamily="34" charset="0"/>
+                <a:ea typeface="Cambria" pitchFamily="34" charset="-122"/>
+                <a:cs typeface="Cambria" pitchFamily="34" charset="-120"/>
               </a:rPr>
               <a:t>!</a:t>
             </a:r>
@@ -20914,9 +20922,9 @@
                 <a:solidFill>
                   <a:srgbClr val="64748B"/>
                 </a:solidFill>
-                <a:latin typeface="Calibri" pitchFamily="34" charset="0"/>
-                <a:ea typeface="Calibri" pitchFamily="34" charset="-122"/>
-                <a:cs typeface="Calibri" pitchFamily="34" charset="-120"/>
+                <a:latin typeface="Cambria" pitchFamily="34" charset="0"/>
+                <a:ea typeface="Cambria" pitchFamily="34" charset="-122"/>
+                <a:cs typeface="Cambria" pitchFamily="34" charset="-120"/>
               </a:rPr>
               <a:t>Domino effect in sequential reasoning</a:t>
             </a:r>
@@ -20953,9 +20961,9 @@
                 <a:solidFill>
                   <a:srgbClr val="64748B"/>
                 </a:solidFill>
-                <a:latin typeface="Calibri" pitchFamily="34" charset="0"/>
-                <a:ea typeface="Calibri" pitchFamily="34" charset="-122"/>
-                <a:cs typeface="Calibri" pitchFamily="34" charset="-120"/>
+                <a:latin typeface="Cambria" pitchFamily="34" charset="0"/>
+                <a:ea typeface="Cambria" pitchFamily="34" charset="-122"/>
+                <a:cs typeface="Cambria" pitchFamily="34" charset="-120"/>
               </a:rPr>
               <a:t>Large Language Models Cannot Self-Correct Reasoning Yet | ICLR 2024</a:t>
             </a:r>
@@ -20992,9 +21000,9 @@
                 <a:solidFill>
                   <a:srgbClr val="64748B"/>
                 </a:solidFill>
-                <a:latin typeface="Calibri" pitchFamily="34" charset="0"/>
-                <a:ea typeface="Calibri" pitchFamily="34" charset="-122"/>
-                <a:cs typeface="Calibri" pitchFamily="34" charset="-120"/>
+                <a:latin typeface="Cambria" pitchFamily="34" charset="0"/>
+                <a:ea typeface="Cambria" pitchFamily="34" charset="-122"/>
+                <a:cs typeface="Cambria" pitchFamily="34" charset="-120"/>
               </a:rPr>
               <a:t>03/23</a:t>
             </a:r>
@@ -21063,9 +21071,9 @@
                 <a:solidFill>
                   <a:srgbClr val="800020"/>
                 </a:solidFill>
-                <a:latin typeface="Calibri" pitchFamily="34" charset="0"/>
-                <a:ea typeface="Calibri" pitchFamily="34" charset="-122"/>
-                <a:cs typeface="Calibri" pitchFamily="34" charset="-120"/>
+                <a:latin typeface="Cambria" pitchFamily="34" charset="0"/>
+                <a:ea typeface="Cambria" pitchFamily="34" charset="-122"/>
+                <a:cs typeface="Cambria" pitchFamily="34" charset="-120"/>
               </a:rPr>
               <a:t>1. INTRODUCTION</a:t>
             </a:r>
@@ -21141,9 +21149,9 @@
                 <a:solidFill>
                   <a:srgbClr val="64748B"/>
                 </a:solidFill>
-                <a:latin typeface="Calibri" pitchFamily="34" charset="0"/>
-                <a:ea typeface="Calibri" pitchFamily="34" charset="-122"/>
-                <a:cs typeface="Calibri" pitchFamily="34" charset="-120"/>
+                <a:latin typeface="Cambria" pitchFamily="34" charset="0"/>
+                <a:ea typeface="Cambria" pitchFamily="34" charset="-122"/>
+                <a:cs typeface="Cambria" pitchFamily="34" charset="-120"/>
               </a:rPr>
               <a:t>Can models fix themselves? A 3-step loop</a:t>
             </a:r>
@@ -21234,9 +21242,9 @@
                 <a:solidFill>
                   <a:srgbClr val="0F172A"/>
                 </a:solidFill>
-                <a:latin typeface="Calibri" pitchFamily="34" charset="0"/>
-                <a:ea typeface="Calibri" pitchFamily="34" charset="-122"/>
-                <a:cs typeface="Calibri" pitchFamily="34" charset="-120"/>
+                <a:latin typeface="Cambria" pitchFamily="34" charset="0"/>
+                <a:ea typeface="Cambria" pitchFamily="34" charset="-122"/>
+                <a:cs typeface="Cambria" pitchFamily="34" charset="-120"/>
               </a:rPr>
               <a:t>Initial Generation</a:t>
             </a:r>
@@ -21293,9 +21301,9 @@
                 <a:solidFill>
                   <a:srgbClr val="FFFFFF"/>
                 </a:solidFill>
-                <a:latin typeface="Calibri" pitchFamily="34" charset="0"/>
-                <a:ea typeface="Calibri" pitchFamily="34" charset="-122"/>
-                <a:cs typeface="Calibri" pitchFamily="34" charset="-120"/>
+                <a:latin typeface="Cambria" pitchFamily="34" charset="0"/>
+                <a:ea typeface="Cambria" pitchFamily="34" charset="-122"/>
+                <a:cs typeface="Cambria" pitchFamily="34" charset="-120"/>
               </a:rPr>
               <a:t>1</a:t>
             </a:r>
@@ -21374,9 +21382,9 @@
                 <a:solidFill>
                   <a:srgbClr val="1E293B"/>
                 </a:solidFill>
-                <a:latin typeface="Calibri" pitchFamily="34" charset="0"/>
-                <a:ea typeface="Calibri" pitchFamily="34" charset="-122"/>
-                <a:cs typeface="Calibri" pitchFamily="34" charset="-120"/>
+                <a:latin typeface="Cambria" pitchFamily="34" charset="0"/>
+                <a:ea typeface="Cambria" pitchFamily="34" charset="-122"/>
+                <a:cs typeface="Cambria" pitchFamily="34" charset="-120"/>
               </a:rPr>
               <a:t>Prompt -&gt; CoT</a:t>
             </a:r>
@@ -21394,9 +21402,9 @@
                 <a:solidFill>
                   <a:srgbClr val="1E293B"/>
                 </a:solidFill>
-                <a:latin typeface="Calibri" pitchFamily="34" charset="0"/>
-                <a:ea typeface="Calibri" pitchFamily="34" charset="-122"/>
-                <a:cs typeface="Calibri" pitchFamily="34" charset="-120"/>
+                <a:latin typeface="Cambria" pitchFamily="34" charset="0"/>
+                <a:ea typeface="Cambria" pitchFamily="34" charset="-122"/>
+                <a:cs typeface="Cambria" pitchFamily="34" charset="-120"/>
               </a:rPr>
               <a:t>First answer</a:t>
             </a:r>
@@ -21512,9 +21520,9 @@
                 <a:solidFill>
                   <a:srgbClr val="D97706"/>
                 </a:solidFill>
-                <a:latin typeface="Calibri" pitchFamily="34" charset="0"/>
-                <a:ea typeface="Calibri" pitchFamily="34" charset="-122"/>
-                <a:cs typeface="Calibri" pitchFamily="34" charset="-120"/>
+                <a:latin typeface="Cambria" pitchFamily="34" charset="0"/>
+                <a:ea typeface="Cambria" pitchFamily="34" charset="-122"/>
+                <a:cs typeface="Cambria" pitchFamily="34" charset="-120"/>
               </a:rPr>
               <a:t>Reflection</a:t>
             </a:r>
@@ -21571,9 +21579,9 @@
                 <a:solidFill>
                   <a:srgbClr val="FFFFFF"/>
                 </a:solidFill>
-                <a:latin typeface="Calibri" pitchFamily="34" charset="0"/>
-                <a:ea typeface="Calibri" pitchFamily="34" charset="-122"/>
-                <a:cs typeface="Calibri" pitchFamily="34" charset="-120"/>
+                <a:latin typeface="Cambria" pitchFamily="34" charset="0"/>
+                <a:ea typeface="Cambria" pitchFamily="34" charset="-122"/>
+                <a:cs typeface="Cambria" pitchFamily="34" charset="-120"/>
               </a:rPr>
               <a:t>2</a:t>
             </a:r>
@@ -21652,9 +21660,9 @@
                 <a:solidFill>
                   <a:srgbClr val="1E293B"/>
                 </a:solidFill>
-                <a:latin typeface="Calibri" pitchFamily="34" charset="0"/>
-                <a:ea typeface="Calibri" pitchFamily="34" charset="-122"/>
-                <a:cs typeface="Calibri" pitchFamily="34" charset="-120"/>
+                <a:latin typeface="Cambria" pitchFamily="34" charset="0"/>
+                <a:ea typeface="Cambria" pitchFamily="34" charset="-122"/>
+                <a:cs typeface="Cambria" pitchFamily="34" charset="-120"/>
               </a:rPr>
               <a:t>"Find flaws</a:t>
             </a:r>
@@ -21672,9 +21680,9 @@
                 <a:solidFill>
                   <a:srgbClr val="1E293B"/>
                 </a:solidFill>
-                <a:latin typeface="Calibri" pitchFamily="34" charset="0"/>
-                <a:ea typeface="Calibri" pitchFamily="34" charset="-122"/>
-                <a:cs typeface="Calibri" pitchFamily="34" charset="-120"/>
+                <a:latin typeface="Cambria" pitchFamily="34" charset="0"/>
+                <a:ea typeface="Cambria" pitchFamily="34" charset="-122"/>
+                <a:cs typeface="Cambria" pitchFamily="34" charset="-120"/>
               </a:rPr>
               <a:t>in reasoning"</a:t>
             </a:r>
@@ -21790,9 +21798,9 @@
                 <a:solidFill>
                   <a:srgbClr val="800020"/>
                 </a:solidFill>
-                <a:latin typeface="Calibri" pitchFamily="34" charset="0"/>
-                <a:ea typeface="Calibri" pitchFamily="34" charset="-122"/>
-                <a:cs typeface="Calibri" pitchFamily="34" charset="-120"/>
+                <a:latin typeface="Cambria" pitchFamily="34" charset="0"/>
+                <a:ea typeface="Cambria" pitchFamily="34" charset="-122"/>
+                <a:cs typeface="Cambria" pitchFamily="34" charset="-120"/>
               </a:rPr>
               <a:t>Refined Output</a:t>
             </a:r>
@@ -21849,9 +21857,9 @@
                 <a:solidFill>
                   <a:srgbClr val="FFFFFF"/>
                 </a:solidFill>
-                <a:latin typeface="Calibri" pitchFamily="34" charset="0"/>
-                <a:ea typeface="Calibri" pitchFamily="34" charset="-122"/>
-                <a:cs typeface="Calibri" pitchFamily="34" charset="-120"/>
+                <a:latin typeface="Cambria" pitchFamily="34" charset="0"/>
+                <a:ea typeface="Cambria" pitchFamily="34" charset="-122"/>
+                <a:cs typeface="Cambria" pitchFamily="34" charset="-120"/>
               </a:rPr>
               <a:t>3</a:t>
             </a:r>
@@ -21930,9 +21938,9 @@
                 <a:solidFill>
                   <a:srgbClr val="1E293B"/>
                 </a:solidFill>
-                <a:latin typeface="Calibri" pitchFamily="34" charset="0"/>
-                <a:ea typeface="Calibri" pitchFamily="34" charset="-122"/>
-                <a:cs typeface="Calibri" pitchFamily="34" charset="-120"/>
+                <a:latin typeface="Cambria" pitchFamily="34" charset="0"/>
+                <a:ea typeface="Cambria" pitchFamily="34" charset="-122"/>
+                <a:cs typeface="Cambria" pitchFamily="34" charset="-120"/>
               </a:rPr>
               <a:t>Updated CoT</a:t>
             </a:r>
@@ -21950,9 +21958,9 @@
                 <a:solidFill>
                   <a:srgbClr val="1E293B"/>
                 </a:solidFill>
-                <a:latin typeface="Calibri" pitchFamily="34" charset="0"/>
-                <a:ea typeface="Calibri" pitchFamily="34" charset="-122"/>
-                <a:cs typeface="Calibri" pitchFamily="34" charset="-120"/>
+                <a:latin typeface="Cambria" pitchFamily="34" charset="0"/>
+                <a:ea typeface="Cambria" pitchFamily="34" charset="-122"/>
+                <a:cs typeface="Cambria" pitchFamily="34" charset="-120"/>
               </a:rPr>
               <a:t>New answer</a:t>
             </a:r>
@@ -22041,9 +22049,9 @@
                 <a:solidFill>
                   <a:srgbClr val="FFFFFF"/>
                 </a:solidFill>
-                <a:latin typeface="Calibri" pitchFamily="34" charset="0"/>
-                <a:ea typeface="Calibri" pitchFamily="34" charset="-122"/>
-                <a:cs typeface="Calibri" pitchFamily="34" charset="-120"/>
+                <a:latin typeface="Cambria" pitchFamily="34" charset="0"/>
+                <a:ea typeface="Cambria" pitchFamily="34" charset="-122"/>
+                <a:cs typeface="Cambria" pitchFamily="34" charset="-120"/>
               </a:rPr>
               <a:t>↻</a:t>
             </a:r>
@@ -22080,9 +22088,9 @@
                 <a:solidFill>
                   <a:srgbClr val="800020"/>
                 </a:solidFill>
-                <a:latin typeface="Calibri" pitchFamily="34" charset="0"/>
-                <a:ea typeface="Calibri" pitchFamily="34" charset="-122"/>
-                <a:cs typeface="Calibri" pitchFamily="34" charset="-120"/>
+                <a:latin typeface="Cambria" pitchFamily="34" charset="0"/>
+                <a:ea typeface="Cambria" pitchFamily="34" charset="-122"/>
+                <a:cs typeface="Cambria" pitchFamily="34" charset="-120"/>
               </a:rPr>
               <a:t>Self-correction loop</a:t>
             </a:r>
@@ -22119,9 +22127,9 @@
                 <a:solidFill>
                   <a:srgbClr val="64748B"/>
                 </a:solidFill>
-                <a:latin typeface="Calibri" pitchFamily="34" charset="0"/>
-                <a:ea typeface="Calibri" pitchFamily="34" charset="-122"/>
-                <a:cs typeface="Calibri" pitchFamily="34" charset="-120"/>
+                <a:latin typeface="Cambria" pitchFamily="34" charset="0"/>
+                <a:ea typeface="Cambria" pitchFamily="34" charset="-122"/>
+                <a:cs typeface="Cambria" pitchFamily="34" charset="-120"/>
               </a:rPr>
               <a:t>Repeat critique -&gt; revise (max 2 rounds)</a:t>
             </a:r>
@@ -22183,9 +22191,9 @@
                 <a:solidFill>
                   <a:srgbClr val="D97706"/>
                 </a:solidFill>
-                <a:latin typeface="Calibri" pitchFamily="34" charset="0"/>
-                <a:ea typeface="Calibri" pitchFamily="34" charset="-122"/>
-                <a:cs typeface="Calibri" pitchFamily="34" charset="-120"/>
+                <a:latin typeface="Cambria" pitchFamily="34" charset="0"/>
+                <a:ea typeface="Cambria" pitchFamily="34" charset="-122"/>
+                <a:cs typeface="Cambria" pitchFamily="34" charset="-120"/>
               </a:rPr>
               <a:t>retry</a:t>
             </a:r>
@@ -22282,9 +22290,9 @@
                 <a:solidFill>
                   <a:srgbClr val="64748B"/>
                 </a:solidFill>
-                <a:latin typeface="Calibri" pitchFamily="34" charset="0"/>
-                <a:ea typeface="Calibri" pitchFamily="34" charset="-122"/>
-                <a:cs typeface="Calibri" pitchFamily="34" charset="-120"/>
+                <a:latin typeface="Cambria" pitchFamily="34" charset="0"/>
+                <a:ea typeface="Cambria" pitchFamily="34" charset="-122"/>
+                <a:cs typeface="Cambria" pitchFamily="34" charset="-120"/>
               </a:rPr>
               <a:t>Draft -&gt; Critique -&gt; Fix</a:t>
             </a:r>
@@ -22348,9 +22356,9 @@
                 <a:solidFill>
                   <a:srgbClr val="D97706"/>
                 </a:solidFill>
-                <a:latin typeface="Calibri" pitchFamily="34" charset="0"/>
-                <a:ea typeface="Calibri" pitchFamily="34" charset="-122"/>
-                <a:cs typeface="Calibri" pitchFamily="34" charset="-120"/>
+                <a:latin typeface="Cambria" pitchFamily="34" charset="0"/>
+                <a:ea typeface="Cambria" pitchFamily="34" charset="-122"/>
+                <a:cs typeface="Cambria" pitchFamily="34" charset="-120"/>
               </a:rPr>
               <a:t>PROMISE vs REALITY</a:t>
             </a:r>
@@ -22387,9 +22395,9 @@
                 <a:solidFill>
                   <a:srgbClr val="0F172A"/>
                 </a:solidFill>
-                <a:latin typeface="Calibri" pitchFamily="34" charset="0"/>
-                <a:ea typeface="Calibri" pitchFamily="34" charset="-122"/>
-                <a:cs typeface="Calibri" pitchFamily="34" charset="-120"/>
+                <a:latin typeface="Cambria" pitchFamily="34" charset="0"/>
+                <a:ea typeface="Cambria" pitchFamily="34" charset="-122"/>
+                <a:cs typeface="Cambria" pitchFamily="34" charset="-120"/>
               </a:rPr>
               <a:t>Promise: Autonomous fix without humans.  Reality: Can a frozen model detect its own flaws? Evidence says no.</a:t>
             </a:r>
@@ -22426,9 +22434,9 @@
                 <a:solidFill>
                   <a:srgbClr val="64748B"/>
                 </a:solidFill>
-                <a:latin typeface="Calibri" pitchFamily="34" charset="0"/>
-                <a:ea typeface="Calibri" pitchFamily="34" charset="-122"/>
-                <a:cs typeface="Calibri" pitchFamily="34" charset="-120"/>
+                <a:latin typeface="Cambria" pitchFamily="34" charset="0"/>
+                <a:ea typeface="Cambria" pitchFamily="34" charset="-122"/>
+                <a:cs typeface="Cambria" pitchFamily="34" charset="-120"/>
               </a:rPr>
               <a:t>Large Language Models Cannot Self-Correct Reasoning Yet | ICLR 2024</a:t>
             </a:r>
@@ -22465,9 +22473,9 @@
                 <a:solidFill>
                   <a:srgbClr val="64748B"/>
                 </a:solidFill>
-                <a:latin typeface="Calibri" pitchFamily="34" charset="0"/>
-                <a:ea typeface="Calibri" pitchFamily="34" charset="-122"/>
-                <a:cs typeface="Calibri" pitchFamily="34" charset="-120"/>
+                <a:latin typeface="Cambria" pitchFamily="34" charset="0"/>
+                <a:ea typeface="Cambria" pitchFamily="34" charset="-122"/>
+                <a:cs typeface="Cambria" pitchFamily="34" charset="-120"/>
               </a:rPr>
               <a:t>04/23</a:t>
             </a:r>
@@ -22536,9 +22544,9 @@
                 <a:solidFill>
                   <a:srgbClr val="800020"/>
                 </a:solidFill>
-                <a:latin typeface="Calibri" pitchFamily="34" charset="0"/>
-                <a:ea typeface="Calibri" pitchFamily="34" charset="-122"/>
-                <a:cs typeface="Calibri" pitchFamily="34" charset="-120"/>
+                <a:latin typeface="Cambria" pitchFamily="34" charset="0"/>
+                <a:ea typeface="Cambria" pitchFamily="34" charset="-122"/>
+                <a:cs typeface="Cambria" pitchFamily="34" charset="-120"/>
               </a:rPr>
               <a:t>1. INTRODUCTION</a:t>
             </a:r>
@@ -22614,9 +22622,9 @@
                 <a:solidFill>
                   <a:srgbClr val="64748B"/>
                 </a:solidFill>
-                <a:latin typeface="Calibri" pitchFamily="34" charset="0"/>
-                <a:ea typeface="Calibri" pitchFamily="34" charset="-122"/>
-                <a:cs typeface="Calibri" pitchFamily="34" charset="-120"/>
+                <a:latin typeface="Cambria" pitchFamily="34" charset="0"/>
+                <a:ea typeface="Cambria" pitchFamily="34" charset="-122"/>
+                <a:cs typeface="Cambria" pitchFamily="34" charset="-120"/>
               </a:rPr>
               <a:t>The paradox that drives the study</a:t>
             </a:r>
@@ -22680,9 +22688,9 @@
                 <a:solidFill>
                   <a:srgbClr val="800020"/>
                 </a:solidFill>
-                <a:latin typeface="Calibri" pitchFamily="34" charset="0"/>
-                <a:ea typeface="Calibri" pitchFamily="34" charset="-122"/>
-                <a:cs typeface="Calibri" pitchFamily="34" charset="-120"/>
+                <a:latin typeface="Cambria" pitchFamily="34" charset="0"/>
+                <a:ea typeface="Cambria" pitchFamily="34" charset="-122"/>
+                <a:cs typeface="Cambria" pitchFamily="34" charset="-120"/>
               </a:rPr>
               <a:t>THE CENTRAL PARADOX</a:t>
             </a:r>
@@ -22758,9 +22766,9 @@
                 <a:solidFill>
                   <a:srgbClr val="64748B"/>
                 </a:solidFill>
-                <a:latin typeface="Calibri" pitchFamily="34" charset="0"/>
-                <a:ea typeface="Calibri" pitchFamily="34" charset="-122"/>
-                <a:cs typeface="Calibri" pitchFamily="34" charset="-120"/>
+                <a:latin typeface="Cambria" pitchFamily="34" charset="0"/>
+                <a:ea typeface="Cambria" pitchFamily="34" charset="-122"/>
+                <a:cs typeface="Cambria" pitchFamily="34" charset="-120"/>
               </a:rPr>
               <a:t>Frozen weights. Same model as critic and generator. No new information.</a:t>
             </a:r>
@@ -22824,9 +22832,9 @@
                 <a:solidFill>
                   <a:srgbClr val="800020"/>
                 </a:solidFill>
-                <a:latin typeface="Calibri" pitchFamily="34" charset="0"/>
-                <a:ea typeface="Calibri" pitchFamily="34" charset="-122"/>
-                <a:cs typeface="Calibri" pitchFamily="34" charset="-120"/>
+                <a:latin typeface="Cambria" pitchFamily="34" charset="0"/>
+                <a:ea typeface="Cambria" pitchFamily="34" charset="-122"/>
+                <a:cs typeface="Cambria" pitchFamily="34" charset="-120"/>
               </a:rPr>
               <a:t>Paper tests: intrinsic only</a:t>
             </a:r>
@@ -22890,9 +22898,9 @@
                 <a:solidFill>
                   <a:srgbClr val="64748B"/>
                 </a:solidFill>
-                <a:latin typeface="Calibri" pitchFamily="34" charset="0"/>
-                <a:ea typeface="Calibri" pitchFamily="34" charset="-122"/>
-                <a:cs typeface="Calibri" pitchFamily="34" charset="-120"/>
+                <a:latin typeface="Cambria" pitchFamily="34" charset="0"/>
+                <a:ea typeface="Cambria" pitchFamily="34" charset="-122"/>
+                <a:cs typeface="Cambria" pitchFamily="34" charset="-120"/>
               </a:rPr>
               <a:t>External tools: out of scope</a:t>
             </a:r>
@@ -22993,9 +23001,9 @@
                 <a:solidFill>
                   <a:srgbClr val="0F172A"/>
                 </a:solidFill>
-                <a:latin typeface="Calibri" pitchFamily="34" charset="0"/>
-                <a:ea typeface="Calibri" pitchFamily="34" charset="-122"/>
-                <a:cs typeface="Calibri" pitchFamily="34" charset="-120"/>
+                <a:latin typeface="Cambria" pitchFamily="34" charset="0"/>
+                <a:ea typeface="Cambria" pitchFamily="34" charset="-122"/>
+                <a:cs typeface="Cambria" pitchFamily="34" charset="-120"/>
               </a:rPr>
               <a:t>Can frozen knowledge fix itself?</a:t>
             </a:r>
@@ -23032,9 +23040,9 @@
                 <a:solidFill>
                   <a:srgbClr val="64748B"/>
                 </a:solidFill>
-                <a:latin typeface="Calibri" pitchFamily="34" charset="0"/>
-                <a:ea typeface="Calibri" pitchFamily="34" charset="-122"/>
-                <a:cs typeface="Calibri" pitchFamily="34" charset="-120"/>
+                <a:latin typeface="Cambria" pitchFamily="34" charset="0"/>
+                <a:ea typeface="Cambria" pitchFamily="34" charset="-122"/>
+                <a:cs typeface="Cambria" pitchFamily="34" charset="-120"/>
               </a:rPr>
               <a:t>Detailed comparison on next slide.</a:t>
             </a:r>
@@ -23098,9 +23106,9 @@
                 <a:solidFill>
                   <a:srgbClr val="1E293B"/>
                 </a:solidFill>
-                <a:latin typeface="Calibri" pitchFamily="34" charset="0"/>
-                <a:ea typeface="Calibri" pitchFamily="34" charset="-122"/>
-                <a:cs typeface="Calibri" pitchFamily="34" charset="-120"/>
+                <a:latin typeface="Cambria" pitchFamily="34" charset="0"/>
+                <a:ea typeface="Cambria" pitchFamily="34" charset="-122"/>
+                <a:cs typeface="Cambria" pitchFamily="34" charset="-120"/>
               </a:rPr>
               <a:t>This question defines the paper. If intrinsic correction worked, it would be free performance.</a:t>
             </a:r>
@@ -23137,9 +23145,9 @@
                 <a:solidFill>
                   <a:srgbClr val="64748B"/>
                 </a:solidFill>
-                <a:latin typeface="Calibri" pitchFamily="34" charset="0"/>
-                <a:ea typeface="Calibri" pitchFamily="34" charset="-122"/>
-                <a:cs typeface="Calibri" pitchFamily="34" charset="-120"/>
+                <a:latin typeface="Cambria" pitchFamily="34" charset="0"/>
+                <a:ea typeface="Cambria" pitchFamily="34" charset="-122"/>
+                <a:cs typeface="Cambria" pitchFamily="34" charset="-120"/>
               </a:rPr>
               <a:t>Large Language Models Cannot Self-Correct Reasoning Yet | ICLR 2024</a:t>
             </a:r>
@@ -23176,9 +23184,9 @@
                 <a:solidFill>
                   <a:srgbClr val="64748B"/>
                 </a:solidFill>
-                <a:latin typeface="Calibri" pitchFamily="34" charset="0"/>
-                <a:ea typeface="Calibri" pitchFamily="34" charset="-122"/>
-                <a:cs typeface="Calibri" pitchFamily="34" charset="-120"/>
+                <a:latin typeface="Cambria" pitchFamily="34" charset="0"/>
+                <a:ea typeface="Cambria" pitchFamily="34" charset="-122"/>
+                <a:cs typeface="Cambria" pitchFamily="34" charset="-120"/>
               </a:rPr>
               <a:t>05/23</a:t>
             </a:r>
@@ -23247,9 +23255,9 @@
                 <a:solidFill>
                   <a:srgbClr val="800020"/>
                 </a:solidFill>
-                <a:latin typeface="Calibri" pitchFamily="34" charset="0"/>
-                <a:ea typeface="Calibri" pitchFamily="34" charset="-122"/>
-                <a:cs typeface="Calibri" pitchFamily="34" charset="-120"/>
+                <a:latin typeface="Cambria" pitchFamily="34" charset="0"/>
+                <a:ea typeface="Cambria" pitchFamily="34" charset="-122"/>
+                <a:cs typeface="Cambria" pitchFamily="34" charset="-120"/>
               </a:rPr>
               <a:t>2. BACKGROUND &amp; RELATED WORK</a:t>
             </a:r>
@@ -23325,9 +23333,9 @@
                 <a:solidFill>
                   <a:srgbClr val="64748B"/>
                 </a:solidFill>
-                <a:latin typeface="Calibri" pitchFamily="34" charset="0"/>
-                <a:ea typeface="Calibri" pitchFamily="34" charset="-122"/>
-                <a:cs typeface="Calibri" pitchFamily="34" charset="-120"/>
+                <a:latin typeface="Cambria" pitchFamily="34" charset="0"/>
+                <a:ea typeface="Cambria" pitchFamily="34" charset="-122"/>
+                <a:cs typeface="Cambria" pitchFamily="34" charset="-120"/>
               </a:rPr>
               <a:t>Four paradigms that claimed success</a:t>
             </a:r>
@@ -23457,9 +23465,9 @@
                 <a:solidFill>
                   <a:srgbClr val="800020"/>
                 </a:solidFill>
-                <a:latin typeface="Calibri" pitchFamily="34" charset="0"/>
-                <a:ea typeface="Calibri" pitchFamily="34" charset="-122"/>
-                <a:cs typeface="Calibri" pitchFamily="34" charset="-120"/>
+                <a:latin typeface="Cambria" pitchFamily="34" charset="0"/>
+                <a:ea typeface="Cambria" pitchFamily="34" charset="-122"/>
+                <a:cs typeface="Cambria" pitchFamily="34" charset="-120"/>
               </a:rPr>
               <a:t>Recursive Critique</a:t>
             </a:r>
@@ -23496,9 +23504,9 @@
                 <a:solidFill>
                   <a:srgbClr val="64748B"/>
                 </a:solidFill>
-                <a:latin typeface="Calibri" pitchFamily="34" charset="0"/>
-                <a:ea typeface="Calibri" pitchFamily="34" charset="-122"/>
-                <a:cs typeface="Calibri" pitchFamily="34" charset="-120"/>
+                <a:latin typeface="Cambria" pitchFamily="34" charset="0"/>
+                <a:ea typeface="Cambria" pitchFamily="34" charset="-122"/>
+                <a:cs typeface="Cambria" pitchFamily="34" charset="-120"/>
               </a:rPr>
               <a:t>Kim et al. NeurIPS 2023</a:t>
             </a:r>
@@ -23555,9 +23563,9 @@
                 <a:solidFill>
                   <a:srgbClr val="FFFFFF"/>
                 </a:solidFill>
-                <a:latin typeface="Calibri" pitchFamily="34" charset="0"/>
-                <a:ea typeface="Calibri" pitchFamily="34" charset="-122"/>
-                <a:cs typeface="Calibri" pitchFamily="34" charset="-120"/>
+                <a:latin typeface="Cambria" pitchFamily="34" charset="0"/>
+                <a:ea typeface="Cambria" pitchFamily="34" charset="-122"/>
+                <a:cs typeface="Cambria" pitchFamily="34" charset="-120"/>
               </a:rPr>
               <a:t>1</a:t>
             </a:r>
@@ -23594,9 +23602,9 @@
                 <a:solidFill>
                   <a:srgbClr val="1E293B"/>
                 </a:solidFill>
-                <a:latin typeface="Calibri" pitchFamily="34" charset="0"/>
-                <a:ea typeface="Calibri" pitchFamily="34" charset="-122"/>
-                <a:cs typeface="Calibri" pitchFamily="34" charset="-120"/>
+                <a:latin typeface="Cambria" pitchFamily="34" charset="0"/>
+                <a:ea typeface="Cambria" pitchFamily="34" charset="-122"/>
+                <a:cs typeface="Cambria" pitchFamily="34" charset="-120"/>
               </a:rPr>
               <a:t>Critique -&gt; revise recursively.</a:t>
             </a:r>
@@ -23726,9 +23734,9 @@
                 <a:solidFill>
                   <a:srgbClr val="800020"/>
                 </a:solidFill>
-                <a:latin typeface="Calibri" pitchFamily="34" charset="0"/>
-                <a:ea typeface="Calibri" pitchFamily="34" charset="-122"/>
-                <a:cs typeface="Calibri" pitchFamily="34" charset="-120"/>
+                <a:latin typeface="Cambria" pitchFamily="34" charset="0"/>
+                <a:ea typeface="Cambria" pitchFamily="34" charset="-122"/>
+                <a:cs typeface="Cambria" pitchFamily="34" charset="-120"/>
               </a:rPr>
               <a:t>Verbal Memory</a:t>
             </a:r>
@@ -23765,9 +23773,9 @@
                 <a:solidFill>
                   <a:srgbClr val="64748B"/>
                 </a:solidFill>
-                <a:latin typeface="Calibri" pitchFamily="34" charset="0"/>
-                <a:ea typeface="Calibri" pitchFamily="34" charset="-122"/>
-                <a:cs typeface="Calibri" pitchFamily="34" charset="-120"/>
+                <a:latin typeface="Cambria" pitchFamily="34" charset="0"/>
+                <a:ea typeface="Cambria" pitchFamily="34" charset="-122"/>
+                <a:cs typeface="Cambria" pitchFamily="34" charset="-120"/>
               </a:rPr>
               <a:t>Shinn et al. NeurIPS 2023</a:t>
             </a:r>
@@ -23824,9 +23832,9 @@
                 <a:solidFill>
                   <a:srgbClr val="FFFFFF"/>
                 </a:solidFill>
-                <a:latin typeface="Calibri" pitchFamily="34" charset="0"/>
-                <a:ea typeface="Calibri" pitchFamily="34" charset="-122"/>
-                <a:cs typeface="Calibri" pitchFamily="34" charset="-120"/>
+                <a:latin typeface="Cambria" pitchFamily="34" charset="0"/>
+                <a:ea typeface="Cambria" pitchFamily="34" charset="-122"/>
+                <a:cs typeface="Cambria" pitchFamily="34" charset="-120"/>
               </a:rPr>
               <a:t>2</a:t>
             </a:r>
@@ -23863,9 +23871,9 @@
                 <a:solidFill>
                   <a:srgbClr val="1E293B"/>
                 </a:solidFill>
-                <a:latin typeface="Calibri" pitchFamily="34" charset="0"/>
-                <a:ea typeface="Calibri" pitchFamily="34" charset="-122"/>
-                <a:cs typeface="Calibri" pitchFamily="34" charset="-120"/>
+                <a:latin typeface="Cambria" pitchFamily="34" charset="0"/>
+                <a:ea typeface="Cambria" pitchFamily="34" charset="-122"/>
+                <a:cs typeface="Cambria" pitchFamily="34" charset="-120"/>
               </a:rPr>
               <a:t>Stores reflections across trials.</a:t>
             </a:r>
@@ -23995,9 +24003,9 @@
                 <a:solidFill>
                   <a:srgbClr val="800020"/>
                 </a:solidFill>
-                <a:latin typeface="Calibri" pitchFamily="34" charset="0"/>
-                <a:ea typeface="Calibri" pitchFamily="34" charset="-122"/>
-                <a:cs typeface="Calibri" pitchFamily="34" charset="-120"/>
+                <a:latin typeface="Cambria" pitchFamily="34" charset="0"/>
+                <a:ea typeface="Cambria" pitchFamily="34" charset="-122"/>
+                <a:cs typeface="Cambria" pitchFamily="34" charset="-120"/>
               </a:rPr>
               <a:t>Iterative Refine</a:t>
             </a:r>
@@ -24034,9 +24042,9 @@
                 <a:solidFill>
                   <a:srgbClr val="64748B"/>
                 </a:solidFill>
-                <a:latin typeface="Calibri" pitchFamily="34" charset="0"/>
-                <a:ea typeface="Calibri" pitchFamily="34" charset="-122"/>
-                <a:cs typeface="Calibri" pitchFamily="34" charset="-120"/>
+                <a:latin typeface="Cambria" pitchFamily="34" charset="0"/>
+                <a:ea typeface="Cambria" pitchFamily="34" charset="-122"/>
+                <a:cs typeface="Cambria" pitchFamily="34" charset="-120"/>
               </a:rPr>
               <a:t>Madaan et al. NeurIPS 2023</a:t>
             </a:r>
@@ -24093,9 +24101,9 @@
                 <a:solidFill>
                   <a:srgbClr val="FFFFFF"/>
                 </a:solidFill>
-                <a:latin typeface="Calibri" pitchFamily="34" charset="0"/>
-                <a:ea typeface="Calibri" pitchFamily="34" charset="-122"/>
-                <a:cs typeface="Calibri" pitchFamily="34" charset="-120"/>
+                <a:latin typeface="Cambria" pitchFamily="34" charset="0"/>
+                <a:ea typeface="Cambria" pitchFamily="34" charset="-122"/>
+                <a:cs typeface="Cambria" pitchFamily="34" charset="-120"/>
               </a:rPr>
               <a:t>3</a:t>
             </a:r>
@@ -24132,9 +24140,9 @@
                 <a:solidFill>
                   <a:srgbClr val="1E293B"/>
                 </a:solidFill>
-                <a:latin typeface="Calibri" pitchFamily="34" charset="0"/>
-                <a:ea typeface="Calibri" pitchFamily="34" charset="-122"/>
-                <a:cs typeface="Calibri" pitchFamily="34" charset="-120"/>
+                <a:latin typeface="Cambria" pitchFamily="34" charset="0"/>
+                <a:ea typeface="Cambria" pitchFamily="34" charset="-122"/>
+                <a:cs typeface="Cambria" pitchFamily="34" charset="-120"/>
               </a:rPr>
               <a:t>Feedback -&gt; refine in loop.</a:t>
             </a:r>
@@ -24264,9 +24272,9 @@
                 <a:solidFill>
                   <a:srgbClr val="800020"/>
                 </a:solidFill>
-                <a:latin typeface="Calibri" pitchFamily="34" charset="0"/>
-                <a:ea typeface="Calibri" pitchFamily="34" charset="-122"/>
-                <a:cs typeface="Calibri" pitchFamily="34" charset="-120"/>
+                <a:latin typeface="Cambria" pitchFamily="34" charset="0"/>
+                <a:ea typeface="Cambria" pitchFamily="34" charset="-122"/>
+                <a:cs typeface="Cambria" pitchFamily="34" charset="-120"/>
               </a:rPr>
               <a:t>Agent Consensus</a:t>
             </a:r>
@@ -24303,9 +24311,9 @@
                 <a:solidFill>
                   <a:srgbClr val="64748B"/>
                 </a:solidFill>
-                <a:latin typeface="Calibri" pitchFamily="34" charset="0"/>
-                <a:ea typeface="Calibri" pitchFamily="34" charset="-122"/>
-                <a:cs typeface="Calibri" pitchFamily="34" charset="-120"/>
+                <a:latin typeface="Cambria" pitchFamily="34" charset="0"/>
+                <a:ea typeface="Cambria" pitchFamily="34" charset="-122"/>
+                <a:cs typeface="Cambria" pitchFamily="34" charset="-120"/>
               </a:rPr>
               <a:t>Du et al. 2023</a:t>
             </a:r>
@@ -24362,9 +24370,9 @@
                 <a:solidFill>
                   <a:srgbClr val="FFFFFF"/>
                 </a:solidFill>
-                <a:latin typeface="Calibri" pitchFamily="34" charset="0"/>
-                <a:ea typeface="Calibri" pitchFamily="34" charset="-122"/>
-                <a:cs typeface="Calibri" pitchFamily="34" charset="-120"/>
+                <a:latin typeface="Cambria" pitchFamily="34" charset="0"/>
+                <a:ea typeface="Cambria" pitchFamily="34" charset="-122"/>
+                <a:cs typeface="Cambria" pitchFamily="34" charset="-120"/>
               </a:rPr>
               <a:t>4</a:t>
             </a:r>
@@ -24401,9 +24409,9 @@
                 <a:solidFill>
                   <a:srgbClr val="1E293B"/>
                 </a:solidFill>
-                <a:latin typeface="Calibri" pitchFamily="34" charset="0"/>
-                <a:ea typeface="Calibri" pitchFamily="34" charset="-122"/>
-                <a:cs typeface="Calibri" pitchFamily="34" charset="-120"/>
+                <a:latin typeface="Cambria" pitchFamily="34" charset="0"/>
+                <a:ea typeface="Cambria" pitchFamily="34" charset="-122"/>
+                <a:cs typeface="Cambria" pitchFamily="34" charset="-120"/>
               </a:rPr>
               <a:t>Agents debate to consensus.</a:t>
             </a:r>
@@ -24440,9 +24448,9 @@
                 <a:solidFill>
                   <a:srgbClr val="64748B"/>
                 </a:solidFill>
-                <a:latin typeface="Calibri" pitchFamily="34" charset="0"/>
-                <a:ea typeface="Calibri" pitchFamily="34" charset="-122"/>
-                <a:cs typeface="Calibri" pitchFamily="34" charset="-120"/>
+                <a:latin typeface="Cambria" pitchFamily="34" charset="0"/>
+                <a:ea typeface="Cambria" pitchFamily="34" charset="-122"/>
+                <a:cs typeface="Cambria" pitchFamily="34" charset="-120"/>
               </a:rPr>
               <a:t>Large Language Models Cannot Self-Correct Reasoning Yet | ICLR 2024</a:t>
             </a:r>
@@ -24479,9 +24487,9 @@
                 <a:solidFill>
                   <a:srgbClr val="64748B"/>
                 </a:solidFill>
-                <a:latin typeface="Calibri" pitchFamily="34" charset="0"/>
-                <a:ea typeface="Calibri" pitchFamily="34" charset="-122"/>
-                <a:cs typeface="Calibri" pitchFamily="34" charset="-120"/>
+                <a:latin typeface="Cambria" pitchFamily="34" charset="0"/>
+                <a:ea typeface="Cambria" pitchFamily="34" charset="-122"/>
+                <a:cs typeface="Cambria" pitchFamily="34" charset="-120"/>
               </a:rPr>
               <a:t>06/23</a:t>
             </a:r>
@@ -24550,9 +24558,9 @@
                 <a:solidFill>
                   <a:srgbClr val="800020"/>
                 </a:solidFill>
-                <a:latin typeface="Calibri" pitchFamily="34" charset="0"/>
-                <a:ea typeface="Calibri" pitchFamily="34" charset="-122"/>
-                <a:cs typeface="Calibri" pitchFamily="34" charset="-120"/>
+                <a:latin typeface="Cambria" pitchFamily="34" charset="0"/>
+                <a:ea typeface="Cambria" pitchFamily="34" charset="-122"/>
+                <a:cs typeface="Cambria" pitchFamily="34" charset="-120"/>
               </a:rPr>
               <a:t>2. BACKGROUND &amp; RELATED WORK</a:t>
             </a:r>
@@ -24628,9 +24636,9 @@
                 <a:solidFill>
                   <a:srgbClr val="64748B"/>
                 </a:solidFill>
-                <a:latin typeface="Calibri" pitchFamily="34" charset="0"/>
-                <a:ea typeface="Calibri" pitchFamily="34" charset="-122"/>
-                <a:cs typeface="Calibri" pitchFamily="34" charset="-120"/>
+                <a:latin typeface="Cambria" pitchFamily="34" charset="0"/>
+                <a:ea typeface="Cambria" pitchFamily="34" charset="-122"/>
+                <a:cs typeface="Cambria" pitchFamily="34" charset="-120"/>
               </a:rPr>
               <a:t>Isolating what the model can do alone</a:t>
             </a:r>
@@ -24694,9 +24702,9 @@
                 <a:solidFill>
                   <a:srgbClr val="DC2626"/>
                 </a:solidFill>
-                <a:latin typeface="Calibri" pitchFamily="34" charset="0"/>
-                <a:ea typeface="Calibri" pitchFamily="34" charset="-122"/>
-                <a:cs typeface="Calibri" pitchFamily="34" charset="-120"/>
+                <a:latin typeface="Cambria" pitchFamily="34" charset="0"/>
+                <a:ea typeface="Cambria" pitchFamily="34" charset="-122"/>
+                <a:cs typeface="Cambria" pitchFamily="34" charset="-120"/>
               </a:rPr>
               <a:t>INTRINSIC (Paper Scope)</a:t>
             </a:r>
@@ -24799,9 +24807,9 @@
                 <a:solidFill>
                   <a:srgbClr val="0F172A"/>
                 </a:solidFill>
-                <a:latin typeface="Calibri" pitchFamily="34" charset="0"/>
-                <a:ea typeface="Calibri" pitchFamily="34" charset="-122"/>
-                <a:cs typeface="Calibri" pitchFamily="34" charset="-120"/>
+                <a:latin typeface="Cambria" pitchFamily="34" charset="0"/>
+                <a:ea typeface="Cambria" pitchFamily="34" charset="-122"/>
+                <a:cs typeface="Cambria" pitchFamily="34" charset="-120"/>
               </a:rPr>
               <a:t>LLM generates answer</a:t>
             </a:r>
@@ -24863,9 +24871,9 @@
                 <a:solidFill>
                   <a:srgbClr val="D97706"/>
                 </a:solidFill>
-                <a:latin typeface="Calibri" pitchFamily="34" charset="0"/>
-                <a:ea typeface="Calibri" pitchFamily="34" charset="-122"/>
-                <a:cs typeface="Calibri" pitchFamily="34" charset="-120"/>
+                <a:latin typeface="Cambria" pitchFamily="34" charset="0"/>
+                <a:ea typeface="Cambria" pitchFamily="34" charset="-122"/>
+                <a:cs typeface="Cambria" pitchFamily="34" charset="-120"/>
               </a:rPr>
               <a:t>?</a:t>
             </a:r>
@@ -24902,9 +24910,9 @@
                 <a:solidFill>
                   <a:srgbClr val="1E293B"/>
                 </a:solidFill>
-                <a:latin typeface="Calibri" pitchFamily="34" charset="0"/>
-                <a:ea typeface="Calibri" pitchFamily="34" charset="-122"/>
-                <a:cs typeface="Calibri" pitchFamily="34" charset="-120"/>
+                <a:latin typeface="Cambria" pitchFamily="34" charset="0"/>
+                <a:ea typeface="Cambria" pitchFamily="34" charset="-122"/>
+                <a:cs typeface="Cambria" pitchFamily="34" charset="-120"/>
               </a:rPr>
               <a:t>Self-check: Any error?</a:t>
             </a:r>
@@ -24968,9 +24976,9 @@
                 <a:solidFill>
                   <a:srgbClr val="0F172A"/>
                 </a:solidFill>
-                <a:latin typeface="Calibri" pitchFamily="34" charset="0"/>
-                <a:ea typeface="Calibri" pitchFamily="34" charset="-122"/>
-                <a:cs typeface="Calibri" pitchFamily="34" charset="-120"/>
+                <a:latin typeface="Cambria" pitchFamily="34" charset="0"/>
+                <a:ea typeface="Cambria" pitchFamily="34" charset="-122"/>
+                <a:cs typeface="Cambria" pitchFamily="34" charset="-120"/>
               </a:rPr>
               <a:t>Same model revises</a:t>
             </a:r>
@@ -25084,9 +25092,9 @@
                 <a:solidFill>
                   <a:srgbClr val="DC2626"/>
                 </a:solidFill>
-                <a:latin typeface="Calibri" pitchFamily="34" charset="0"/>
-                <a:ea typeface="Calibri" pitchFamily="34" charset="-122"/>
-                <a:cs typeface="Calibri" pitchFamily="34" charset="-120"/>
+                <a:latin typeface="Cambria" pitchFamily="34" charset="0"/>
+                <a:ea typeface="Cambria" pitchFamily="34" charset="-122"/>
+                <a:cs typeface="Cambria" pitchFamily="34" charset="-120"/>
               </a:rPr>
               <a:t>Result: FAILS -&gt; accuracy drops</a:t>
             </a:r>
@@ -25150,9 +25158,9 @@
                 <a:solidFill>
                   <a:srgbClr val="166534"/>
                 </a:solidFill>
-                <a:latin typeface="Calibri" pitchFamily="34" charset="0"/>
-                <a:ea typeface="Calibri" pitchFamily="34" charset="-122"/>
-                <a:cs typeface="Calibri" pitchFamily="34" charset="-120"/>
+                <a:latin typeface="Cambria" pitchFamily="34" charset="0"/>
+                <a:ea typeface="Cambria" pitchFamily="34" charset="-122"/>
+                <a:cs typeface="Cambria" pitchFamily="34" charset="-120"/>
               </a:rPr>
               <a:t>EXTERNAL / TOOL-ASSISTED</a:t>
             </a:r>
@@ -25255,9 +25263,9 @@
                 <a:solidFill>
                   <a:srgbClr val="0F172A"/>
                 </a:solidFill>
-                <a:latin typeface="Calibri" pitchFamily="34" charset="0"/>
-                <a:ea typeface="Calibri" pitchFamily="34" charset="-122"/>
-                <a:cs typeface="Calibri" pitchFamily="34" charset="-120"/>
+                <a:latin typeface="Cambria" pitchFamily="34" charset="0"/>
+                <a:ea typeface="Cambria" pitchFamily="34" charset="-122"/>
+                <a:cs typeface="Cambria" pitchFamily="34" charset="-120"/>
               </a:rPr>
               <a:t>LLM generates answer</a:t>
             </a:r>
@@ -25319,9 +25327,9 @@
                 <a:solidFill>
                   <a:srgbClr val="166534"/>
                 </a:solidFill>
-                <a:latin typeface="Calibri" pitchFamily="34" charset="0"/>
-                <a:ea typeface="Calibri" pitchFamily="34" charset="-122"/>
-                <a:cs typeface="Calibri" pitchFamily="34" charset="-120"/>
+                <a:latin typeface="Cambria" pitchFamily="34" charset="0"/>
+                <a:ea typeface="Cambria" pitchFamily="34" charset="-122"/>
+                <a:cs typeface="Cambria" pitchFamily="34" charset="-120"/>
               </a:rPr>
               <a:t>✓</a:t>
             </a:r>
@@ -25358,9 +25366,9 @@
                 <a:solidFill>
                   <a:srgbClr val="1E293B"/>
                 </a:solidFill>
-                <a:latin typeface="Calibri" pitchFamily="34" charset="0"/>
-                <a:ea typeface="Calibri" pitchFamily="34" charset="-122"/>
-                <a:cs typeface="Calibri" pitchFamily="34" charset="-120"/>
+                <a:latin typeface="Cambria" pitchFamily="34" charset="0"/>
+                <a:ea typeface="Cambria" pitchFamily="34" charset="-122"/>
+                <a:cs typeface="Cambria" pitchFamily="34" charset="-120"/>
               </a:rPr>
               <a:t>Tool checks: Python / Oracle</a:t>
             </a:r>
@@ -25424,9 +25432,9 @@
                 <a:solidFill>
                   <a:srgbClr val="0F172A"/>
                 </a:solidFill>
-                <a:latin typeface="Calibri" pitchFamily="34" charset="0"/>
-                <a:ea typeface="Calibri" pitchFamily="34" charset="-122"/>
-                <a:cs typeface="Calibri" pitchFamily="34" charset="-120"/>
+                <a:latin typeface="Cambria" pitchFamily="34" charset="0"/>
+                <a:ea typeface="Cambria" pitchFamily="34" charset="-122"/>
+                <a:cs typeface="Cambria" pitchFamily="34" charset="-120"/>
               </a:rPr>
               <a:t>Guided revision</a:t>
             </a:r>
@@ -25540,9 +25548,9 @@
                 <a:solidFill>
                   <a:srgbClr val="166534"/>
                 </a:solidFill>
-                <a:latin typeface="Calibri" pitchFamily="34" charset="0"/>
-                <a:ea typeface="Calibri" pitchFamily="34" charset="-122"/>
-                <a:cs typeface="Calibri" pitchFamily="34" charset="-120"/>
+                <a:latin typeface="Cambria" pitchFamily="34" charset="0"/>
+                <a:ea typeface="Cambria" pitchFamily="34" charset="-122"/>
+                <a:cs typeface="Cambria" pitchFamily="34" charset="-120"/>
               </a:rPr>
               <a:t>Result: CAN succeed -&gt; new signal</a:t>
             </a:r>
@@ -25579,9 +25587,9 @@
                 <a:solidFill>
                   <a:srgbClr val="64748B"/>
                 </a:solidFill>
-                <a:latin typeface="Calibri" pitchFamily="34" charset="0"/>
-                <a:ea typeface="Calibri" pitchFamily="34" charset="-122"/>
-                <a:cs typeface="Calibri" pitchFamily="34" charset="-120"/>
+                <a:latin typeface="Cambria" pitchFamily="34" charset="0"/>
+                <a:ea typeface="Cambria" pitchFamily="34" charset="-122"/>
+                <a:cs typeface="Cambria" pitchFamily="34" charset="-120"/>
               </a:rPr>
               <a:t>Large Language Models Cannot Self-Correct Reasoning Yet | ICLR 2024</a:t>
             </a:r>
@@ -25618,9 +25626,9 @@
                 <a:solidFill>
                   <a:srgbClr val="64748B"/>
                 </a:solidFill>
-                <a:latin typeface="Calibri" pitchFamily="34" charset="0"/>
-                <a:ea typeface="Calibri" pitchFamily="34" charset="-122"/>
-                <a:cs typeface="Calibri" pitchFamily="34" charset="-120"/>
+                <a:latin typeface="Cambria" pitchFamily="34" charset="0"/>
+                <a:ea typeface="Cambria" pitchFamily="34" charset="-122"/>
+                <a:cs typeface="Cambria" pitchFamily="34" charset="-120"/>
               </a:rPr>
               <a:t>07/23</a:t>
             </a:r>
@@ -25689,9 +25697,9 @@
                 <a:solidFill>
                   <a:srgbClr val="800020"/>
                 </a:solidFill>
-                <a:latin typeface="Calibri" pitchFamily="34" charset="0"/>
-                <a:ea typeface="Calibri" pitchFamily="34" charset="-122"/>
-                <a:cs typeface="Calibri" pitchFamily="34" charset="-120"/>
+                <a:latin typeface="Cambria" pitchFamily="34" charset="0"/>
+                <a:ea typeface="Cambria" pitchFamily="34" charset="-122"/>
+                <a:cs typeface="Cambria" pitchFamily="34" charset="-120"/>
               </a:rPr>
               <a:t>2. BACKGROUND &amp; RELATED WORK</a:t>
             </a:r>
@@ -25767,9 +25775,9 @@
                 <a:solidFill>
                   <a:srgbClr val="64748B"/>
                 </a:solidFill>
-                <a:latin typeface="Calibri" pitchFamily="34" charset="0"/>
-                <a:ea typeface="Calibri" pitchFamily="34" charset="-122"/>
-                <a:cs typeface="Calibri" pitchFamily="34" charset="-120"/>
+                <a:latin typeface="Cambria" pitchFamily="34" charset="0"/>
+                <a:ea typeface="Cambria" pitchFamily="34" charset="-122"/>
+                <a:cs typeface="Cambria" pitchFamily="34" charset="-120"/>
               </a:rPr>
               <a:t>Why reported gains were confounded (Table 1)</a:t>
             </a:r>
@@ -26024,16 +26032,16 @@
                           <a:solidFill>
                             <a:srgbClr val="000000"/>
                           </a:solidFill>
-                          <a:latin typeface="Calibri" pitchFamily="34" charset="0"/>
-                          <a:ea typeface="Calibri" pitchFamily="34" charset="-122"/>
-                          <a:cs typeface="Calibri" pitchFamily="34" charset="-120"/>
+                          <a:latin typeface="Cambria" pitchFamily="34" charset="0"/>
+                          <a:ea typeface="Cambria" pitchFamily="34" charset="-122"/>
+                          <a:cs typeface="Cambria" pitchFamily="34" charset="-120"/>
                         </a:rPr>
                         <a:t>RCI</a:t>
                       </a:r>
                       <a:endParaRPr lang="en-US" sz="1000" dirty="0">
-                        <a:latin typeface="Calibri" charset="0"/>
-                        <a:ea typeface="Calibri" charset="0"/>
-                        <a:cs typeface="Calibri" charset="0"/>
+                        <a:latin typeface="Cambria" charset="0"/>
+                        <a:ea typeface="Cambria" charset="0"/>
+                        <a:cs typeface="Cambria" charset="0"/>
                       </a:endParaRPr>
                     </a:p>
                   </a:txBody>
@@ -26092,16 +26100,16 @@
                           <a:solidFill>
                             <a:srgbClr val="DC2626"/>
                           </a:solidFill>
-                          <a:latin typeface="Calibri" pitchFamily="34" charset="0"/>
-                          <a:ea typeface="Calibri" pitchFamily="34" charset="-122"/>
-                          <a:cs typeface="Calibri" pitchFamily="34" charset="-120"/>
+                          <a:latin typeface="Cambria" pitchFamily="34" charset="0"/>
+                          <a:ea typeface="Cambria" pitchFamily="34" charset="-122"/>
+                          <a:cs typeface="Cambria" pitchFamily="34" charset="-120"/>
                         </a:rPr>
                         <a:t>Oracle leakage</a:t>
                       </a:r>
                       <a:endParaRPr lang="en-US" sz="1000" dirty="0">
-                        <a:latin typeface="Calibri" charset="0"/>
-                        <a:ea typeface="Calibri" charset="0"/>
-                        <a:cs typeface="Calibri" charset="0"/>
+                        <a:latin typeface="Cambria" charset="0"/>
+                        <a:ea typeface="Cambria" charset="0"/>
+                        <a:cs typeface="Cambria" charset="0"/>
                       </a:endParaRPr>
                     </a:p>
                   </a:txBody>
@@ -26160,16 +26168,16 @@
                           <a:solidFill>
                             <a:srgbClr val="000000"/>
                           </a:solidFill>
-                          <a:latin typeface="Calibri" pitchFamily="34" charset="0"/>
-                          <a:ea typeface="Calibri" pitchFamily="34" charset="-122"/>
-                          <a:cs typeface="Calibri" pitchFamily="34" charset="-120"/>
+                          <a:latin typeface="Cambria" pitchFamily="34" charset="0"/>
+                          <a:ea typeface="Cambria" pitchFamily="34" charset="-122"/>
+                          <a:cs typeface="Cambria" pitchFamily="34" charset="-120"/>
                         </a:rPr>
                         <a:t>Only corrects when told the answer is wrong</a:t>
                       </a:r>
                       <a:endParaRPr lang="en-US" sz="950" dirty="0">
-                        <a:latin typeface="Calibri" charset="0"/>
-                        <a:ea typeface="Calibri" charset="0"/>
-                        <a:cs typeface="Calibri" charset="0"/>
+                        <a:latin typeface="Cambria" charset="0"/>
+                        <a:ea typeface="Cambria" charset="0"/>
+                        <a:cs typeface="Cambria" charset="0"/>
                       </a:endParaRPr>
                     </a:p>
                   </a:txBody>
@@ -26230,16 +26238,16 @@
                           <a:solidFill>
                             <a:srgbClr val="000000"/>
                           </a:solidFill>
-                          <a:latin typeface="Calibri" pitchFamily="34" charset="0"/>
-                          <a:ea typeface="Calibri" pitchFamily="34" charset="-122"/>
-                          <a:cs typeface="Calibri" pitchFamily="34" charset="-120"/>
+                          <a:latin typeface="Cambria" pitchFamily="34" charset="0"/>
+                          <a:ea typeface="Cambria" pitchFamily="34" charset="-122"/>
+                          <a:cs typeface="Cambria" pitchFamily="34" charset="-120"/>
                         </a:rPr>
                         <a:t>Reflexion</a:t>
                       </a:r>
                       <a:endParaRPr lang="en-US" sz="1000" dirty="0">
-                        <a:latin typeface="Calibri" charset="0"/>
-                        <a:ea typeface="Calibri" charset="0"/>
-                        <a:cs typeface="Calibri" charset="0"/>
+                        <a:latin typeface="Cambria" charset="0"/>
+                        <a:ea typeface="Cambria" charset="0"/>
+                        <a:cs typeface="Cambria" charset="0"/>
                       </a:endParaRPr>
                     </a:p>
                   </a:txBody>
@@ -26298,16 +26306,16 @@
                           <a:solidFill>
                             <a:srgbClr val="DC2626"/>
                           </a:solidFill>
-                          <a:latin typeface="Calibri" pitchFamily="34" charset="0"/>
-                          <a:ea typeface="Calibri" pitchFamily="34" charset="-122"/>
-                          <a:cs typeface="Calibri" pitchFamily="34" charset="-120"/>
+                          <a:latin typeface="Cambria" pitchFamily="34" charset="0"/>
+                          <a:ea typeface="Cambria" pitchFamily="34" charset="-122"/>
+                          <a:cs typeface="Cambria" pitchFamily="34" charset="-120"/>
                         </a:rPr>
                         <a:t>Oracle leakage</a:t>
                       </a:r>
                       <a:endParaRPr lang="en-US" sz="1000" dirty="0">
-                        <a:latin typeface="Calibri" charset="0"/>
-                        <a:ea typeface="Calibri" charset="0"/>
-                        <a:cs typeface="Calibri" charset="0"/>
+                        <a:latin typeface="Cambria" charset="0"/>
+                        <a:ea typeface="Cambria" charset="0"/>
+                        <a:cs typeface="Cambria" charset="0"/>
                       </a:endParaRPr>
                     </a:p>
                   </a:txBody>
@@ -26366,16 +26374,16 @@
                           <a:solidFill>
                             <a:srgbClr val="000000"/>
                           </a:solidFill>
-                          <a:latin typeface="Calibri" pitchFamily="34" charset="0"/>
-                          <a:ea typeface="Calibri" pitchFamily="34" charset="-122"/>
-                          <a:cs typeface="Calibri" pitchFamily="34" charset="-120"/>
+                          <a:latin typeface="Cambria" pitchFamily="34" charset="0"/>
+                          <a:ea typeface="Cambria" pitchFamily="34" charset="-122"/>
+                          <a:cs typeface="Cambria" pitchFamily="34" charset="-120"/>
                         </a:rPr>
                         <a:t>Reflection only when the environment signals failure</a:t>
                       </a:r>
                       <a:endParaRPr lang="en-US" sz="950" dirty="0">
-                        <a:latin typeface="Calibri" charset="0"/>
-                        <a:ea typeface="Calibri" charset="0"/>
-                        <a:cs typeface="Calibri" charset="0"/>
+                        <a:latin typeface="Cambria" charset="0"/>
+                        <a:ea typeface="Cambria" charset="0"/>
+                        <a:cs typeface="Cambria" charset="0"/>
                       </a:endParaRPr>
                     </a:p>
                   </a:txBody>
@@ -26436,16 +26444,16 @@
                           <a:solidFill>
                             <a:srgbClr val="000000"/>
                           </a:solidFill>
-                          <a:latin typeface="Calibri" pitchFamily="34" charset="0"/>
-                          <a:ea typeface="Calibri" pitchFamily="34" charset="-122"/>
-                          <a:cs typeface="Calibri" pitchFamily="34" charset="-120"/>
+                          <a:latin typeface="Cambria" pitchFamily="34" charset="0"/>
+                          <a:ea typeface="Cambria" pitchFamily="34" charset="-122"/>
+                          <a:cs typeface="Cambria" pitchFamily="34" charset="-120"/>
                         </a:rPr>
                         <a:t>Multi-Agent Debate</a:t>
                       </a:r>
                       <a:endParaRPr lang="en-US" sz="1000" dirty="0">
-                        <a:latin typeface="Calibri" charset="0"/>
-                        <a:ea typeface="Calibri" charset="0"/>
-                        <a:cs typeface="Calibri" charset="0"/>
+                        <a:latin typeface="Cambria" charset="0"/>
+                        <a:ea typeface="Cambria" charset="0"/>
+                        <a:cs typeface="Cambria" charset="0"/>
                       </a:endParaRPr>
                     </a:p>
                   </a:txBody>
@@ -26504,16 +26512,16 @@
                           <a:solidFill>
                             <a:srgbClr val="D97706"/>
                           </a:solidFill>
-                          <a:latin typeface="Calibri" pitchFamily="34" charset="0"/>
-                          <a:ea typeface="Calibri" pitchFamily="34" charset="-122"/>
-                          <a:cs typeface="Calibri" pitchFamily="34" charset="-120"/>
+                          <a:latin typeface="Cambria" pitchFamily="34" charset="0"/>
+                          <a:ea typeface="Cambria" pitchFamily="34" charset="-122"/>
+                          <a:cs typeface="Cambria" pitchFamily="34" charset="-120"/>
                         </a:rPr>
                         <a:t>Unfair compute</a:t>
                       </a:r>
                       <a:endParaRPr lang="en-US" sz="1000" dirty="0">
-                        <a:latin typeface="Calibri" charset="0"/>
-                        <a:ea typeface="Calibri" charset="0"/>
-                        <a:cs typeface="Calibri" charset="0"/>
+                        <a:latin typeface="Cambria" charset="0"/>
+                        <a:ea typeface="Cambria" charset="0"/>
+                        <a:cs typeface="Cambria" charset="0"/>
                       </a:endParaRPr>
                     </a:p>
                   </a:txBody>
@@ -26572,16 +26580,16 @@
                           <a:solidFill>
                             <a:srgbClr val="000000"/>
                           </a:solidFill>
-                          <a:latin typeface="Calibri" pitchFamily="34" charset="0"/>
-                          <a:ea typeface="Calibri" pitchFamily="34" charset="-122"/>
-                          <a:cs typeface="Calibri" pitchFamily="34" charset="-120"/>
+                          <a:latin typeface="Cambria" pitchFamily="34" charset="0"/>
+                          <a:ea typeface="Cambria" pitchFamily="34" charset="-122"/>
+                          <a:cs typeface="Cambria" pitchFamily="34" charset="-120"/>
                         </a:rPr>
                         <a:t>Compared to single shot, not equal sampling budget</a:t>
                       </a:r>
                       <a:endParaRPr lang="en-US" sz="950" dirty="0">
-                        <a:latin typeface="Calibri" charset="0"/>
-                        <a:ea typeface="Calibri" charset="0"/>
-                        <a:cs typeface="Calibri" charset="0"/>
+                        <a:latin typeface="Cambria" charset="0"/>
+                        <a:ea typeface="Cambria" charset="0"/>
+                        <a:cs typeface="Cambria" charset="0"/>
                       </a:endParaRPr>
                     </a:p>
                   </a:txBody>
@@ -26642,16 +26650,16 @@
                           <a:solidFill>
                             <a:srgbClr val="000000"/>
                           </a:solidFill>
-                          <a:latin typeface="Calibri" pitchFamily="34" charset="0"/>
-                          <a:ea typeface="Calibri" pitchFamily="34" charset="-122"/>
-                          <a:cs typeface="Calibri" pitchFamily="34" charset="-120"/>
+                          <a:latin typeface="Cambria" pitchFamily="34" charset="0"/>
+                          <a:ea typeface="Cambria" pitchFamily="34" charset="-122"/>
+                          <a:cs typeface="Cambria" pitchFamily="34" charset="-120"/>
                         </a:rPr>
                         <a:t>Self-Refine</a:t>
                       </a:r>
                       <a:endParaRPr lang="en-US" sz="1000" dirty="0">
-                        <a:latin typeface="Calibri" charset="0"/>
-                        <a:ea typeface="Calibri" charset="0"/>
-                        <a:cs typeface="Calibri" charset="0"/>
+                        <a:latin typeface="Cambria" charset="0"/>
+                        <a:ea typeface="Cambria" charset="0"/>
+                        <a:cs typeface="Cambria" charset="0"/>
                       </a:endParaRPr>
                     </a:p>
                   </a:txBody>
@@ -26710,16 +26718,16 @@
                           <a:solidFill>
                             <a:srgbClr val="D97706"/>
                           </a:solidFill>
-                          <a:latin typeface="Calibri" pitchFamily="34" charset="0"/>
-                          <a:ea typeface="Calibri" pitchFamily="34" charset="-122"/>
-                          <a:cs typeface="Calibri" pitchFamily="34" charset="-120"/>
+                          <a:latin typeface="Cambria" pitchFamily="34" charset="0"/>
+                          <a:ea typeface="Cambria" pitchFamily="34" charset="-122"/>
+                          <a:cs typeface="Cambria" pitchFamily="34" charset="-120"/>
                         </a:rPr>
                         <a:t>Weak initial prompt</a:t>
                       </a:r>
                       <a:endParaRPr lang="en-US" sz="1000" dirty="0">
-                        <a:latin typeface="Calibri" charset="0"/>
-                        <a:ea typeface="Calibri" charset="0"/>
-                        <a:cs typeface="Calibri" charset="0"/>
+                        <a:latin typeface="Cambria" charset="0"/>
+                        <a:ea typeface="Cambria" charset="0"/>
+                        <a:cs typeface="Cambria" charset="0"/>
                       </a:endParaRPr>
                     </a:p>
                   </a:txBody>
@@ -26778,16 +26786,16 @@
                           <a:solidFill>
                             <a:srgbClr val="000000"/>
                           </a:solidFill>
-                          <a:latin typeface="Calibri" pitchFamily="34" charset="0"/>
-                          <a:ea typeface="Calibri" pitchFamily="34" charset="-122"/>
-                          <a:cs typeface="Calibri" pitchFamily="34" charset="-120"/>
+                          <a:latin typeface="Cambria" pitchFamily="34" charset="0"/>
+                          <a:ea typeface="Cambria" pitchFamily="34" charset="-122"/>
+                          <a:cs typeface="Cambria" pitchFamily="34" charset="-120"/>
                         </a:rPr>
                         <a:t>Missing constraints added only in feedback step</a:t>
                       </a:r>
                       <a:endParaRPr lang="en-US" sz="950" dirty="0">
-                        <a:latin typeface="Calibri" charset="0"/>
-                        <a:ea typeface="Calibri" charset="0"/>
-                        <a:cs typeface="Calibri" charset="0"/>
+                        <a:latin typeface="Cambria" charset="0"/>
+                        <a:ea typeface="Cambria" charset="0"/>
+                        <a:cs typeface="Cambria" charset="0"/>
                       </a:endParaRPr>
                     </a:p>
                   </a:txBody>
@@ -26867,9 +26875,9 @@
                 <a:solidFill>
                   <a:srgbClr val="64748B"/>
                 </a:solidFill>
-                <a:latin typeface="Calibri" pitchFamily="34" charset="0"/>
-                <a:ea typeface="Calibri" pitchFamily="34" charset="-122"/>
-                <a:cs typeface="Calibri" pitchFamily="34" charset="-120"/>
+                <a:latin typeface="Cambria" pitchFamily="34" charset="0"/>
+                <a:ea typeface="Cambria" pitchFamily="34" charset="-122"/>
+                <a:cs typeface="Cambria" pitchFamily="34" charset="-120"/>
               </a:rPr>
               <a:t>Table 1: Evaluation confounders in prior self-correction studies</a:t>
             </a:r>
@@ -26933,9 +26941,9 @@
                 <a:solidFill>
                   <a:srgbClr val="800020"/>
                 </a:solidFill>
-                <a:latin typeface="Calibri" pitchFamily="34" charset="0"/>
-                <a:ea typeface="Calibri" pitchFamily="34" charset="-122"/>
-                <a:cs typeface="Calibri" pitchFamily="34" charset="-120"/>
+                <a:latin typeface="Cambria" pitchFamily="34" charset="0"/>
+                <a:ea typeface="Cambria" pitchFamily="34" charset="-122"/>
+                <a:cs typeface="Cambria" pitchFamily="34" charset="-120"/>
               </a:rPr>
               <a:t>When confounders removed, reasoning gains disappear.</a:t>
             </a:r>
@@ -26972,9 +26980,9 @@
                 <a:solidFill>
                   <a:srgbClr val="64748B"/>
                 </a:solidFill>
-                <a:latin typeface="Calibri" pitchFamily="34" charset="0"/>
-                <a:ea typeface="Calibri" pitchFamily="34" charset="-122"/>
-                <a:cs typeface="Calibri" pitchFamily="34" charset="-120"/>
+                <a:latin typeface="Cambria" pitchFamily="34" charset="0"/>
+                <a:ea typeface="Cambria" pitchFamily="34" charset="-122"/>
+                <a:cs typeface="Cambria" pitchFamily="34" charset="-120"/>
               </a:rPr>
               <a:t>Large Language Models Cannot Self-Correct Reasoning Yet | ICLR 2024</a:t>
             </a:r>
@@ -27011,9 +27019,9 @@
                 <a:solidFill>
                   <a:srgbClr val="64748B"/>
                 </a:solidFill>
-                <a:latin typeface="Calibri" pitchFamily="34" charset="0"/>
-                <a:ea typeface="Calibri" pitchFamily="34" charset="-122"/>
-                <a:cs typeface="Calibri" pitchFamily="34" charset="-120"/>
+                <a:latin typeface="Cambria" pitchFamily="34" charset="0"/>
+                <a:ea typeface="Cambria" pitchFamily="34" charset="-122"/>
+                <a:cs typeface="Cambria" pitchFamily="34" charset="-120"/>
               </a:rPr>
               <a:t>08/23</a:t>
             </a:r>
@@ -27082,9 +27090,9 @@
                 <a:solidFill>
                   <a:srgbClr val="800020"/>
                 </a:solidFill>
-                <a:latin typeface="Calibri" pitchFamily="34" charset="0"/>
-                <a:ea typeface="Calibri" pitchFamily="34" charset="-122"/>
-                <a:cs typeface="Calibri" pitchFamily="34" charset="-120"/>
+                <a:latin typeface="Cambria" pitchFamily="34" charset="0"/>
+                <a:ea typeface="Cambria" pitchFamily="34" charset="-122"/>
+                <a:cs typeface="Cambria" pitchFamily="34" charset="-120"/>
               </a:rPr>
               <a:t>3. METHODOLOGY</a:t>
             </a:r>
@@ -27160,9 +27168,9 @@
                 <a:solidFill>
                   <a:srgbClr val="64748B"/>
                 </a:solidFill>
-                <a:latin typeface="Calibri" pitchFamily="34" charset="0"/>
-                <a:ea typeface="Calibri" pitchFamily="34" charset="-122"/>
-                <a:cs typeface="Calibri" pitchFamily="34" charset="-120"/>
+                <a:latin typeface="Cambria" pitchFamily="34" charset="0"/>
+                <a:ea typeface="Cambria" pitchFamily="34" charset="-122"/>
+                <a:cs typeface="Cambria" pitchFamily="34" charset="-120"/>
               </a:rPr>
               <a:t>Three reasoning tasks covering math, logic, multi-hop QA</a:t>
             </a:r>
@@ -27265,9 +27273,9 @@
                 <a:solidFill>
                   <a:srgbClr val="64748B"/>
                 </a:solidFill>
-                <a:latin typeface="Calibri" pitchFamily="34" charset="0"/>
-                <a:ea typeface="Calibri" pitchFamily="34" charset="-122"/>
-                <a:cs typeface="Calibri" pitchFamily="34" charset="-120"/>
+                <a:latin typeface="Cambria" pitchFamily="34" charset="0"/>
+                <a:ea typeface="Cambria" pitchFamily="34" charset="-122"/>
+                <a:cs typeface="Cambria" pitchFamily="34" charset="-120"/>
               </a:rPr>
               <a:t>math problems</a:t>
             </a:r>
@@ -27370,9 +27378,9 @@
                 <a:solidFill>
                   <a:srgbClr val="64748B"/>
                 </a:solidFill>
-                <a:latin typeface="Calibri" pitchFamily="34" charset="0"/>
-                <a:ea typeface="Calibri" pitchFamily="34" charset="-122"/>
-                <a:cs typeface="Calibri" pitchFamily="34" charset="-120"/>
+                <a:latin typeface="Cambria" pitchFamily="34" charset="0"/>
+                <a:ea typeface="Cambria" pitchFamily="34" charset="-122"/>
+                <a:cs typeface="Cambria" pitchFamily="34" charset="-120"/>
               </a:rPr>
               <a:t>Grade School Math</a:t>
             </a:r>
@@ -27412,9 +27420,9 @@
                 <a:solidFill>
                   <a:srgbClr val="1E293B"/>
                 </a:solidFill>
-                <a:latin typeface="Calibri" pitchFamily="34" charset="0"/>
-                <a:ea typeface="Calibri" pitchFamily="34" charset="-122"/>
-                <a:cs typeface="Calibri" pitchFamily="34" charset="-120"/>
+                <a:latin typeface="Cambria" pitchFamily="34" charset="0"/>
+                <a:ea typeface="Cambria" pitchFamily="34" charset="-122"/>
+                <a:cs typeface="Cambria" pitchFamily="34" charset="-120"/>
               </a:rPr>
               <a:t>2-8 step arithmetic.</a:t>
             </a:r>
@@ -27432,9 +27440,9 @@
                 <a:solidFill>
                   <a:srgbClr val="1E293B"/>
                 </a:solidFill>
-                <a:latin typeface="Calibri" pitchFamily="34" charset="0"/>
-                <a:ea typeface="Calibri" pitchFamily="34" charset="-122"/>
-                <a:cs typeface="Calibri" pitchFamily="34" charset="-120"/>
+                <a:latin typeface="Cambria" pitchFamily="34" charset="0"/>
+                <a:ea typeface="Cambria" pitchFamily="34" charset="-122"/>
+                <a:cs typeface="Cambria" pitchFamily="34" charset="-120"/>
               </a:rPr>
               <a:t>Tracks state &amp; logic.</a:t>
             </a:r>
@@ -27498,9 +27506,9 @@
                 <a:solidFill>
                   <a:srgbClr val="5C0017"/>
                 </a:solidFill>
-                <a:latin typeface="Calibri" pitchFamily="34" charset="0"/>
-                <a:ea typeface="Calibri" pitchFamily="34" charset="-122"/>
-                <a:cs typeface="Calibri" pitchFamily="34" charset="-120"/>
+                <a:latin typeface="Cambria" pitchFamily="34" charset="0"/>
+                <a:ea typeface="Cambria" pitchFamily="34" charset="-122"/>
+                <a:cs typeface="Cambria" pitchFamily="34" charset="-120"/>
               </a:rPr>
               <a:t>Prior: +7% with oracle</a:t>
             </a:r>
@@ -27603,9 +27611,9 @@
                 <a:solidFill>
                   <a:srgbClr val="64748B"/>
                 </a:solidFill>
-                <a:latin typeface="Calibri" pitchFamily="34" charset="0"/>
-                <a:ea typeface="Calibri" pitchFamily="34" charset="-122"/>
-                <a:cs typeface="Calibri" pitchFamily="34" charset="-120"/>
+                <a:latin typeface="Cambria" pitchFamily="34" charset="0"/>
+                <a:ea typeface="Cambria" pitchFamily="34" charset="-122"/>
+                <a:cs typeface="Cambria" pitchFamily="34" charset="-120"/>
               </a:rPr>
               <a:t>multiple-choice</a:t>
             </a:r>
@@ -27708,9 +27716,9 @@
                 <a:solidFill>
                   <a:srgbClr val="64748B"/>
                 </a:solidFill>
-                <a:latin typeface="Calibri" pitchFamily="34" charset="0"/>
-                <a:ea typeface="Calibri" pitchFamily="34" charset="-122"/>
-                <a:cs typeface="Calibri" pitchFamily="34" charset="-120"/>
+                <a:latin typeface="Cambria" pitchFamily="34" charset="0"/>
+                <a:ea typeface="Cambria" pitchFamily="34" charset="-122"/>
+                <a:cs typeface="Cambria" pitchFamily="34" charset="-120"/>
               </a:rPr>
               <a:t>Commonsense Logic</a:t>
             </a:r>
@@ -27750,9 +27758,9 @@
                 <a:solidFill>
                   <a:srgbClr val="1E293B"/>
                 </a:solidFill>
-                <a:latin typeface="Calibri" pitchFamily="34" charset="0"/>
-                <a:ea typeface="Calibri" pitchFamily="34" charset="-122"/>
-                <a:cs typeface="Calibri" pitchFamily="34" charset="-120"/>
+                <a:latin typeface="Cambria" pitchFamily="34" charset="0"/>
+                <a:ea typeface="Cambria" pitchFamily="34" charset="-122"/>
+                <a:cs typeface="Cambria" pitchFamily="34" charset="-120"/>
               </a:rPr>
               <a:t>5-choice QA.</a:t>
             </a:r>
@@ -27770,9 +27778,9 @@
                 <a:solidFill>
                   <a:srgbClr val="1E293B"/>
                 </a:solidFill>
-                <a:latin typeface="Calibri" pitchFamily="34" charset="0"/>
-                <a:ea typeface="Calibri" pitchFamily="34" charset="-122"/>
-                <a:cs typeface="Calibri" pitchFamily="34" charset="-120"/>
+                <a:latin typeface="Cambria" pitchFamily="34" charset="0"/>
+                <a:ea typeface="Cambria" pitchFamily="34" charset="-122"/>
+                <a:cs typeface="Cambria" pitchFamily="34" charset="-120"/>
               </a:rPr>
               <a:t>Subtle distractors.</a:t>
             </a:r>
@@ -27836,9 +27844,9 @@
                 <a:solidFill>
                   <a:srgbClr val="5C0017"/>
                 </a:solidFill>
-                <a:latin typeface="Calibri" pitchFamily="34" charset="0"/>
-                <a:ea typeface="Calibri" pitchFamily="34" charset="-122"/>
-                <a:cs typeface="Calibri" pitchFamily="34" charset="-120"/>
+                <a:latin typeface="Cambria" pitchFamily="34" charset="0"/>
+                <a:ea typeface="Cambria" pitchFamily="34" charset="-122"/>
+                <a:cs typeface="Cambria" pitchFamily="34" charset="-120"/>
               </a:rPr>
               <a:t>Prior: +15% with oracle</a:t>
             </a:r>
@@ -27941,9 +27949,9 @@
                 <a:solidFill>
                   <a:srgbClr val="64748B"/>
                 </a:solidFill>
-                <a:latin typeface="Calibri" pitchFamily="34" charset="0"/>
-                <a:ea typeface="Calibri" pitchFamily="34" charset="-122"/>
-                <a:cs typeface="Calibri" pitchFamily="34" charset="-120"/>
+                <a:latin typeface="Cambria" pitchFamily="34" charset="0"/>
+                <a:ea typeface="Cambria" pitchFamily="34" charset="-122"/>
+                <a:cs typeface="Cambria" pitchFamily="34" charset="-120"/>
               </a:rPr>
               <a:t>samples</a:t>
             </a:r>
@@ -28046,9 +28054,9 @@
                 <a:solidFill>
                   <a:srgbClr val="64748B"/>
                 </a:solidFill>
-                <a:latin typeface="Calibri" pitchFamily="34" charset="0"/>
-                <a:ea typeface="Calibri" pitchFamily="34" charset="-122"/>
-                <a:cs typeface="Calibri" pitchFamily="34" charset="-120"/>
+                <a:latin typeface="Cambria" pitchFamily="34" charset="0"/>
+                <a:ea typeface="Cambria" pitchFamily="34" charset="-122"/>
+                <a:cs typeface="Cambria" pitchFamily="34" charset="-120"/>
               </a:rPr>
               <a:t>Fact Synthesis</a:t>
             </a:r>
@@ -28088,9 +28096,9 @@
                 <a:solidFill>
                   <a:srgbClr val="1E293B"/>
                 </a:solidFill>
-                <a:latin typeface="Calibri" pitchFamily="34" charset="0"/>
-                <a:ea typeface="Calibri" pitchFamily="34" charset="-122"/>
-                <a:cs typeface="Calibri" pitchFamily="34" charset="-120"/>
+                <a:latin typeface="Cambria" pitchFamily="34" charset="0"/>
+                <a:ea typeface="Cambria" pitchFamily="34" charset="-122"/>
+                <a:cs typeface="Cambria" pitchFamily="34" charset="-120"/>
               </a:rPr>
               <a:t>Closed-book multi-hop.</a:t>
             </a:r>
@@ -28108,9 +28116,9 @@
                 <a:solidFill>
                   <a:srgbClr val="1E293B"/>
                 </a:solidFill>
-                <a:latin typeface="Calibri" pitchFamily="34" charset="0"/>
-                <a:ea typeface="Calibri" pitchFamily="34" charset="-122"/>
-                <a:cs typeface="Calibri" pitchFamily="34" charset="-120"/>
+                <a:latin typeface="Cambria" pitchFamily="34" charset="0"/>
+                <a:ea typeface="Cambria" pitchFamily="34" charset="-122"/>
+                <a:cs typeface="Cambria" pitchFamily="34" charset="-120"/>
               </a:rPr>
               <a:t>Exact Match.</a:t>
             </a:r>
@@ -28174,9 +28182,9 @@
                 <a:solidFill>
                   <a:srgbClr val="5C0017"/>
                 </a:solidFill>
-                <a:latin typeface="Calibri" pitchFamily="34" charset="0"/>
-                <a:ea typeface="Calibri" pitchFamily="34" charset="-122"/>
-                <a:cs typeface="Calibri" pitchFamily="34" charset="-120"/>
+                <a:latin typeface="Cambria" pitchFamily="34" charset="0"/>
+                <a:ea typeface="Cambria" pitchFamily="34" charset="-122"/>
+                <a:cs typeface="Cambria" pitchFamily="34" charset="-120"/>
               </a:rPr>
               <a:t>Prior: gains via reflection</a:t>
             </a:r>
@@ -28213,9 +28221,9 @@
                 <a:solidFill>
                   <a:srgbClr val="64748B"/>
                 </a:solidFill>
-                <a:latin typeface="Calibri" pitchFamily="34" charset="0"/>
-                <a:ea typeface="Calibri" pitchFamily="34" charset="-122"/>
-                <a:cs typeface="Calibri" pitchFamily="34" charset="-120"/>
+                <a:latin typeface="Cambria" pitchFamily="34" charset="0"/>
+                <a:ea typeface="Cambria" pitchFamily="34" charset="-122"/>
+                <a:cs typeface="Cambria" pitchFamily="34" charset="-120"/>
               </a:rPr>
               <a:t>Large Language Models Cannot Self-Correct Reasoning Yet | ICLR 2024</a:t>
             </a:r>
@@ -28252,9 +28260,9 @@
                 <a:solidFill>
                   <a:srgbClr val="64748B"/>
                 </a:solidFill>
-                <a:latin typeface="Calibri" pitchFamily="34" charset="0"/>
-                <a:ea typeface="Calibri" pitchFamily="34" charset="-122"/>
-                <a:cs typeface="Calibri" pitchFamily="34" charset="-120"/>
+                <a:latin typeface="Cambria" pitchFamily="34" charset="0"/>
+                <a:ea typeface="Cambria" pitchFamily="34" charset="-122"/>
+                <a:cs typeface="Cambria" pitchFamily="34" charset="-120"/>
               </a:rPr>
               <a:t>09/23</a:t>
             </a:r>
